--- a/docs/Medicus-presentation-en.pptx
+++ b/docs/Medicus-presentation-en.pptx
@@ -33,9 +33,15 @@
     <p:sldId id="281" r:id="rId27"/>
     <p:sldId id="282" r:id="rId28"/>
     <p:sldId id="283" r:id="rId29"/>
+    <p:sldId id="284" r:id="rId30"/>
+    <p:sldId id="285" r:id="rId31"/>
+    <p:sldId id="286" r:id="rId32"/>
+    <p:sldId id="287" r:id="rId33"/>
+    <p:sldId id="288" r:id="rId34"/>
+    <p:sldId id="289" r:id="rId35"/>
   </p:sldIdLst>
   <p:notesMasterIdLst>
-    <p:notesMasterId r:id="rId30"/>
+    <p:notesMasterId r:id="rId36"/>
   </p:notesMasterIdLst>
   <p:sldSz cx="12192000" cy="6858000"/>
   <p:notesSz cx="6858000" cy="12192000"/>
@@ -134,40 +140,40 @@
   <p:extLst>
     <p:ext uri="{521415D9-36F7-43E2-AB2F-B90AF26B5E84}">
       <p14:sectionLst xmlns:p14="http://schemas.microsoft.com/office/powerpoint/2010/main">
-        <p14:section name="Introduction" id="{62d6902a-7a5e-dd49-08bb-eae18d1caaf9}">
+        <p14:section name="Introduction" id="{91655dba-37b6-4274-d04b-b2f848ea4711}">
           <p14:sldIdLst>
             <p14:sldId id="256"/>
             <p14:sldId id="257"/>
           </p14:sldIdLst>
         </p14:section>
-        <p14:section name="Start-up" id="{601d5d46-cc80-c986-46ed-3436b1960188}">
+        <p14:section name="Start-up" id="{87c6e6fc-85aa-2211-5d8f-c57bc3117d53}">
           <p14:sldIdLst>
             <p14:sldId id="258"/>
             <p14:sldId id="259"/>
             <p14:sldId id="260"/>
           </p14:sldIdLst>
         </p14:section>
-        <p14:section name="Login" id="{37469501-b9f6-a486-ff1c-62eafa410ac7}">
+        <p14:section name="Login" id="{8d073168-5132-2cdb-7947-318279dd42db}">
           <p14:sldIdLst>
             <p14:sldId id="261"/>
             <p14:sldId id="262"/>
             <p14:sldId id="263"/>
             <p14:sldId id="264"/>
             <p14:sldId id="265"/>
+            <p14:sldId id="266"/>
           </p14:sldIdLst>
         </p14:section>
-        <p14:section name="Desktop" id="{89022bae-9d2a-1ddc-14dc-65ba82038423}">
+        <p14:section name="Desktop" id="{57ead567-ac76-04db-5dee-22385fae30cf}">
           <p14:sldIdLst>
-            <p14:sldId id="266"/>
             <p14:sldId id="267"/>
             <p14:sldId id="268"/>
             <p14:sldId id="269"/>
+            <p14:sldId id="270"/>
+            <p14:sldId id="271"/>
           </p14:sldIdLst>
         </p14:section>
-        <p14:section name="Apps" id="{ae16fbf9-0a32-b493-f765-3449b6525adc}">
+        <p14:section name="Apps" id="{91eca9e2-7d6a-5a72-0317-918ec4d63276}">
           <p14:sldIdLst>
-            <p14:sldId id="270"/>
-            <p14:sldId id="271"/>
             <p14:sldId id="272"/>
             <p14:sldId id="273"/>
             <p14:sldId id="274"/>
@@ -175,19 +181,29 @@
             <p14:sldId id="276"/>
             <p14:sldId id="277"/>
             <p14:sldId id="278"/>
+            <p14:sldId id="279"/>
+            <p14:sldId id="280"/>
+            <p14:sldId id="281"/>
           </p14:sldIdLst>
         </p14:section>
-        <p14:section name="Security" id="{338aa31b-a7be-85b7-4fc9-ee353bd84eb4}">
+        <p14:section name="Security" id="{e775a4ba-213d-3b55-1ef8-daa4d28093f4}">
           <p14:sldIdLst>
-            <p14:sldId id="279"/>
-            <p14:sldId id="280"/>
+            <p14:sldId id="282"/>
+            <p14:sldId id="283"/>
           </p14:sldIdLst>
         </p14:section>
-        <p14:section name="Shutdown" id="{9882540e-1391-7c3f-e49d-a3aadadf77e7}">
+        <p14:section name="Shutdown" id="{94ecca59-9367-7efb-38c3-cfa244e95bc5}">
           <p14:sldIdLst>
-            <p14:sldId id="281"/>
-            <p14:sldId id="282"/>
-            <p14:sldId id="283"/>
+            <p14:sldId id="284"/>
+            <p14:sldId id="285"/>
+          </p14:sldIdLst>
+        </p14:section>
+        <p14:section name="Pilot" id="{c1e949b0-e0d1-1151-9c7b-224a1c40b8da}">
+          <p14:sldIdLst>
+            <p14:sldId id="286"/>
+            <p14:sldId id="287"/>
+            <p14:sldId id="288"/>
+            <p14:sldId id="289"/>
           </p14:sldIdLst>
         </p14:section>
       </p14:sectionLst>
@@ -594,7 +610,7 @@
           <a:p>
             <a:r>
               <a:rPr lang="en-US" dirty="0"/>
-              <a:t>Medicus is a Linux-based operating system for Norwegian healthcare. Every picture in this presentation is a screenshot of the system as it runs, with synthetic test patients and simulated health-worker ID cards. The system itself is in Norwegian.</a:t>
+              <a:t>Medicus is a Linux-based operating system for Norwegian healthcare. Every picture in this presentation is a screenshot of the system as it runs, with synthetic test patients and simulated health-worker ID cards. The system is in Norwegian, with English as a choice on the login screen.</a:t>
             </a:r>
             <a:endParaRPr lang="en-US" dirty="0"/>
           </a:p>
@@ -2396,6 +2412,94 @@
 </p:notes>
 </file>
 
+<file path=ppt/notesSlides/notesSlide29.xml><?xml version="1.0" encoding="utf-8"?>
+<p:notes xmlns:a="http://schemas.openxmlformats.org/drawingml/2006/main" xmlns:r="http://schemas.openxmlformats.org/officeDocument/2006/relationships" xmlns:p="http://schemas.openxmlformats.org/presentationml/2006/main">
+  <p:cSld>
+    <p:spTree>
+      <p:nvGrpSpPr>
+        <p:cNvPr id="1" name=""/>
+        <p:cNvGrpSpPr/>
+        <p:nvPr/>
+      </p:nvGrpSpPr>
+      <p:grpSpPr>
+        <a:xfrm>
+          <a:off x="0" y="0"/>
+          <a:ext cx="0" cy="0"/>
+          <a:chOff x="0" y="0"/>
+          <a:chExt cx="0" cy="0"/>
+        </a:xfrm>
+      </p:grpSpPr>
+      <p:sp>
+        <p:nvSpPr>
+          <p:cNvPr id="2" name="Slide Image Placeholder 1"/>
+          <p:cNvSpPr>
+            <a:spLocks noGrp="1" noRot="1" noChangeAspect="1"/>
+          </p:cNvSpPr>
+          <p:nvPr>
+            <p:ph type="sldImg"/>
+          </p:nvPr>
+        </p:nvSpPr>
+        <p:spPr/>
+      </p:sp>
+      <p:sp>
+        <p:nvSpPr>
+          <p:cNvPr id="3" name="Notes Placeholder 2"/>
+          <p:cNvSpPr>
+            <a:spLocks noGrp="1"/>
+          </p:cNvSpPr>
+          <p:nvPr>
+            <p:ph type="body" idx="1"/>
+          </p:nvPr>
+        </p:nvSpPr>
+        <p:spPr/>
+        <p:txBody>
+          <a:bodyPr/>
+          <a:lstStyle/>
+          <a:p>
+            <a:r>
+              <a:rPr lang="en-US" dirty="0"/>
+              <a:t/>
+            </a:r>
+            <a:endParaRPr lang="en-US" dirty="0"/>
+          </a:p>
+        </p:txBody>
+      </p:sp>
+      <p:sp>
+        <p:nvSpPr>
+          <p:cNvPr id="4" name="Slide Number Placeholder 3"/>
+          <p:cNvSpPr>
+            <a:spLocks noGrp="1"/>
+          </p:cNvSpPr>
+          <p:nvPr>
+            <p:ph type="sldNum" sz="quarter" idx="10"/>
+          </p:nvPr>
+        </p:nvSpPr>
+        <p:spPr/>
+        <p:txBody>
+          <a:bodyPr/>
+          <a:lstStyle/>
+          <a:p>
+            <a:fld id="{F7021451-1387-4CA6-816F-3879F97B5CBC}" type="slidenum">
+              <a:rPr lang="en-US"/>
+              <a:t>29</a:t>
+            </a:fld>
+            <a:endParaRPr lang="en-US"/>
+          </a:p>
+        </p:txBody>
+      </p:sp>
+    </p:spTree>
+    <p:extLst>
+      <p:ext uri="{BB962C8B-B14F-4D97-AF65-F5344CB8AC3E}">
+        <p14:creationId xmlns:p14="http://schemas.microsoft.com/office/powerpoint/2010/main" val="1024086991"/>
+      </p:ext>
+    </p:extLst>
+  </p:cSld>
+  <p:clrMapOvr>
+    <a:masterClrMapping/>
+  </p:clrMapOvr>
+</p:notes>
+</file>
+
 <file path=ppt/notesSlides/notesSlide3.xml><?xml version="1.0" encoding="utf-8"?>
 <p:notes xmlns:a="http://schemas.openxmlformats.org/drawingml/2006/main" xmlns:r="http://schemas.openxmlformats.org/officeDocument/2006/relationships" xmlns:p="http://schemas.openxmlformats.org/presentationml/2006/main">
   <p:cSld>
@@ -2466,6 +2570,446 @@
             <a:fld id="{F7021451-1387-4CA6-816F-3879F97B5CBC}" type="slidenum">
               <a:rPr lang="en-US"/>
               <a:t>3</a:t>
+            </a:fld>
+            <a:endParaRPr lang="en-US"/>
+          </a:p>
+        </p:txBody>
+      </p:sp>
+    </p:spTree>
+    <p:extLst>
+      <p:ext uri="{BB962C8B-B14F-4D97-AF65-F5344CB8AC3E}">
+        <p14:creationId xmlns:p14="http://schemas.microsoft.com/office/powerpoint/2010/main" val="1024086991"/>
+      </p:ext>
+    </p:extLst>
+  </p:cSld>
+  <p:clrMapOvr>
+    <a:masterClrMapping/>
+  </p:clrMapOvr>
+</p:notes>
+</file>
+
+<file path=ppt/notesSlides/notesSlide30.xml><?xml version="1.0" encoding="utf-8"?>
+<p:notes xmlns:a="http://schemas.openxmlformats.org/drawingml/2006/main" xmlns:r="http://schemas.openxmlformats.org/officeDocument/2006/relationships" xmlns:p="http://schemas.openxmlformats.org/presentationml/2006/main">
+  <p:cSld>
+    <p:spTree>
+      <p:nvGrpSpPr>
+        <p:cNvPr id="1" name=""/>
+        <p:cNvGrpSpPr/>
+        <p:nvPr/>
+      </p:nvGrpSpPr>
+      <p:grpSpPr>
+        <a:xfrm>
+          <a:off x="0" y="0"/>
+          <a:ext cx="0" cy="0"/>
+          <a:chOff x="0" y="0"/>
+          <a:chExt cx="0" cy="0"/>
+        </a:xfrm>
+      </p:grpSpPr>
+      <p:sp>
+        <p:nvSpPr>
+          <p:cNvPr id="2" name="Slide Image Placeholder 1"/>
+          <p:cNvSpPr>
+            <a:spLocks noGrp="1" noRot="1" noChangeAspect="1"/>
+          </p:cNvSpPr>
+          <p:nvPr>
+            <p:ph type="sldImg"/>
+          </p:nvPr>
+        </p:nvSpPr>
+        <p:spPr/>
+      </p:sp>
+      <p:sp>
+        <p:nvSpPr>
+          <p:cNvPr id="3" name="Notes Placeholder 2"/>
+          <p:cNvSpPr>
+            <a:spLocks noGrp="1"/>
+          </p:cNvSpPr>
+          <p:nvPr>
+            <p:ph type="body" idx="1"/>
+          </p:nvPr>
+        </p:nvSpPr>
+        <p:spPr/>
+        <p:txBody>
+          <a:bodyPr/>
+          <a:lstStyle/>
+          <a:p>
+            <a:r>
+              <a:rPr lang="en-US" dirty="0"/>
+              <a:t/>
+            </a:r>
+            <a:endParaRPr lang="en-US" dirty="0"/>
+          </a:p>
+        </p:txBody>
+      </p:sp>
+      <p:sp>
+        <p:nvSpPr>
+          <p:cNvPr id="4" name="Slide Number Placeholder 3"/>
+          <p:cNvSpPr>
+            <a:spLocks noGrp="1"/>
+          </p:cNvSpPr>
+          <p:nvPr>
+            <p:ph type="sldNum" sz="quarter" idx="10"/>
+          </p:nvPr>
+        </p:nvSpPr>
+        <p:spPr/>
+        <p:txBody>
+          <a:bodyPr/>
+          <a:lstStyle/>
+          <a:p>
+            <a:fld id="{F7021451-1387-4CA6-816F-3879F97B5CBC}" type="slidenum">
+              <a:rPr lang="en-US"/>
+              <a:t>30</a:t>
+            </a:fld>
+            <a:endParaRPr lang="en-US"/>
+          </a:p>
+        </p:txBody>
+      </p:sp>
+    </p:spTree>
+    <p:extLst>
+      <p:ext uri="{BB962C8B-B14F-4D97-AF65-F5344CB8AC3E}">
+        <p14:creationId xmlns:p14="http://schemas.microsoft.com/office/powerpoint/2010/main" val="1024086991"/>
+      </p:ext>
+    </p:extLst>
+  </p:cSld>
+  <p:clrMapOvr>
+    <a:masterClrMapping/>
+  </p:clrMapOvr>
+</p:notes>
+</file>
+
+<file path=ppt/notesSlides/notesSlide31.xml><?xml version="1.0" encoding="utf-8"?>
+<p:notes xmlns:a="http://schemas.openxmlformats.org/drawingml/2006/main" xmlns:r="http://schemas.openxmlformats.org/officeDocument/2006/relationships" xmlns:p="http://schemas.openxmlformats.org/presentationml/2006/main">
+  <p:cSld>
+    <p:spTree>
+      <p:nvGrpSpPr>
+        <p:cNvPr id="1" name=""/>
+        <p:cNvGrpSpPr/>
+        <p:nvPr/>
+      </p:nvGrpSpPr>
+      <p:grpSpPr>
+        <a:xfrm>
+          <a:off x="0" y="0"/>
+          <a:ext cx="0" cy="0"/>
+          <a:chOff x="0" y="0"/>
+          <a:chExt cx="0" cy="0"/>
+        </a:xfrm>
+      </p:grpSpPr>
+      <p:sp>
+        <p:nvSpPr>
+          <p:cNvPr id="2" name="Slide Image Placeholder 1"/>
+          <p:cNvSpPr>
+            <a:spLocks noGrp="1" noRot="1" noChangeAspect="1"/>
+          </p:cNvSpPr>
+          <p:nvPr>
+            <p:ph type="sldImg"/>
+          </p:nvPr>
+        </p:nvSpPr>
+        <p:spPr/>
+      </p:sp>
+      <p:sp>
+        <p:nvSpPr>
+          <p:cNvPr id="3" name="Notes Placeholder 2"/>
+          <p:cNvSpPr>
+            <a:spLocks noGrp="1"/>
+          </p:cNvSpPr>
+          <p:nvPr>
+            <p:ph type="body" idx="1"/>
+          </p:nvPr>
+        </p:nvSpPr>
+        <p:spPr/>
+        <p:txBody>
+          <a:bodyPr/>
+          <a:lstStyle/>
+          <a:p>
+            <a:r>
+              <a:rPr lang="en-US" dirty="0"/>
+              <a:t/>
+            </a:r>
+            <a:endParaRPr lang="en-US" dirty="0"/>
+          </a:p>
+        </p:txBody>
+      </p:sp>
+      <p:sp>
+        <p:nvSpPr>
+          <p:cNvPr id="4" name="Slide Number Placeholder 3"/>
+          <p:cNvSpPr>
+            <a:spLocks noGrp="1"/>
+          </p:cNvSpPr>
+          <p:nvPr>
+            <p:ph type="sldNum" sz="quarter" idx="10"/>
+          </p:nvPr>
+        </p:nvSpPr>
+        <p:spPr/>
+        <p:txBody>
+          <a:bodyPr/>
+          <a:lstStyle/>
+          <a:p>
+            <a:fld id="{F7021451-1387-4CA6-816F-3879F97B5CBC}" type="slidenum">
+              <a:rPr lang="en-US"/>
+              <a:t>31</a:t>
+            </a:fld>
+            <a:endParaRPr lang="en-US"/>
+          </a:p>
+        </p:txBody>
+      </p:sp>
+    </p:spTree>
+    <p:extLst>
+      <p:ext uri="{BB962C8B-B14F-4D97-AF65-F5344CB8AC3E}">
+        <p14:creationId xmlns:p14="http://schemas.microsoft.com/office/powerpoint/2010/main" val="1024086991"/>
+      </p:ext>
+    </p:extLst>
+  </p:cSld>
+  <p:clrMapOvr>
+    <a:masterClrMapping/>
+  </p:clrMapOvr>
+</p:notes>
+</file>
+
+<file path=ppt/notesSlides/notesSlide32.xml><?xml version="1.0" encoding="utf-8"?>
+<p:notes xmlns:a="http://schemas.openxmlformats.org/drawingml/2006/main" xmlns:r="http://schemas.openxmlformats.org/officeDocument/2006/relationships" xmlns:p="http://schemas.openxmlformats.org/presentationml/2006/main">
+  <p:cSld>
+    <p:spTree>
+      <p:nvGrpSpPr>
+        <p:cNvPr id="1" name=""/>
+        <p:cNvGrpSpPr/>
+        <p:nvPr/>
+      </p:nvGrpSpPr>
+      <p:grpSpPr>
+        <a:xfrm>
+          <a:off x="0" y="0"/>
+          <a:ext cx="0" cy="0"/>
+          <a:chOff x="0" y="0"/>
+          <a:chExt cx="0" cy="0"/>
+        </a:xfrm>
+      </p:grpSpPr>
+      <p:sp>
+        <p:nvSpPr>
+          <p:cNvPr id="2" name="Slide Image Placeholder 1"/>
+          <p:cNvSpPr>
+            <a:spLocks noGrp="1" noRot="1" noChangeAspect="1"/>
+          </p:cNvSpPr>
+          <p:nvPr>
+            <p:ph type="sldImg"/>
+          </p:nvPr>
+        </p:nvSpPr>
+        <p:spPr/>
+      </p:sp>
+      <p:sp>
+        <p:nvSpPr>
+          <p:cNvPr id="3" name="Notes Placeholder 2"/>
+          <p:cNvSpPr>
+            <a:spLocks noGrp="1"/>
+          </p:cNvSpPr>
+          <p:nvPr>
+            <p:ph type="body" idx="1"/>
+          </p:nvPr>
+        </p:nvSpPr>
+        <p:spPr/>
+        <p:txBody>
+          <a:bodyPr/>
+          <a:lstStyle/>
+          <a:p>
+            <a:r>
+              <a:rPr lang="en-US" dirty="0"/>
+              <a:t>Demo link: https://federation-only-emerald-planets.trycloudflare.com/demo – PIN 1234 for every demo card.</a:t>
+            </a:r>
+            <a:endParaRPr lang="en-US" dirty="0"/>
+          </a:p>
+        </p:txBody>
+      </p:sp>
+      <p:sp>
+        <p:nvSpPr>
+          <p:cNvPr id="4" name="Slide Number Placeholder 3"/>
+          <p:cNvSpPr>
+            <a:spLocks noGrp="1"/>
+          </p:cNvSpPr>
+          <p:nvPr>
+            <p:ph type="sldNum" sz="quarter" idx="10"/>
+          </p:nvPr>
+        </p:nvSpPr>
+        <p:spPr/>
+        <p:txBody>
+          <a:bodyPr/>
+          <a:lstStyle/>
+          <a:p>
+            <a:fld id="{F7021451-1387-4CA6-816F-3879F97B5CBC}" type="slidenum">
+              <a:rPr lang="en-US"/>
+              <a:t>32</a:t>
+            </a:fld>
+            <a:endParaRPr lang="en-US"/>
+          </a:p>
+        </p:txBody>
+      </p:sp>
+    </p:spTree>
+    <p:extLst>
+      <p:ext uri="{BB962C8B-B14F-4D97-AF65-F5344CB8AC3E}">
+        <p14:creationId xmlns:p14="http://schemas.microsoft.com/office/powerpoint/2010/main" val="1024086991"/>
+      </p:ext>
+    </p:extLst>
+  </p:cSld>
+  <p:clrMapOvr>
+    <a:masterClrMapping/>
+  </p:clrMapOvr>
+</p:notes>
+</file>
+
+<file path=ppt/notesSlides/notesSlide33.xml><?xml version="1.0" encoding="utf-8"?>
+<p:notes xmlns:a="http://schemas.openxmlformats.org/drawingml/2006/main" xmlns:r="http://schemas.openxmlformats.org/officeDocument/2006/relationships" xmlns:p="http://schemas.openxmlformats.org/presentationml/2006/main">
+  <p:cSld>
+    <p:spTree>
+      <p:nvGrpSpPr>
+        <p:cNvPr id="1" name=""/>
+        <p:cNvGrpSpPr/>
+        <p:nvPr/>
+      </p:nvGrpSpPr>
+      <p:grpSpPr>
+        <a:xfrm>
+          <a:off x="0" y="0"/>
+          <a:ext cx="0" cy="0"/>
+          <a:chOff x="0" y="0"/>
+          <a:chExt cx="0" cy="0"/>
+        </a:xfrm>
+      </p:grpSpPr>
+      <p:sp>
+        <p:nvSpPr>
+          <p:cNvPr id="2" name="Slide Image Placeholder 1"/>
+          <p:cNvSpPr>
+            <a:spLocks noGrp="1" noRot="1" noChangeAspect="1"/>
+          </p:cNvSpPr>
+          <p:nvPr>
+            <p:ph type="sldImg"/>
+          </p:nvPr>
+        </p:nvSpPr>
+        <p:spPr/>
+      </p:sp>
+      <p:sp>
+        <p:nvSpPr>
+          <p:cNvPr id="3" name="Notes Placeholder 2"/>
+          <p:cNvSpPr>
+            <a:spLocks noGrp="1"/>
+          </p:cNvSpPr>
+          <p:nvPr>
+            <p:ph type="body" idx="1"/>
+          </p:nvPr>
+        </p:nvSpPr>
+        <p:spPr/>
+        <p:txBody>
+          <a:bodyPr/>
+          <a:lstStyle/>
+          <a:p>
+            <a:r>
+              <a:rPr lang="en-US" dirty="0"/>
+              <a:t/>
+            </a:r>
+            <a:endParaRPr lang="en-US" dirty="0"/>
+          </a:p>
+        </p:txBody>
+      </p:sp>
+      <p:sp>
+        <p:nvSpPr>
+          <p:cNvPr id="4" name="Slide Number Placeholder 3"/>
+          <p:cNvSpPr>
+            <a:spLocks noGrp="1"/>
+          </p:cNvSpPr>
+          <p:nvPr>
+            <p:ph type="sldNum" sz="quarter" idx="10"/>
+          </p:nvPr>
+        </p:nvSpPr>
+        <p:spPr/>
+        <p:txBody>
+          <a:bodyPr/>
+          <a:lstStyle/>
+          <a:p>
+            <a:fld id="{F7021451-1387-4CA6-816F-3879F97B5CBC}" type="slidenum">
+              <a:rPr lang="en-US"/>
+              <a:t>33</a:t>
+            </a:fld>
+            <a:endParaRPr lang="en-US"/>
+          </a:p>
+        </p:txBody>
+      </p:sp>
+    </p:spTree>
+    <p:extLst>
+      <p:ext uri="{BB962C8B-B14F-4D97-AF65-F5344CB8AC3E}">
+        <p14:creationId xmlns:p14="http://schemas.microsoft.com/office/powerpoint/2010/main" val="1024086991"/>
+      </p:ext>
+    </p:extLst>
+  </p:cSld>
+  <p:clrMapOvr>
+    <a:masterClrMapping/>
+  </p:clrMapOvr>
+</p:notes>
+</file>
+
+<file path=ppt/notesSlides/notesSlide34.xml><?xml version="1.0" encoding="utf-8"?>
+<p:notes xmlns:a="http://schemas.openxmlformats.org/drawingml/2006/main" xmlns:r="http://schemas.openxmlformats.org/officeDocument/2006/relationships" xmlns:p="http://schemas.openxmlformats.org/presentationml/2006/main">
+  <p:cSld>
+    <p:spTree>
+      <p:nvGrpSpPr>
+        <p:cNvPr id="1" name=""/>
+        <p:cNvGrpSpPr/>
+        <p:nvPr/>
+      </p:nvGrpSpPr>
+      <p:grpSpPr>
+        <a:xfrm>
+          <a:off x="0" y="0"/>
+          <a:ext cx="0" cy="0"/>
+          <a:chOff x="0" y="0"/>
+          <a:chExt cx="0" cy="0"/>
+        </a:xfrm>
+      </p:grpSpPr>
+      <p:sp>
+        <p:nvSpPr>
+          <p:cNvPr id="2" name="Slide Image Placeholder 1"/>
+          <p:cNvSpPr>
+            <a:spLocks noGrp="1" noRot="1" noChangeAspect="1"/>
+          </p:cNvSpPr>
+          <p:nvPr>
+            <p:ph type="sldImg"/>
+          </p:nvPr>
+        </p:nvSpPr>
+        <p:spPr/>
+      </p:sp>
+      <p:sp>
+        <p:nvSpPr>
+          <p:cNvPr id="3" name="Notes Placeholder 2"/>
+          <p:cNvSpPr>
+            <a:spLocks noGrp="1"/>
+          </p:cNvSpPr>
+          <p:nvPr>
+            <p:ph type="body" idx="1"/>
+          </p:nvPr>
+        </p:nvSpPr>
+        <p:spPr/>
+        <p:txBody>
+          <a:bodyPr/>
+          <a:lstStyle/>
+          <a:p>
+            <a:r>
+              <a:rPr lang="en-US" dirty="0"/>
+              <a:t/>
+            </a:r>
+            <a:endParaRPr lang="en-US" dirty="0"/>
+          </a:p>
+        </p:txBody>
+      </p:sp>
+      <p:sp>
+        <p:nvSpPr>
+          <p:cNvPr id="4" name="Slide Number Placeholder 3"/>
+          <p:cNvSpPr>
+            <a:spLocks noGrp="1"/>
+          </p:cNvSpPr>
+          <p:nvPr>
+            <p:ph type="sldNum" sz="quarter" idx="10"/>
+          </p:nvPr>
+        </p:nvSpPr>
+        <p:spPr/>
+        <p:txBody>
+          <a:bodyPr/>
+          <a:lstStyle/>
+          <a:p>
+            <a:fld id="{F7021451-1387-4CA6-816F-3879F97B5CBC}" type="slidenum">
+              <a:rPr lang="en-US"/>
+              <a:t>34</a:t>
             </a:fld>
             <a:endParaRPr lang="en-US"/>
           </a:p>
@@ -4157,7 +4701,7 @@
                   <a:schemeClr val="tx2"/>
                 </a:solidFill>
               </a:rPr>
-              <a:t>Emergency access</a:t>
+              <a:t>The workplace follows the PC</a:t>
             </a:r>
             <a:endParaRPr lang="en-US" sz="3200" dirty="0"/>
           </a:p>
@@ -4165,134 +4709,14 @@
       </p:sp>
       <p:sp>
         <p:nvSpPr>
-          <p:cNvPr id="3" name="Text 0"/>
+          <p:cNvPr id="3" name="The same doctor at Ullevål frame"/>
           <p:cNvSpPr/>
-          <p:nvPr>
-            <p:ph idx="101" type="body" hasCustomPrompt="1"/>
-          </p:nvPr>
+          <p:nvPr/>
         </p:nvSpPr>
         <p:spPr>
           <a:xfrm>
             <a:off x="548640" y="1371600"/>
-            <a:ext cx="3657600" cy="4754880"/>
-          </a:xfrm>
-          <a:prstGeom prst="rect">
-            <a:avLst/>
-          </a:prstGeom>
-          <a:noFill/>
-          <a:ln/>
-        </p:spPr>
-        <p:txBody>
-          <a:bodyPr wrap="square" rtlCol="0" anchor="t"/>
-          <a:lstStyle/>
-          <a:p>
-            <a:pPr marL="342900" indent="-342900">
-              <a:spcAft>
-                <a:spcPts val="800"/>
-              </a:spcAft>
-              <a:buSzPct val="100000"/>
-              <a:buChar char="•"/>
-            </a:pPr>
-            <a:r>
-              <a:rPr lang="en-US" sz="1500" b="1" dirty="0">
-                <a:solidFill>
-                  <a:schemeClr val="tx1"/>
-                </a:solidFill>
-              </a:rPr>
-              <a:t>Card + reason,</a:t>
-            </a:r>
-            <a:pPr indent="0" marL="0">
-              <a:spcAft>
-                <a:spcPts val="800"/>
-              </a:spcAft>
-              <a:buNone/>
-            </a:pPr>
-            <a:r>
-              <a:rPr lang="en-US" sz="1500" dirty="0">
-                <a:solidFill>
-                  <a:schemeClr val="tx1"/>
-                </a:solidFill>
-              </a:rPr>
-              <a:t> no PIN – to save time.</a:t>
-            </a:r>
-            <a:endParaRPr lang="en-US" sz="1500" dirty="0"/>
-          </a:p>
-          <a:p>
-            <a:pPr marL="342900" indent="-342900">
-              <a:spcAft>
-                <a:spcPts val="800"/>
-              </a:spcAft>
-              <a:buSzPct val="100000"/>
-              <a:buChar char="•"/>
-            </a:pPr>
-            <a:r>
-              <a:rPr lang="en-US" sz="1500" b="1" dirty="0">
-                <a:solidFill>
-                  <a:schemeClr val="tx1"/>
-                </a:solidFill>
-              </a:rPr>
-              <a:t>Only critical information</a:t>
-            </a:r>
-            <a:pPr indent="0" marL="0">
-              <a:spcAft>
-                <a:spcPts val="800"/>
-              </a:spcAft>
-              <a:buNone/>
-            </a:pPr>
-            <a:r>
-              <a:rPr lang="en-US" sz="1500" dirty="0">
-                <a:solidFill>
-                  <a:schemeClr val="tx1"/>
-                </a:solidFill>
-              </a:rPr>
-              <a:t> for 30 minutes.</a:t>
-            </a:r>
-            <a:endParaRPr lang="en-US" sz="1500" dirty="0"/>
-          </a:p>
-          <a:p>
-            <a:pPr marL="342900" indent="-342900">
-              <a:spcAft>
-                <a:spcPts val="800"/>
-              </a:spcAft>
-              <a:buSzPct val="100000"/>
-              <a:buChar char="•"/>
-            </a:pPr>
-            <a:r>
-              <a:rPr lang="en-US" sz="1500" b="1" dirty="0">
-                <a:solidFill>
-                  <a:schemeClr val="tx1"/>
-                </a:solidFill>
-              </a:rPr>
-              <a:t>Logged by name,</a:t>
-            </a:r>
-            <a:pPr indent="0" marL="0">
-              <a:spcAft>
-                <a:spcPts val="800"/>
-              </a:spcAft>
-              <a:buNone/>
-            </a:pPr>
-            <a:r>
-              <a:rPr lang="en-US" sz="1500" dirty="0">
-                <a:solidFill>
-                  <a:schemeClr val="tx1"/>
-                </a:solidFill>
-              </a:rPr>
-              <a:t> reviewed afterwards, and the patient is notified.</a:t>
-            </a:r>
-            <a:endParaRPr lang="en-US" sz="1500" dirty="0"/>
-          </a:p>
-        </p:txBody>
-      </p:sp>
-      <p:sp>
-        <p:nvSpPr>
-          <p:cNvPr id="4" name="Emergency access frame"/>
-          <p:cNvSpPr/>
-          <p:nvPr/>
-        </p:nvSpPr>
-        <p:spPr>
-          <a:xfrm>
-            <a:off x="4526280" y="1371600"/>
-            <a:ext cx="7132320" cy="4457700"/>
+            <a:ext cx="5394960" cy="3203258"/>
           </a:xfrm>
           <a:prstGeom prst="rect">
             <a:avLst/>
@@ -4317,7 +4741,7 @@
       </p:sp>
       <p:pic>
         <p:nvPicPr>
-          <p:cNvPr id="5" name="Emergency access" descr="Emergency access">    </p:cNvPr>
+          <p:cNvPr id="4" name="The same doctor at Ullevål" descr="The same doctor at Ullevål">    </p:cNvPr>
           <p:cNvPicPr>
             <a:picLocks noChangeAspect="1"/>
           </p:cNvPicPr>
@@ -4331,14 +4755,178 @@
         </p:blipFill>
         <p:spPr>
           <a:xfrm>
-            <a:off x="4526280" y="1371600"/>
-            <a:ext cx="7132320" cy="4457700"/>
+            <a:off x="548640" y="1371600"/>
+            <a:ext cx="5394960" cy="3203258"/>
           </a:xfrm>
           <a:prstGeom prst="rect">
             <a:avLst/>
           </a:prstGeom>
         </p:spPr>
       </p:pic>
+      <p:sp>
+        <p:nvSpPr>
+          <p:cNvPr id="5" name="The same doctor at St. Olavs frame"/>
+          <p:cNvSpPr/>
+          <p:nvPr/>
+        </p:nvSpPr>
+        <p:spPr>
+          <a:xfrm>
+            <a:off x="6245352" y="1371600"/>
+            <a:ext cx="5394960" cy="3203258"/>
+          </a:xfrm>
+          <a:prstGeom prst="rect">
+            <a:avLst/>
+          </a:prstGeom>
+          <a:solidFill>
+            <a:schemeClr val="bg1"/>
+          </a:solidFill>
+          <a:ln w="9525">
+            <a:solidFill>
+              <a:srgbClr val="D2DDD5"/>
+            </a:solidFill>
+            <a:prstDash val="solid"/>
+          </a:ln>
+          <a:effectLst>
+            <a:outerShdw sx="100000" sy="100000" kx="0" ky="0" algn="bl" rotWithShape="0" blurRad="101600" dist="38100" dir="5400000">
+              <a:srgbClr val="000000">
+                <a:alpha val="25000"/>
+              </a:srgbClr>
+            </a:outerShdw>
+          </a:effectLst>
+        </p:spPr>
+      </p:sp>
+      <p:pic>
+        <p:nvPicPr>
+          <p:cNvPr id="6" name="The same doctor at St. Olavs" descr="The same doctor at St. Olavs">    </p:cNvPr>
+          <p:cNvPicPr>
+            <a:picLocks noChangeAspect="1"/>
+          </p:cNvPicPr>
+          <p:nvPr/>
+        </p:nvPicPr>
+        <p:blipFill>
+          <a:blip r:embed="rId2"/>
+          <a:stretch>
+            <a:fillRect/>
+          </a:stretch>
+        </p:blipFill>
+        <p:spPr>
+          <a:xfrm>
+            <a:off x="6245352" y="1371600"/>
+            <a:ext cx="5394960" cy="3203258"/>
+          </a:xfrm>
+          <a:prstGeom prst="rect">
+            <a:avLst/>
+          </a:prstGeom>
+        </p:spPr>
+      </p:pic>
+      <p:sp>
+        <p:nvSpPr>
+          <p:cNvPr id="7" name="Text 3"/>
+          <p:cNvSpPr txBox="1"/>
+          <p:nvPr/>
+        </p:nvSpPr>
+        <p:spPr>
+          <a:xfrm>
+            <a:off x="548640" y="4892040"/>
+            <a:ext cx="5394960" cy="365760"/>
+          </a:xfrm>
+          <a:prstGeom prst="rect">
+            <a:avLst/>
+          </a:prstGeom>
+          <a:noFill/>
+          <a:ln/>
+        </p:spPr>
+        <p:txBody>
+          <a:bodyPr wrap="square" rtlCol="0" anchor="ctr"/>
+          <a:lstStyle/>
+          <a:p>
+            <a:pPr indent="0" marL="0">
+              <a:buNone/>
+            </a:pPr>
+            <a:r>
+              <a:rPr lang="en-US" sz="1500" b="1" dirty="0">
+                <a:solidFill>
+                  <a:schemeClr val="tx2"/>
+                </a:solidFill>
+              </a:rPr>
+              <a:t>Ullevål: Senior consultant, cardiology</a:t>
+            </a:r>
+            <a:endParaRPr lang="en-US" sz="1500" dirty="0"/>
+          </a:p>
+        </p:txBody>
+      </p:sp>
+      <p:sp>
+        <p:nvSpPr>
+          <p:cNvPr id="8" name="Text 4"/>
+          <p:cNvSpPr txBox="1"/>
+          <p:nvPr/>
+        </p:nvSpPr>
+        <p:spPr>
+          <a:xfrm>
+            <a:off x="6245352" y="4892040"/>
+            <a:ext cx="5394960" cy="365760"/>
+          </a:xfrm>
+          <a:prstGeom prst="rect">
+            <a:avLst/>
+          </a:prstGeom>
+          <a:noFill/>
+          <a:ln/>
+        </p:spPr>
+        <p:txBody>
+          <a:bodyPr wrap="square" rtlCol="0" anchor="ctr"/>
+          <a:lstStyle/>
+          <a:p>
+            <a:pPr indent="0" marL="0">
+              <a:buNone/>
+            </a:pPr>
+            <a:r>
+              <a:rPr lang="en-US" sz="1500" b="1" dirty="0">
+                <a:solidFill>
+                  <a:schemeClr val="tx2"/>
+                </a:solidFill>
+              </a:rPr>
+              <a:t>St. Olavs: Visiting consultant, cardiology</a:t>
+            </a:r>
+            <a:endParaRPr lang="en-US" sz="1500" dirty="0"/>
+          </a:p>
+        </p:txBody>
+      </p:sp>
+      <p:sp>
+        <p:nvSpPr>
+          <p:cNvPr id="9" name="Text 5"/>
+          <p:cNvSpPr txBox="1"/>
+          <p:nvPr/>
+        </p:nvSpPr>
+        <p:spPr>
+          <a:xfrm>
+            <a:off x="548640" y="5440680"/>
+            <a:ext cx="11064240" cy="457200"/>
+          </a:xfrm>
+          <a:prstGeom prst="rect">
+            <a:avLst/>
+          </a:prstGeom>
+          <a:noFill/>
+          <a:ln/>
+        </p:spPr>
+        <p:txBody>
+          <a:bodyPr wrap="square" rtlCol="0" anchor="ctr"/>
+          <a:lstStyle/>
+          <a:p>
+            <a:pPr indent="0" marL="0">
+              <a:buNone/>
+            </a:pPr>
+            <a:r>
+              <a:rPr lang="en-US" sz="1500" dirty="0">
+                <a:solidFill>
+                  <a:schemeClr val="tx1"/>
+                </a:solidFill>
+              </a:rPr>
+              <a:t>The card says who you are. The PC says where you are. Your position is taken from that workplace.</a:t>
+            </a:r>
+            <a:endParaRPr lang="en-US" sz="1500" dirty="0"/>
+          </a:p>
+        </p:txBody>
+      </p:sp>
       <p:sp>
         <p:nvSpPr>
           <p:cNvPr id="25" name="Slide Number Placeholder 0"/>
@@ -4414,13 +5002,13 @@
           <p:cNvPr id="2" name="Text 0"/>
           <p:cNvSpPr/>
           <p:nvPr>
-            <p:ph idx="100" type="body" hasCustomPrompt="1"/>
-          </p:nvPr>
-        </p:nvSpPr>
-        <p:spPr>
-          <a:xfrm>
-            <a:off x="731520" y="2103120"/>
-            <a:ext cx="2743200" cy="1097280"/>
+            <p:ph idx="100" type="title" hasCustomPrompt="1"/>
+          </p:nvPr>
+        </p:nvSpPr>
+        <p:spPr>
+          <a:xfrm>
+            <a:off x="548640" y="365760"/>
+            <a:ext cx="11064240" cy="731520"/>
           </a:xfrm>
           <a:prstGeom prst="rect">
             <a:avLst/>
@@ -4432,18 +5020,18 @@
           <a:bodyPr wrap="square" rtlCol="0"/>
           <a:lstStyle/>
           <a:p>
-            <a:pPr indent="0" marL="0">
-              <a:buNone/>
-            </a:pPr>
-            <a:r>
-              <a:rPr lang="en-US" sz="6000" b="1" dirty="0">
-                <a:solidFill>
-                  <a:schemeClr val="accent2"/>
-                </a:solidFill>
-              </a:rPr>
-              <a:t>03</a:t>
-            </a:r>
-            <a:endParaRPr lang="en-US" sz="6000" dirty="0"/>
+            <a:pPr algn="l" indent="0" marL="0">
+              <a:buNone/>
+            </a:pPr>
+            <a:r>
+              <a:rPr lang="en-US" sz="3200" b="1" dirty="0">
+                <a:solidFill>
+                  <a:schemeClr val="tx2"/>
+                </a:solidFill>
+              </a:rPr>
+              <a:t>Emergency access</a:t>
+            </a:r>
+            <a:endParaRPr lang="en-US" sz="3200" dirty="0"/>
           </a:p>
         </p:txBody>
       </p:sp>
@@ -4452,13 +5040,13 @@
           <p:cNvPr id="3" name="Text 0"/>
           <p:cNvSpPr/>
           <p:nvPr>
-            <p:ph idx="101" type="title" hasCustomPrompt="1"/>
-          </p:nvPr>
-        </p:nvSpPr>
-        <p:spPr>
-          <a:xfrm>
-            <a:off x="731520" y="3108960"/>
-            <a:ext cx="10698480" cy="914400"/>
+            <p:ph idx="101" type="body" hasCustomPrompt="1"/>
+          </p:nvPr>
+        </p:nvSpPr>
+        <p:spPr>
+          <a:xfrm>
+            <a:off x="548640" y="1371600"/>
+            <a:ext cx="3657600" cy="4754880"/>
           </a:xfrm>
           <a:prstGeom prst="rect">
             <a:avLst/>
@@ -4467,59 +5055,204 @@
           <a:ln/>
         </p:spPr>
         <p:txBody>
-          <a:bodyPr wrap="square" rtlCol="0"/>
-          <a:lstStyle/>
-          <a:p>
-            <a:pPr algn="l" indent="0" marL="0">
-              <a:buNone/>
-            </a:pPr>
-            <a:r>
-              <a:rPr lang="en-US" sz="4000" b="1" dirty="0">
-                <a:solidFill>
-                  <a:schemeClr val="bg1"/>
-                </a:solidFill>
-              </a:rPr>
-              <a:t>The desktop</a:t>
-            </a:r>
-            <a:endParaRPr lang="en-US" sz="4000" dirty="0"/>
-          </a:p>
-        </p:txBody>
-      </p:sp>
-      <p:sp>
-        <p:nvSpPr>
-          <p:cNvPr id="4" name="Text 0"/>
+          <a:bodyPr wrap="square" rtlCol="0" anchor="t"/>
+          <a:lstStyle/>
+          <a:p>
+            <a:pPr marL="342900" indent="-342900">
+              <a:spcAft>
+                <a:spcPts val="800"/>
+              </a:spcAft>
+              <a:buSzPct val="100000"/>
+              <a:buChar char="•"/>
+            </a:pPr>
+            <a:r>
+              <a:rPr lang="en-US" sz="1500" b="1" dirty="0">
+                <a:solidFill>
+                  <a:schemeClr val="tx1"/>
+                </a:solidFill>
+              </a:rPr>
+              <a:t>Card + reason,</a:t>
+            </a:r>
+            <a:pPr indent="0" marL="0">
+              <a:spcAft>
+                <a:spcPts val="800"/>
+              </a:spcAft>
+              <a:buNone/>
+            </a:pPr>
+            <a:r>
+              <a:rPr lang="en-US" sz="1500" dirty="0">
+                <a:solidFill>
+                  <a:schemeClr val="tx1"/>
+                </a:solidFill>
+              </a:rPr>
+              <a:t> no PIN – to save time.</a:t>
+            </a:r>
+            <a:endParaRPr lang="en-US" sz="1500" dirty="0"/>
+          </a:p>
+          <a:p>
+            <a:pPr marL="342900" indent="-342900">
+              <a:spcAft>
+                <a:spcPts val="800"/>
+              </a:spcAft>
+              <a:buSzPct val="100000"/>
+              <a:buChar char="•"/>
+            </a:pPr>
+            <a:r>
+              <a:rPr lang="en-US" sz="1500" b="1" dirty="0">
+                <a:solidFill>
+                  <a:schemeClr val="tx1"/>
+                </a:solidFill>
+              </a:rPr>
+              <a:t>Only critical information</a:t>
+            </a:r>
+            <a:pPr indent="0" marL="0">
+              <a:spcAft>
+                <a:spcPts val="800"/>
+              </a:spcAft>
+              <a:buNone/>
+            </a:pPr>
+            <a:r>
+              <a:rPr lang="en-US" sz="1500" dirty="0">
+                <a:solidFill>
+                  <a:schemeClr val="tx1"/>
+                </a:solidFill>
+              </a:rPr>
+              <a:t> for 30 minutes.</a:t>
+            </a:r>
+            <a:endParaRPr lang="en-US" sz="1500" dirty="0"/>
+          </a:p>
+          <a:p>
+            <a:pPr marL="342900" indent="-342900">
+              <a:spcAft>
+                <a:spcPts val="800"/>
+              </a:spcAft>
+              <a:buSzPct val="100000"/>
+              <a:buChar char="•"/>
+            </a:pPr>
+            <a:r>
+              <a:rPr lang="en-US" sz="1500" b="1" dirty="0">
+                <a:solidFill>
+                  <a:schemeClr val="tx1"/>
+                </a:solidFill>
+              </a:rPr>
+              <a:t>Logged by name,</a:t>
+            </a:r>
+            <a:pPr indent="0" marL="0">
+              <a:spcAft>
+                <a:spcPts val="800"/>
+              </a:spcAft>
+              <a:buNone/>
+            </a:pPr>
+            <a:r>
+              <a:rPr lang="en-US" sz="1500" dirty="0">
+                <a:solidFill>
+                  <a:schemeClr val="tx1"/>
+                </a:solidFill>
+              </a:rPr>
+              <a:t> reviewed afterwards, and the patient is notified.</a:t>
+            </a:r>
+            <a:endParaRPr lang="en-US" sz="1500" dirty="0"/>
+          </a:p>
+        </p:txBody>
+      </p:sp>
+      <p:sp>
+        <p:nvSpPr>
+          <p:cNvPr id="4" name="Emergency access frame"/>
           <p:cNvSpPr/>
-          <p:nvPr>
-            <p:ph idx="102" type="body" hasCustomPrompt="1"/>
-          </p:nvPr>
-        </p:nvSpPr>
-        <p:spPr>
-          <a:xfrm>
-            <a:off x="731520" y="4023360"/>
-            <a:ext cx="10698480" cy="822960"/>
-          </a:xfrm>
-          <a:prstGeom prst="rect">
-            <a:avLst/>
-          </a:prstGeom>
-          <a:noFill/>
-          <a:ln/>
-        </p:spPr>
-        <p:txBody>
-          <a:bodyPr wrap="square" rtlCol="0"/>
-          <a:lstStyle/>
-          <a:p>
-            <a:pPr indent="0" marL="0">
-              <a:buNone/>
-            </a:pPr>
-            <a:r>
-              <a:rPr lang="en-US" sz="1800" dirty="0">
-                <a:solidFill>
-                  <a:schemeClr val="accent2"/>
-                </a:solidFill>
-              </a:rPr>
-              <a:t>Start menu, shortcuts and standard programs</a:t>
-            </a:r>
-            <a:endParaRPr lang="en-US" sz="1800" dirty="0"/>
+          <p:nvPr/>
+        </p:nvSpPr>
+        <p:spPr>
+          <a:xfrm>
+            <a:off x="4526280" y="1371600"/>
+            <a:ext cx="7132320" cy="4457700"/>
+          </a:xfrm>
+          <a:prstGeom prst="rect">
+            <a:avLst/>
+          </a:prstGeom>
+          <a:solidFill>
+            <a:schemeClr val="bg1"/>
+          </a:solidFill>
+          <a:ln w="9525">
+            <a:solidFill>
+              <a:srgbClr val="D2DDD5"/>
+            </a:solidFill>
+            <a:prstDash val="solid"/>
+          </a:ln>
+          <a:effectLst>
+            <a:outerShdw sx="100000" sy="100000" kx="0" ky="0" algn="bl" rotWithShape="0" blurRad="101600" dist="38100" dir="5400000">
+              <a:srgbClr val="000000">
+                <a:alpha val="25000"/>
+              </a:srgbClr>
+            </a:outerShdw>
+          </a:effectLst>
+        </p:spPr>
+      </p:sp>
+      <p:pic>
+        <p:nvPicPr>
+          <p:cNvPr id="5" name="Emergency access" descr="Emergency access">    </p:cNvPr>
+          <p:cNvPicPr>
+            <a:picLocks noChangeAspect="1"/>
+          </p:cNvPicPr>
+          <p:nvPr/>
+        </p:nvPicPr>
+        <p:blipFill>
+          <a:blip r:embed="rId1"/>
+          <a:stretch>
+            <a:fillRect/>
+          </a:stretch>
+        </p:blipFill>
+        <p:spPr>
+          <a:xfrm>
+            <a:off x="4526280" y="1371600"/>
+            <a:ext cx="7132320" cy="4457700"/>
+          </a:xfrm>
+          <a:prstGeom prst="rect">
+            <a:avLst/>
+          </a:prstGeom>
+        </p:spPr>
+      </p:pic>
+      <p:sp>
+        <p:nvSpPr>
+          <p:cNvPr id="25" name="Slide Number Placeholder 0"/>
+          <p:cNvSpPr>
+            <a:spLocks noGrp="1"/>
+          </p:cNvSpPr>
+          <p:nvPr>
+            <p:ph type="sldNum" sz="quarter" idx="4294967295"/>
+          </p:nvPr>
+        </p:nvSpPr>
+        <p:spPr>
+          <a:xfrm>
+            <a:off x="11247120" y="6400800"/>
+            <a:ext cx="457200" cy="274320"/>
+          </a:xfrm>
+          <a:prstGeom prst="rect">
+            <a:avLst/>
+          </a:prstGeom>
+          <a:extLst>
+            <a:ext uri="{C572A759-6A51-4108-AA02-DFA0A04FC94B}">
+              <ma14:wrappingTextBoxFlag xmlns:ma14="http://schemas.microsoft.com/office/mac/drawingml/2011/main" val="0"/>
+            </a:ext>
+          </a:extLst>
+        </p:spPr>
+        <p:txBody>
+          <a:bodyPr/>
+          <a:lstStyle>
+            <a:lvl1pPr>
+              <a:defRPr sz="1000">
+                <a:solidFill>
+                  <a:schemeClr val="accent6"/>
+                </a:solidFill>
+              </a:defRPr>
+            </a:lvl1pPr>
+          </a:lstStyle>
+          <a:p>
+            <a:pPr algn="r"/>
+            <a:fld id="{F7021451-1387-4CA6-816F-3879F97B5CBC}" type="slidenum">
+              <a:rPr b="0" lang="en-US"/>
+              <a:t>11</a:t>
+            </a:fld>
+            <a:endParaRPr lang="en-US"/>
           </a:p>
         </p:txBody>
       </p:sp>
@@ -4553,13 +5286,13 @@
           <p:cNvPr id="2" name="Text 0"/>
           <p:cNvSpPr/>
           <p:nvPr>
-            <p:ph idx="100" type="title" hasCustomPrompt="1"/>
-          </p:nvPr>
-        </p:nvSpPr>
-        <p:spPr>
-          <a:xfrm>
-            <a:off x="548640" y="365760"/>
-            <a:ext cx="11064240" cy="731520"/>
+            <p:ph idx="100" type="body" hasCustomPrompt="1"/>
+          </p:nvPr>
+        </p:nvSpPr>
+        <p:spPr>
+          <a:xfrm>
+            <a:off x="731520" y="2103120"/>
+            <a:ext cx="2743200" cy="1097280"/>
           </a:xfrm>
           <a:prstGeom prst="rect">
             <a:avLst/>
@@ -4571,18 +5304,18 @@
           <a:bodyPr wrap="square" rtlCol="0"/>
           <a:lstStyle/>
           <a:p>
-            <a:pPr algn="l" indent="0" marL="0">
-              <a:buNone/>
-            </a:pPr>
-            <a:r>
-              <a:rPr lang="en-US" sz="3200" b="1" dirty="0">
-                <a:solidFill>
-                  <a:schemeClr val="tx2"/>
-                </a:solidFill>
-              </a:rPr>
-              <a:t>The desktop</a:t>
-            </a:r>
-            <a:endParaRPr lang="en-US" sz="3200" dirty="0"/>
+            <a:pPr indent="0" marL="0">
+              <a:buNone/>
+            </a:pPr>
+            <a:r>
+              <a:rPr lang="en-US" sz="6000" b="1" dirty="0">
+                <a:solidFill>
+                  <a:schemeClr val="accent2"/>
+                </a:solidFill>
+              </a:rPr>
+              <a:t>03</a:t>
+            </a:r>
+            <a:endParaRPr lang="en-US" sz="6000" dirty="0"/>
           </a:p>
         </p:txBody>
       </p:sp>
@@ -4591,13 +5324,13 @@
           <p:cNvPr id="3" name="Text 0"/>
           <p:cNvSpPr/>
           <p:nvPr>
-            <p:ph idx="101" type="body" hasCustomPrompt="1"/>
-          </p:nvPr>
-        </p:nvSpPr>
-        <p:spPr>
-          <a:xfrm>
-            <a:off x="548640" y="1371600"/>
-            <a:ext cx="3657600" cy="4754880"/>
+            <p:ph idx="101" type="title" hasCustomPrompt="1"/>
+          </p:nvPr>
+        </p:nvSpPr>
+        <p:spPr>
+          <a:xfrm>
+            <a:off x="731520" y="3108960"/>
+            <a:ext cx="10698480" cy="914400"/>
           </a:xfrm>
           <a:prstGeom prst="rect">
             <a:avLst/>
@@ -4606,204 +5339,59 @@
           <a:ln/>
         </p:spPr>
         <p:txBody>
-          <a:bodyPr wrap="square" rtlCol="0" anchor="t"/>
-          <a:lstStyle/>
-          <a:p>
-            <a:pPr marL="342900" indent="-342900">
-              <a:spcAft>
-                <a:spcPts val="800"/>
-              </a:spcAft>
-              <a:buSzPct val="100000"/>
-              <a:buChar char="•"/>
-            </a:pPr>
-            <a:r>
-              <a:rPr lang="en-US" sz="1500" b="1" dirty="0">
-                <a:solidFill>
-                  <a:schemeClr val="tx1"/>
-                </a:solidFill>
-              </a:rPr>
-              <a:t>Own wallpapers:</a:t>
-            </a:r>
+          <a:bodyPr wrap="square" rtlCol="0"/>
+          <a:lstStyle/>
+          <a:p>
+            <a:pPr algn="l" indent="0" marL="0">
+              <a:buNone/>
+            </a:pPr>
+            <a:r>
+              <a:rPr lang="en-US" sz="4000" b="1" dirty="0">
+                <a:solidFill>
+                  <a:schemeClr val="bg1"/>
+                </a:solidFill>
+              </a:rPr>
+              <a:t>The desktop</a:t>
+            </a:r>
+            <a:endParaRPr lang="en-US" sz="4000" dirty="0"/>
+          </a:p>
+        </p:txBody>
+      </p:sp>
+      <p:sp>
+        <p:nvSpPr>
+          <p:cNvPr id="4" name="Text 0"/>
+          <p:cNvSpPr/>
+          <p:nvPr>
+            <p:ph idx="102" type="body" hasCustomPrompt="1"/>
+          </p:nvPr>
+        </p:nvSpPr>
+        <p:spPr>
+          <a:xfrm>
+            <a:off x="731520" y="4023360"/>
+            <a:ext cx="10698480" cy="822960"/>
+          </a:xfrm>
+          <a:prstGeom prst="rect">
+            <a:avLst/>
+          </a:prstGeom>
+          <a:noFill/>
+          <a:ln/>
+        </p:spPr>
+        <p:txBody>
+          <a:bodyPr wrap="square" rtlCol="0"/>
+          <a:lstStyle/>
+          <a:p>
             <a:pPr indent="0" marL="0">
-              <a:spcAft>
-                <a:spcPts val="800"/>
-              </a:spcAft>
-              <a:buNone/>
-            </a:pPr>
-            <a:r>
-              <a:rPr lang="en-US" sz="1500" dirty="0">
-                <a:solidFill>
-                  <a:schemeClr val="tx1"/>
-                </a:solidFill>
-              </a:rPr>
-              <a:t> Northern Lights, Fjord, Forest and Mountains.</a:t>
-            </a:r>
-            <a:endParaRPr lang="en-US" sz="1500" dirty="0"/>
-          </a:p>
-          <a:p>
-            <a:pPr marL="342900" indent="-342900">
-              <a:spcAft>
-                <a:spcPts val="800"/>
-              </a:spcAft>
-              <a:buSzPct val="100000"/>
-              <a:buChar char="•"/>
-            </a:pPr>
-            <a:r>
-              <a:rPr lang="en-US" sz="1500" b="1" dirty="0">
-                <a:solidFill>
-                  <a:schemeClr val="tx1"/>
-                </a:solidFill>
-              </a:rPr>
-              <a:t>Shortcuts</a:t>
-            </a:r>
-            <a:pPr indent="0" marL="0">
-              <a:spcAft>
-                <a:spcPts val="800"/>
-              </a:spcAft>
-              <a:buNone/>
-            </a:pPr>
-            <a:r>
-              <a:rPr lang="en-US" sz="1500" dirty="0">
-                <a:solidFill>
-                  <a:schemeClr val="tx1"/>
-                </a:solidFill>
-              </a:rPr>
-              <a:t> to the Medicus apps, Home and Trash.</a:t>
-            </a:r>
-            <a:endParaRPr lang="en-US" sz="1500" dirty="0"/>
-          </a:p>
-          <a:p>
-            <a:pPr marL="342900" indent="-342900">
-              <a:spcAft>
-                <a:spcPts val="800"/>
-              </a:spcAft>
-              <a:buSzPct val="100000"/>
-              <a:buChar char="•"/>
-            </a:pPr>
-            <a:r>
-              <a:rPr lang="en-US" sz="1500" b="1" dirty="0">
-                <a:solidFill>
-                  <a:schemeClr val="tx1"/>
-                </a:solidFill>
-              </a:rPr>
-              <a:t>The taskbar:</a:t>
-            </a:r>
-            <a:pPr indent="0" marL="0">
-              <a:spcAft>
-                <a:spcPts val="800"/>
-              </a:spcAft>
-              <a:buNone/>
-            </a:pPr>
-            <a:r>
-              <a:rPr lang="en-US" sz="1500" dirty="0">
-                <a:solidFill>
-                  <a:schemeClr val="tx1"/>
-                </a:solidFill>
-              </a:rPr>
-              <a:t> Start button, shortcuts to the browser and Files, open windows, network, sound, clock and name.</a:t>
-            </a:r>
-            <a:endParaRPr lang="en-US" sz="1500" dirty="0"/>
-          </a:p>
-        </p:txBody>
-      </p:sp>
-      <p:sp>
-        <p:nvSpPr>
-          <p:cNvPr id="4" name="The desktop frame"/>
-          <p:cNvSpPr/>
-          <p:nvPr/>
-        </p:nvSpPr>
-        <p:spPr>
-          <a:xfrm>
-            <a:off x="4526280" y="1371600"/>
-            <a:ext cx="7132320" cy="4457700"/>
-          </a:xfrm>
-          <a:prstGeom prst="rect">
-            <a:avLst/>
-          </a:prstGeom>
-          <a:solidFill>
-            <a:schemeClr val="bg1"/>
-          </a:solidFill>
-          <a:ln w="9525">
-            <a:solidFill>
-              <a:srgbClr val="D2DDD5"/>
-            </a:solidFill>
-            <a:prstDash val="solid"/>
-          </a:ln>
-          <a:effectLst>
-            <a:outerShdw sx="100000" sy="100000" kx="0" ky="0" algn="bl" rotWithShape="0" blurRad="101600" dist="38100" dir="5400000">
-              <a:srgbClr val="000000">
-                <a:alpha val="25000"/>
-              </a:srgbClr>
-            </a:outerShdw>
-          </a:effectLst>
-        </p:spPr>
-      </p:sp>
-      <p:pic>
-        <p:nvPicPr>
-          <p:cNvPr id="5" name="The desktop" descr="The desktop">    </p:cNvPr>
-          <p:cNvPicPr>
-            <a:picLocks noChangeAspect="1"/>
-          </p:cNvPicPr>
-          <p:nvPr/>
-        </p:nvPicPr>
-        <p:blipFill>
-          <a:blip r:embed="rId1"/>
-          <a:stretch>
-            <a:fillRect/>
-          </a:stretch>
-        </p:blipFill>
-        <p:spPr>
-          <a:xfrm>
-            <a:off x="4526280" y="1371600"/>
-            <a:ext cx="7132320" cy="4457700"/>
-          </a:xfrm>
-          <a:prstGeom prst="rect">
-            <a:avLst/>
-          </a:prstGeom>
-        </p:spPr>
-      </p:pic>
-      <p:sp>
-        <p:nvSpPr>
-          <p:cNvPr id="25" name="Slide Number Placeholder 0"/>
-          <p:cNvSpPr>
-            <a:spLocks noGrp="1"/>
-          </p:cNvSpPr>
-          <p:nvPr>
-            <p:ph type="sldNum" sz="quarter" idx="4294967295"/>
-          </p:nvPr>
-        </p:nvSpPr>
-        <p:spPr>
-          <a:xfrm>
-            <a:off x="11247120" y="6400800"/>
-            <a:ext cx="457200" cy="274320"/>
-          </a:xfrm>
-          <a:prstGeom prst="rect">
-            <a:avLst/>
-          </a:prstGeom>
-          <a:extLst>
-            <a:ext uri="{C572A759-6A51-4108-AA02-DFA0A04FC94B}">
-              <ma14:wrappingTextBoxFlag xmlns:ma14="http://schemas.microsoft.com/office/mac/drawingml/2011/main" val="0"/>
-            </a:ext>
-          </a:extLst>
-        </p:spPr>
-        <p:txBody>
-          <a:bodyPr/>
-          <a:lstStyle>
-            <a:lvl1pPr>
-              <a:defRPr sz="1000">
-                <a:solidFill>
-                  <a:schemeClr val="accent6"/>
-                </a:solidFill>
-              </a:defRPr>
-            </a:lvl1pPr>
-          </a:lstStyle>
-          <a:p>
-            <a:pPr algn="r"/>
-            <a:fld id="{F7021451-1387-4CA6-816F-3879F97B5CBC}" type="slidenum">
-              <a:rPr b="0" lang="en-US"/>
-              <a:t>12</a:t>
-            </a:fld>
-            <a:endParaRPr lang="en-US"/>
+              <a:buNone/>
+            </a:pPr>
+            <a:r>
+              <a:rPr lang="en-US" sz="1800" dirty="0">
+                <a:solidFill>
+                  <a:schemeClr val="accent2"/>
+                </a:solidFill>
+              </a:rPr>
+              <a:t>Start menu, shortcuts and standard programs</a:t>
+            </a:r>
+            <a:endParaRPr lang="en-US" sz="1800" dirty="0"/>
           </a:p>
         </p:txBody>
       </p:sp>
@@ -4864,7 +5452,7 @@
                   <a:schemeClr val="tx2"/>
                 </a:solidFill>
               </a:rPr>
-              <a:t>The Start menu</a:t>
+              <a:t>The desktop</a:t>
             </a:r>
             <a:endParaRPr lang="en-US" sz="3200" dirty="0"/>
           </a:p>
@@ -4906,7 +5494,7 @@
                   <a:schemeClr val="tx1"/>
                 </a:solidFill>
               </a:rPr>
-              <a:t>Favourites:</a:t>
+              <a:t>Own wallpapers:</a:t>
             </a:r>
             <a:pPr indent="0" marL="0">
               <a:spcAft>
@@ -4920,7 +5508,7 @@
                   <a:schemeClr val="tx1"/>
                 </a:solidFill>
               </a:rPr>
-              <a:t> all the Medicus apps first.</a:t>
+              <a:t> Northern Lights, Fjord, Forest and Mountains.</a:t>
             </a:r>
             <a:endParaRPr lang="en-US" sz="1500" dirty="0"/>
           </a:p>
@@ -4938,7 +5526,7 @@
                   <a:schemeClr val="tx1"/>
                 </a:solidFill>
               </a:rPr>
-              <a:t>Profile picture:</a:t>
+              <a:t>Shortcuts</a:t>
             </a:r>
             <a:pPr indent="0" marL="0">
               <a:spcAft>
@@ -4952,7 +5540,7 @@
                   <a:schemeClr val="tx1"/>
                 </a:solidFill>
               </a:rPr>
-              <a:t> a neutral health-worker figure.</a:t>
+              <a:t> to the Medicus apps, Home and Trash.</a:t>
             </a:r>
             <a:endParaRPr lang="en-US" sz="1500" dirty="0"/>
           </a:p>
@@ -4970,7 +5558,7 @@
                   <a:schemeClr val="tx1"/>
                 </a:solidFill>
               </a:rPr>
-              <a:t>No terminal</a:t>
+              <a:t>The taskbar:</a:t>
             </a:r>
             <a:pPr indent="0" marL="0">
               <a:spcAft>
@@ -4984,7 +5572,7 @@
                   <a:schemeClr val="tx1"/>
                 </a:solidFill>
               </a:rPr>
-              <a:t> and no "run command".</a:t>
+              <a:t> Start button, shortcuts to the browser and Files, open windows, network, sound, clock and name.</a:t>
             </a:r>
             <a:endParaRPr lang="en-US" sz="1500" dirty="0"/>
           </a:p>
@@ -4992,7 +5580,7 @@
       </p:sp>
       <p:sp>
         <p:nvSpPr>
-          <p:cNvPr id="4" name="The Start menu frame"/>
+          <p:cNvPr id="4" name="The desktop frame"/>
           <p:cNvSpPr/>
           <p:nvPr/>
         </p:nvSpPr>
@@ -5024,7 +5612,7 @@
       </p:sp>
       <p:pic>
         <p:nvPicPr>
-          <p:cNvPr id="5" name="The Start menu" descr="The Start menu">    </p:cNvPr>
+          <p:cNvPr id="5" name="The desktop" descr="The desktop">    </p:cNvPr>
           <p:cNvPicPr>
             <a:picLocks noChangeAspect="1"/>
           </p:cNvPicPr>
@@ -5148,7 +5736,7 @@
                   <a:schemeClr val="tx2"/>
                 </a:solidFill>
               </a:rPr>
-              <a:t>Files – the file manager</a:t>
+              <a:t>The Start menu</a:t>
             </a:r>
             <a:endParaRPr lang="en-US" sz="3200" dirty="0"/>
           </a:p>
@@ -5190,7 +5778,7 @@
                   <a:schemeClr val="tx1"/>
                 </a:solidFill>
               </a:rPr>
-              <a:t>A tidy sidebar:</a:t>
+              <a:t>Favourites:</a:t>
             </a:r>
             <a:pPr indent="0" marL="0">
               <a:spcAft>
@@ -5204,7 +5792,7 @@
                   <a:schemeClr val="tx1"/>
                 </a:solidFill>
               </a:rPr>
-              <a:t> Home, Desktop, Documents, Pictures, Downloads and Trash.</a:t>
+              <a:t> all the Medicus apps first.</a:t>
             </a:r>
             <a:endParaRPr lang="en-US" sz="1500" dirty="0"/>
           </a:p>
@@ -5222,7 +5810,7 @@
                   <a:schemeClr val="tx1"/>
                 </a:solidFill>
               </a:rPr>
-              <a:t>Large icons,</a:t>
+              <a:t>Profile picture:</a:t>
             </a:r>
             <a:pPr indent="0" marL="0">
               <a:spcAft>
@@ -5236,7 +5824,7 @@
                   <a:schemeClr val="tx1"/>
                 </a:solidFill>
               </a:rPr>
-              <a:t> folders first, no menu bar.</a:t>
+              <a:t> a neutral health-worker figure.</a:t>
             </a:r>
             <a:endParaRPr lang="en-US" sz="1500" dirty="0"/>
           </a:p>
@@ -5254,7 +5842,7 @@
                   <a:schemeClr val="tx1"/>
                 </a:solidFill>
               </a:rPr>
-              <a:t>One click</a:t>
+              <a:t>No terminal</a:t>
             </a:r>
             <a:pPr indent="0" marL="0">
               <a:spcAft>
@@ -5268,47 +5856,15 @@
                   <a:schemeClr val="tx1"/>
                 </a:solidFill>
               </a:rPr>
-              <a:t> from the shortcut on the taskbar.</a:t>
+              <a:t> and no "run command".</a:t>
             </a:r>
             <a:endParaRPr lang="en-US" sz="1500" dirty="0"/>
           </a:p>
-          <a:p>
-            <a:pPr marL="342900" indent="-342900">
-              <a:spcAft>
-                <a:spcPts val="800"/>
-              </a:spcAft>
-              <a:buSzPct val="100000"/>
-              <a:buChar char="•"/>
-            </a:pPr>
-            <a:r>
-              <a:rPr lang="en-US" sz="1500" b="1" dirty="0">
-                <a:solidFill>
-                  <a:schemeClr val="tx1"/>
-                </a:solidFill>
-              </a:rPr>
-              <a:t>Plain names:</a:t>
-            </a:r>
-            <a:pPr indent="0" marL="0">
-              <a:spcAft>
-                <a:spcPts val="800"/>
-              </a:spcAft>
-              <a:buNone/>
-            </a:pPr>
-            <a:r>
-              <a:rPr lang="en-US" sz="1500" dirty="0">
-                <a:solidFill>
-                  <a:schemeClr val="tx1"/>
-                </a:solidFill>
-              </a:rPr>
-              <a:t> Files, Pictures, Text and Mouse. Text is Medicus' own text editor.</a:t>
-            </a:r>
-            <a:endParaRPr lang="en-US" sz="1500" dirty="0"/>
-          </a:p>
-        </p:txBody>
-      </p:sp>
-      <p:sp>
-        <p:nvSpPr>
-          <p:cNvPr id="4" name="Files – the file manager frame"/>
+        </p:txBody>
+      </p:sp>
+      <p:sp>
+        <p:nvSpPr>
+          <p:cNvPr id="4" name="The Start menu frame"/>
           <p:cNvSpPr/>
           <p:nvPr/>
         </p:nvSpPr>
@@ -5340,7 +5896,7 @@
       </p:sp>
       <p:pic>
         <p:nvPicPr>
-          <p:cNvPr id="5" name="Files – the file manager" descr="Files – the file manager">    </p:cNvPr>
+          <p:cNvPr id="5" name="The Start menu" descr="The Start menu">    </p:cNvPr>
           <p:cNvPicPr>
             <a:picLocks noChangeAspect="1"/>
           </p:cNvPicPr>
@@ -5437,13 +5993,13 @@
           <p:cNvPr id="2" name="Text 0"/>
           <p:cNvSpPr/>
           <p:nvPr>
-            <p:ph idx="100" type="body" hasCustomPrompt="1"/>
-          </p:nvPr>
-        </p:nvSpPr>
-        <p:spPr>
-          <a:xfrm>
-            <a:off x="731520" y="2103120"/>
-            <a:ext cx="2743200" cy="1097280"/>
+            <p:ph idx="100" type="title" hasCustomPrompt="1"/>
+          </p:nvPr>
+        </p:nvSpPr>
+        <p:spPr>
+          <a:xfrm>
+            <a:off x="548640" y="365760"/>
+            <a:ext cx="11064240" cy="731520"/>
           </a:xfrm>
           <a:prstGeom prst="rect">
             <a:avLst/>
@@ -5455,18 +6011,18 @@
           <a:bodyPr wrap="square" rtlCol="0"/>
           <a:lstStyle/>
           <a:p>
-            <a:pPr indent="0" marL="0">
-              <a:buNone/>
-            </a:pPr>
-            <a:r>
-              <a:rPr lang="en-US" sz="6000" b="1" dirty="0">
-                <a:solidFill>
-                  <a:schemeClr val="accent2"/>
-                </a:solidFill>
-              </a:rPr>
-              <a:t>04</a:t>
-            </a:r>
-            <a:endParaRPr lang="en-US" sz="6000" dirty="0"/>
+            <a:pPr algn="l" indent="0" marL="0">
+              <a:buNone/>
+            </a:pPr>
+            <a:r>
+              <a:rPr lang="en-US" sz="3200" b="1" dirty="0">
+                <a:solidFill>
+                  <a:schemeClr val="tx2"/>
+                </a:solidFill>
+              </a:rPr>
+              <a:t>Files – the file manager</a:t>
+            </a:r>
+            <a:endParaRPr lang="en-US" sz="3200" dirty="0"/>
           </a:p>
         </p:txBody>
       </p:sp>
@@ -5475,13 +6031,13 @@
           <p:cNvPr id="3" name="Text 0"/>
           <p:cNvSpPr/>
           <p:nvPr>
-            <p:ph idx="101" type="title" hasCustomPrompt="1"/>
-          </p:nvPr>
-        </p:nvSpPr>
-        <p:spPr>
-          <a:xfrm>
-            <a:off x="731520" y="3108960"/>
-            <a:ext cx="10698480" cy="914400"/>
+            <p:ph idx="101" type="body" hasCustomPrompt="1"/>
+          </p:nvPr>
+        </p:nvSpPr>
+        <p:spPr>
+          <a:xfrm>
+            <a:off x="548640" y="1371600"/>
+            <a:ext cx="3657600" cy="4754880"/>
           </a:xfrm>
           <a:prstGeom prst="rect">
             <a:avLst/>
@@ -5490,59 +6046,236 @@
           <a:ln/>
         </p:spPr>
         <p:txBody>
-          <a:bodyPr wrap="square" rtlCol="0"/>
-          <a:lstStyle/>
-          <a:p>
-            <a:pPr algn="l" indent="0" marL="0">
-              <a:buNone/>
-            </a:pPr>
-            <a:r>
-              <a:rPr lang="en-US" sz="4000" b="1" dirty="0">
-                <a:solidFill>
-                  <a:schemeClr val="bg1"/>
-                </a:solidFill>
-              </a:rPr>
-              <a:t>Apps and features</a:t>
-            </a:r>
-            <a:endParaRPr lang="en-US" sz="4000" dirty="0"/>
-          </a:p>
-        </p:txBody>
-      </p:sp>
-      <p:sp>
-        <p:nvSpPr>
-          <p:cNvPr id="4" name="Text 0"/>
+          <a:bodyPr wrap="square" rtlCol="0" anchor="t"/>
+          <a:lstStyle/>
+          <a:p>
+            <a:pPr marL="342900" indent="-342900">
+              <a:spcAft>
+                <a:spcPts val="800"/>
+              </a:spcAft>
+              <a:buSzPct val="100000"/>
+              <a:buChar char="•"/>
+            </a:pPr>
+            <a:r>
+              <a:rPr lang="en-US" sz="1500" b="1" dirty="0">
+                <a:solidFill>
+                  <a:schemeClr val="tx1"/>
+                </a:solidFill>
+              </a:rPr>
+              <a:t>A tidy sidebar:</a:t>
+            </a:r>
+            <a:pPr indent="0" marL="0">
+              <a:spcAft>
+                <a:spcPts val="800"/>
+              </a:spcAft>
+              <a:buNone/>
+            </a:pPr>
+            <a:r>
+              <a:rPr lang="en-US" sz="1500" dirty="0">
+                <a:solidFill>
+                  <a:schemeClr val="tx1"/>
+                </a:solidFill>
+              </a:rPr>
+              <a:t> Home, Desktop, Documents, Pictures, Downloads and Trash.</a:t>
+            </a:r>
+            <a:endParaRPr lang="en-US" sz="1500" dirty="0"/>
+          </a:p>
+          <a:p>
+            <a:pPr marL="342900" indent="-342900">
+              <a:spcAft>
+                <a:spcPts val="800"/>
+              </a:spcAft>
+              <a:buSzPct val="100000"/>
+              <a:buChar char="•"/>
+            </a:pPr>
+            <a:r>
+              <a:rPr lang="en-US" sz="1500" b="1" dirty="0">
+                <a:solidFill>
+                  <a:schemeClr val="tx1"/>
+                </a:solidFill>
+              </a:rPr>
+              <a:t>Large icons,</a:t>
+            </a:r>
+            <a:pPr indent="0" marL="0">
+              <a:spcAft>
+                <a:spcPts val="800"/>
+              </a:spcAft>
+              <a:buNone/>
+            </a:pPr>
+            <a:r>
+              <a:rPr lang="en-US" sz="1500" dirty="0">
+                <a:solidFill>
+                  <a:schemeClr val="tx1"/>
+                </a:solidFill>
+              </a:rPr>
+              <a:t> folders first, no menu bar.</a:t>
+            </a:r>
+            <a:endParaRPr lang="en-US" sz="1500" dirty="0"/>
+          </a:p>
+          <a:p>
+            <a:pPr marL="342900" indent="-342900">
+              <a:spcAft>
+                <a:spcPts val="800"/>
+              </a:spcAft>
+              <a:buSzPct val="100000"/>
+              <a:buChar char="•"/>
+            </a:pPr>
+            <a:r>
+              <a:rPr lang="en-US" sz="1500" b="1" dirty="0">
+                <a:solidFill>
+                  <a:schemeClr val="tx1"/>
+                </a:solidFill>
+              </a:rPr>
+              <a:t>One click</a:t>
+            </a:r>
+            <a:pPr indent="0" marL="0">
+              <a:spcAft>
+                <a:spcPts val="800"/>
+              </a:spcAft>
+              <a:buNone/>
+            </a:pPr>
+            <a:r>
+              <a:rPr lang="en-US" sz="1500" dirty="0">
+                <a:solidFill>
+                  <a:schemeClr val="tx1"/>
+                </a:solidFill>
+              </a:rPr>
+              <a:t> from the shortcut on the taskbar.</a:t>
+            </a:r>
+            <a:endParaRPr lang="en-US" sz="1500" dirty="0"/>
+          </a:p>
+          <a:p>
+            <a:pPr marL="342900" indent="-342900">
+              <a:spcAft>
+                <a:spcPts val="800"/>
+              </a:spcAft>
+              <a:buSzPct val="100000"/>
+              <a:buChar char="•"/>
+            </a:pPr>
+            <a:r>
+              <a:rPr lang="en-US" sz="1500" b="1" dirty="0">
+                <a:solidFill>
+                  <a:schemeClr val="tx1"/>
+                </a:solidFill>
+              </a:rPr>
+              <a:t>Plain names:</a:t>
+            </a:r>
+            <a:pPr indent="0" marL="0">
+              <a:spcAft>
+                <a:spcPts val="800"/>
+              </a:spcAft>
+              <a:buNone/>
+            </a:pPr>
+            <a:r>
+              <a:rPr lang="en-US" sz="1500" dirty="0">
+                <a:solidFill>
+                  <a:schemeClr val="tx1"/>
+                </a:solidFill>
+              </a:rPr>
+              <a:t> Files, Pictures, Text and Mouse. Text is Medicus' own text editor.</a:t>
+            </a:r>
+            <a:endParaRPr lang="en-US" sz="1500" dirty="0"/>
+          </a:p>
+        </p:txBody>
+      </p:sp>
+      <p:sp>
+        <p:nvSpPr>
+          <p:cNvPr id="4" name="Files – the file manager frame"/>
           <p:cNvSpPr/>
-          <p:nvPr>
-            <p:ph idx="102" type="body" hasCustomPrompt="1"/>
-          </p:nvPr>
-        </p:nvSpPr>
-        <p:spPr>
-          <a:xfrm>
-            <a:off x="731520" y="4023360"/>
-            <a:ext cx="10698480" cy="822960"/>
-          </a:xfrm>
-          <a:prstGeom prst="rect">
-            <a:avLst/>
-          </a:prstGeom>
-          <a:noFill/>
-          <a:ln/>
-        </p:spPr>
-        <p:txBody>
-          <a:bodyPr wrap="square" rtlCol="0"/>
-          <a:lstStyle/>
-          <a:p>
-            <a:pPr indent="0" marL="0">
-              <a:buNone/>
-            </a:pPr>
-            <a:r>
-              <a:rPr lang="en-US" sz="1800" dirty="0">
-                <a:solidFill>
-                  <a:schemeClr val="accent2"/>
-                </a:solidFill>
-              </a:rPr>
-              <a:t>Patient record, Post, browser, security and tools</a:t>
-            </a:r>
-            <a:endParaRPr lang="en-US" sz="1800" dirty="0"/>
+          <p:nvPr/>
+        </p:nvSpPr>
+        <p:spPr>
+          <a:xfrm>
+            <a:off x="4526280" y="1371600"/>
+            <a:ext cx="7132320" cy="4457700"/>
+          </a:xfrm>
+          <a:prstGeom prst="rect">
+            <a:avLst/>
+          </a:prstGeom>
+          <a:solidFill>
+            <a:schemeClr val="bg1"/>
+          </a:solidFill>
+          <a:ln w="9525">
+            <a:solidFill>
+              <a:srgbClr val="D2DDD5"/>
+            </a:solidFill>
+            <a:prstDash val="solid"/>
+          </a:ln>
+          <a:effectLst>
+            <a:outerShdw sx="100000" sy="100000" kx="0" ky="0" algn="bl" rotWithShape="0" blurRad="101600" dist="38100" dir="5400000">
+              <a:srgbClr val="000000">
+                <a:alpha val="25000"/>
+              </a:srgbClr>
+            </a:outerShdw>
+          </a:effectLst>
+        </p:spPr>
+      </p:sp>
+      <p:pic>
+        <p:nvPicPr>
+          <p:cNvPr id="5" name="Files – the file manager" descr="Files – the file manager">    </p:cNvPr>
+          <p:cNvPicPr>
+            <a:picLocks noChangeAspect="1"/>
+          </p:cNvPicPr>
+          <p:nvPr/>
+        </p:nvPicPr>
+        <p:blipFill>
+          <a:blip r:embed="rId1"/>
+          <a:stretch>
+            <a:fillRect/>
+          </a:stretch>
+        </p:blipFill>
+        <p:spPr>
+          <a:xfrm>
+            <a:off x="4526280" y="1371600"/>
+            <a:ext cx="7132320" cy="4457700"/>
+          </a:xfrm>
+          <a:prstGeom prst="rect">
+            <a:avLst/>
+          </a:prstGeom>
+        </p:spPr>
+      </p:pic>
+      <p:sp>
+        <p:nvSpPr>
+          <p:cNvPr id="25" name="Slide Number Placeholder 0"/>
+          <p:cNvSpPr>
+            <a:spLocks noGrp="1"/>
+          </p:cNvSpPr>
+          <p:nvPr>
+            <p:ph type="sldNum" sz="quarter" idx="4294967295"/>
+          </p:nvPr>
+        </p:nvSpPr>
+        <p:spPr>
+          <a:xfrm>
+            <a:off x="11247120" y="6400800"/>
+            <a:ext cx="457200" cy="274320"/>
+          </a:xfrm>
+          <a:prstGeom prst="rect">
+            <a:avLst/>
+          </a:prstGeom>
+          <a:extLst>
+            <a:ext uri="{C572A759-6A51-4108-AA02-DFA0A04FC94B}">
+              <ma14:wrappingTextBoxFlag xmlns:ma14="http://schemas.microsoft.com/office/mac/drawingml/2011/main" val="0"/>
+            </a:ext>
+          </a:extLst>
+        </p:spPr>
+        <p:txBody>
+          <a:bodyPr/>
+          <a:lstStyle>
+            <a:lvl1pPr>
+              <a:defRPr sz="1000">
+                <a:solidFill>
+                  <a:schemeClr val="accent6"/>
+                </a:solidFill>
+              </a:defRPr>
+            </a:lvl1pPr>
+          </a:lstStyle>
+          <a:p>
+            <a:pPr algn="r"/>
+            <a:fld id="{F7021451-1387-4CA6-816F-3879F97B5CBC}" type="slidenum">
+              <a:rPr b="0" lang="en-US"/>
+              <a:t>15</a:t>
+            </a:fld>
+            <a:endParaRPr lang="en-US"/>
           </a:p>
         </p:txBody>
       </p:sp>
@@ -5603,7 +6336,7 @@
                   <a:schemeClr val="tx2"/>
                 </a:solidFill>
               </a:rPr>
-              <a:t>Patient record</a:t>
+              <a:t>The IT desktop</a:t>
             </a:r>
             <a:endParaRPr lang="en-US" sz="3200" dirty="0"/>
           </a:p>
@@ -5645,7 +6378,7 @@
                   <a:schemeClr val="tx1"/>
                 </a:solidFill>
               </a:rPr>
-              <a:t>Critical information</a:t>
+              <a:t>IT cards</a:t>
             </a:r>
             <a:pPr indent="0" marL="0">
               <a:spcAft>
@@ -5659,7 +6392,7 @@
                   <a:schemeClr val="tx1"/>
                 </a:solidFill>
               </a:rPr>
-              <a:t> at the top: allergies, conditions, implants.</a:t>
+              <a:t> get their own desktop with an amber taskbar, so nobody mixes up the two.</a:t>
             </a:r>
             <a:endParaRPr lang="en-US" sz="1500" dirty="0"/>
           </a:p>
@@ -5677,7 +6410,7 @@
                   <a:schemeClr val="tx1"/>
                 </a:solidFill>
               </a:rPr>
-              <a:t>Visits and notes</a:t>
+              <a:t>IT tools:</a:t>
             </a:r>
             <a:pPr indent="0" marL="0">
               <a:spcAft>
@@ -5691,7 +6424,7 @@
                   <a:schemeClr val="tx1"/>
                 </a:solidFill>
               </a:rPr>
-              <a:t> from every provider in one place.</a:t>
+              <a:t> Security Center, terminal, network, all settings, medical USB devices and the IT handbook.</a:t>
             </a:r>
             <a:endParaRPr lang="en-US" sz="1500" dirty="0"/>
           </a:p>
@@ -5709,7 +6442,7 @@
                   <a:schemeClr val="tx1"/>
                 </a:solidFill>
               </a:rPr>
-              <a:t>E-prescriptions</a:t>
+              <a:t>No patient data</a:t>
             </a:r>
             <a:pPr indent="0" marL="0">
               <a:spcAft>
@@ -5723,47 +6456,15 @@
                   <a:schemeClr val="tx1"/>
                 </a:solidFill>
               </a:rPr>
-              <a:t> for doctors.</a:t>
+              <a:t> in IT mode, and admin commands are confirmed with the IT card PIN.</a:t>
             </a:r>
             <a:endParaRPr lang="en-US" sz="1500" dirty="0"/>
           </a:p>
-          <a:p>
-            <a:pPr marL="342900" indent="-342900">
-              <a:spcAft>
-                <a:spcPts val="800"/>
-              </a:spcAft>
-              <a:buSzPct val="100000"/>
-              <a:buChar char="•"/>
-            </a:pPr>
-            <a:r>
-              <a:rPr lang="en-US" sz="1500" b="1" dirty="0">
-                <a:solidFill>
-                  <a:schemeClr val="tx1"/>
-                </a:solidFill>
-              </a:rPr>
-              <a:t>Every opening is logged</a:t>
-            </a:r>
-            <a:pPr indent="0" marL="0">
-              <a:spcAft>
-                <a:spcPts val="800"/>
-              </a:spcAft>
-              <a:buNone/>
-            </a:pPr>
-            <a:r>
-              <a:rPr lang="en-US" sz="1500" dirty="0">
-                <a:solidFill>
-                  <a:schemeClr val="tx1"/>
-                </a:solidFill>
-              </a:rPr>
-              <a:t> and shown to the patient.</a:t>
-            </a:r>
-            <a:endParaRPr lang="en-US" sz="1500" dirty="0"/>
-          </a:p>
-        </p:txBody>
-      </p:sp>
-      <p:sp>
-        <p:nvSpPr>
-          <p:cNvPr id="4" name="Patient record frame"/>
+        </p:txBody>
+      </p:sp>
+      <p:sp>
+        <p:nvSpPr>
+          <p:cNvPr id="4" name="The IT desktop frame"/>
           <p:cNvSpPr/>
           <p:nvPr/>
         </p:nvSpPr>
@@ -5795,7 +6496,7 @@
       </p:sp>
       <p:pic>
         <p:nvPicPr>
-          <p:cNvPr id="5" name="Patient record" descr="Patient record">    </p:cNvPr>
+          <p:cNvPr id="5" name="The IT desktop" descr="The IT desktop">    </p:cNvPr>
           <p:cNvPicPr>
             <a:picLocks noChangeAspect="1"/>
           </p:cNvPicPr>
@@ -5892,13 +6593,13 @@
           <p:cNvPr id="2" name="Text 0"/>
           <p:cNvSpPr/>
           <p:nvPr>
-            <p:ph idx="100" type="title" hasCustomPrompt="1"/>
-          </p:nvPr>
-        </p:nvSpPr>
-        <p:spPr>
-          <a:xfrm>
-            <a:off x="548640" y="365760"/>
-            <a:ext cx="11064240" cy="731520"/>
+            <p:ph idx="100" type="body" hasCustomPrompt="1"/>
+          </p:nvPr>
+        </p:nvSpPr>
+        <p:spPr>
+          <a:xfrm>
+            <a:off x="731520" y="2103120"/>
+            <a:ext cx="2743200" cy="1097280"/>
           </a:xfrm>
           <a:prstGeom prst="rect">
             <a:avLst/>
@@ -5910,18 +6611,18 @@
           <a:bodyPr wrap="square" rtlCol="0"/>
           <a:lstStyle/>
           <a:p>
-            <a:pPr algn="l" indent="0" marL="0">
-              <a:buNone/>
-            </a:pPr>
-            <a:r>
-              <a:rPr lang="en-US" sz="3200" b="1" dirty="0">
-                <a:solidFill>
-                  <a:schemeClr val="tx2"/>
-                </a:solidFill>
-              </a:rPr>
-              <a:t>Medicus Post – phishing warning</a:t>
-            </a:r>
-            <a:endParaRPr lang="en-US" sz="3200" dirty="0"/>
+            <a:pPr indent="0" marL="0">
+              <a:buNone/>
+            </a:pPr>
+            <a:r>
+              <a:rPr lang="en-US" sz="6000" b="1" dirty="0">
+                <a:solidFill>
+                  <a:schemeClr val="accent2"/>
+                </a:solidFill>
+              </a:rPr>
+              <a:t>04</a:t>
+            </a:r>
+            <a:endParaRPr lang="en-US" sz="6000" dirty="0"/>
           </a:p>
         </p:txBody>
       </p:sp>
@@ -5930,13 +6631,13 @@
           <p:cNvPr id="3" name="Text 0"/>
           <p:cNvSpPr/>
           <p:nvPr>
-            <p:ph idx="101" type="body" hasCustomPrompt="1"/>
-          </p:nvPr>
-        </p:nvSpPr>
-        <p:spPr>
-          <a:xfrm>
-            <a:off x="548640" y="1371600"/>
-            <a:ext cx="3657600" cy="4754880"/>
+            <p:ph idx="101" type="title" hasCustomPrompt="1"/>
+          </p:nvPr>
+        </p:nvSpPr>
+        <p:spPr>
+          <a:xfrm>
+            <a:off x="731520" y="3108960"/>
+            <a:ext cx="10698480" cy="914400"/>
           </a:xfrm>
           <a:prstGeom prst="rect">
             <a:avLst/>
@@ -5945,204 +6646,59 @@
           <a:ln/>
         </p:spPr>
         <p:txBody>
-          <a:bodyPr wrap="square" rtlCol="0" anchor="t"/>
-          <a:lstStyle/>
-          <a:p>
-            <a:pPr marL="342900" indent="-342900">
-              <a:spcAft>
-                <a:spcPts val="800"/>
-              </a:spcAft>
-              <a:buSzPct val="100000"/>
-              <a:buChar char="•"/>
-            </a:pPr>
-            <a:r>
-              <a:rPr lang="en-US" sz="1500" b="1" dirty="0">
-                <a:solidFill>
-                  <a:schemeClr val="tx1"/>
-                </a:solidFill>
-              </a:rPr>
-              <a:t>Green:</a:t>
-            </a:r>
+          <a:bodyPr wrap="square" rtlCol="0"/>
+          <a:lstStyle/>
+          <a:p>
+            <a:pPr algn="l" indent="0" marL="0">
+              <a:buNone/>
+            </a:pPr>
+            <a:r>
+              <a:rPr lang="en-US" sz="4000" b="1" dirty="0">
+                <a:solidFill>
+                  <a:schemeClr val="bg1"/>
+                </a:solidFill>
+              </a:rPr>
+              <a:t>Apps and features</a:t>
+            </a:r>
+            <a:endParaRPr lang="en-US" sz="4000" dirty="0"/>
+          </a:p>
+        </p:txBody>
+      </p:sp>
+      <p:sp>
+        <p:nvSpPr>
+          <p:cNvPr id="4" name="Text 0"/>
+          <p:cNvSpPr/>
+          <p:nvPr>
+            <p:ph idx="102" type="body" hasCustomPrompt="1"/>
+          </p:nvPr>
+        </p:nvSpPr>
+        <p:spPr>
+          <a:xfrm>
+            <a:off x="731520" y="4023360"/>
+            <a:ext cx="10698480" cy="822960"/>
+          </a:xfrm>
+          <a:prstGeom prst="rect">
+            <a:avLst/>
+          </a:prstGeom>
+          <a:noFill/>
+          <a:ln/>
+        </p:spPr>
+        <p:txBody>
+          <a:bodyPr wrap="square" rtlCol="0"/>
+          <a:lstStyle/>
+          <a:p>
             <a:pPr indent="0" marL="0">
-              <a:spcAft>
-                <a:spcPts val="800"/>
-              </a:spcAft>
-              <a:buNone/>
-            </a:pPr>
-            <a:r>
-              <a:rPr lang="en-US" sz="1500" dirty="0">
-                <a:solidFill>
-                  <a:schemeClr val="tx1"/>
-                </a:solidFill>
-              </a:rPr>
-              <a:t> verified health worker in the health network.</a:t>
-            </a:r>
-            <a:endParaRPr lang="en-US" sz="1500" dirty="0"/>
-          </a:p>
-          <a:p>
-            <a:pPr marL="342900" indent="-342900">
-              <a:spcAft>
-                <a:spcPts val="800"/>
-              </a:spcAft>
-              <a:buSzPct val="100000"/>
-              <a:buChar char="•"/>
-            </a:pPr>
-            <a:r>
-              <a:rPr lang="en-US" sz="1500" b="1" dirty="0">
-                <a:solidFill>
-                  <a:schemeClr val="tx1"/>
-                </a:solidFill>
-              </a:rPr>
-              <a:t>Red:</a:t>
-            </a:r>
-            <a:pPr indent="0" marL="0">
-              <a:spcAft>
-                <a:spcPts val="800"/>
-              </a:spcAft>
-              <a:buNone/>
-            </a:pPr>
-            <a:r>
-              <a:rPr lang="en-US" sz="1500" dirty="0">
-                <a:solidFill>
-                  <a:schemeClr val="tx1"/>
-                </a:solidFill>
-              </a:rPr>
-              <a:t> suspicious e-mail, with an explanation in plain language.</a:t>
-            </a:r>
-            <a:endParaRPr lang="en-US" sz="1500" dirty="0"/>
-          </a:p>
-          <a:p>
-            <a:pPr marL="342900" indent="-342900">
-              <a:spcAft>
-                <a:spcPts val="800"/>
-              </a:spcAft>
-              <a:buSzPct val="100000"/>
-              <a:buChar char="•"/>
-            </a:pPr>
-            <a:r>
-              <a:rPr lang="en-US" sz="1500" b="1" dirty="0">
-                <a:solidFill>
-                  <a:schemeClr val="tx1"/>
-                </a:solidFill>
-              </a:rPr>
-              <a:t>Links and attachments</a:t>
-            </a:r>
-            <a:pPr indent="0" marL="0">
-              <a:spcAft>
-                <a:spcPts val="800"/>
-              </a:spcAft>
-              <a:buNone/>
-            </a:pPr>
-            <a:r>
-              <a:rPr lang="en-US" sz="1500" dirty="0">
-                <a:solidFill>
-                  <a:schemeClr val="tx1"/>
-                </a:solidFill>
-              </a:rPr>
-              <a:t> from outside are blocked.</a:t>
-            </a:r>
-            <a:endParaRPr lang="en-US" sz="1500" dirty="0"/>
-          </a:p>
-        </p:txBody>
-      </p:sp>
-      <p:sp>
-        <p:nvSpPr>
-          <p:cNvPr id="4" name="Medicus Post – phishing warning frame"/>
-          <p:cNvSpPr/>
-          <p:nvPr/>
-        </p:nvSpPr>
-        <p:spPr>
-          <a:xfrm>
-            <a:off x="4526280" y="1371600"/>
-            <a:ext cx="7132320" cy="4457700"/>
-          </a:xfrm>
-          <a:prstGeom prst="rect">
-            <a:avLst/>
-          </a:prstGeom>
-          <a:solidFill>
-            <a:schemeClr val="bg1"/>
-          </a:solidFill>
-          <a:ln w="9525">
-            <a:solidFill>
-              <a:srgbClr val="D2DDD5"/>
-            </a:solidFill>
-            <a:prstDash val="solid"/>
-          </a:ln>
-          <a:effectLst>
-            <a:outerShdw sx="100000" sy="100000" kx="0" ky="0" algn="bl" rotWithShape="0" blurRad="101600" dist="38100" dir="5400000">
-              <a:srgbClr val="000000">
-                <a:alpha val="25000"/>
-              </a:srgbClr>
-            </a:outerShdw>
-          </a:effectLst>
-        </p:spPr>
-      </p:sp>
-      <p:pic>
-        <p:nvPicPr>
-          <p:cNvPr id="5" name="Medicus Post – phishing warning" descr="Medicus Post – phishing warning">    </p:cNvPr>
-          <p:cNvPicPr>
-            <a:picLocks noChangeAspect="1"/>
-          </p:cNvPicPr>
-          <p:nvPr/>
-        </p:nvPicPr>
-        <p:blipFill>
-          <a:blip r:embed="rId1"/>
-          <a:stretch>
-            <a:fillRect/>
-          </a:stretch>
-        </p:blipFill>
-        <p:spPr>
-          <a:xfrm>
-            <a:off x="4526280" y="1371600"/>
-            <a:ext cx="7132320" cy="4457700"/>
-          </a:xfrm>
-          <a:prstGeom prst="rect">
-            <a:avLst/>
-          </a:prstGeom>
-        </p:spPr>
-      </p:pic>
-      <p:sp>
-        <p:nvSpPr>
-          <p:cNvPr id="25" name="Slide Number Placeholder 0"/>
-          <p:cNvSpPr>
-            <a:spLocks noGrp="1"/>
-          </p:cNvSpPr>
-          <p:nvPr>
-            <p:ph type="sldNum" sz="quarter" idx="4294967295"/>
-          </p:nvPr>
-        </p:nvSpPr>
-        <p:spPr>
-          <a:xfrm>
-            <a:off x="11247120" y="6400800"/>
-            <a:ext cx="457200" cy="274320"/>
-          </a:xfrm>
-          <a:prstGeom prst="rect">
-            <a:avLst/>
-          </a:prstGeom>
-          <a:extLst>
-            <a:ext uri="{C572A759-6A51-4108-AA02-DFA0A04FC94B}">
-              <ma14:wrappingTextBoxFlag xmlns:ma14="http://schemas.microsoft.com/office/mac/drawingml/2011/main" val="0"/>
-            </a:ext>
-          </a:extLst>
-        </p:spPr>
-        <p:txBody>
-          <a:bodyPr/>
-          <a:lstStyle>
-            <a:lvl1pPr>
-              <a:defRPr sz="1000">
-                <a:solidFill>
-                  <a:schemeClr val="accent6"/>
-                </a:solidFill>
-              </a:defRPr>
-            </a:lvl1pPr>
-          </a:lstStyle>
-          <a:p>
-            <a:pPr algn="r"/>
-            <a:fld id="{F7021451-1387-4CA6-816F-3879F97B5CBC}" type="slidenum">
-              <a:rPr b="0" lang="en-US"/>
-              <a:t>17</a:t>
-            </a:fld>
-            <a:endParaRPr lang="en-US"/>
+              <a:buNone/>
+            </a:pPr>
+            <a:r>
+              <a:rPr lang="en-US" sz="1800" dirty="0">
+                <a:solidFill>
+                  <a:schemeClr val="accent2"/>
+                </a:solidFill>
+              </a:rPr>
+              <a:t>Patient record, Post, browser, security and tools</a:t>
+            </a:r>
+            <a:endParaRPr lang="en-US" sz="1800" dirty="0"/>
           </a:p>
         </p:txBody>
       </p:sp>
@@ -6203,7 +6759,7 @@
                   <a:schemeClr val="tx2"/>
                 </a:solidFill>
               </a:rPr>
-              <a:t>Image sharing: X-ray and MRI</a:t>
+              <a:t>The journal assistant</a:t>
             </a:r>
             <a:endParaRPr lang="en-US" sz="3200" dirty="0"/>
           </a:p>
@@ -6245,7 +6801,7 @@
                   <a:schemeClr val="tx1"/>
                 </a:solidFill>
               </a:rPr>
-              <a:t>DICOM images</a:t>
+              <a:t>From conversation to note:</a:t>
             </a:r>
             <a:pPr indent="0" marL="0">
               <a:spcAft>
@@ -6259,7 +6815,7 @@
                   <a:schemeClr val="tx1"/>
                 </a:solidFill>
               </a:rPr>
-              <a:t> are shown right in the message.</a:t>
+              <a:t> recorded with the patient's consent, transcribed and drafted on the PC itself.</a:t>
             </a:r>
             <a:endParaRPr lang="en-US" sz="1500" dirty="0"/>
           </a:p>
@@ -6277,7 +6833,7 @@
                   <a:schemeClr val="tx1"/>
                 </a:solidFill>
               </a:rPr>
-              <a:t>Brightness, contrast</a:t>
+              <a:t>Source check:</a:t>
             </a:r>
             <a:pPr indent="0" marL="0">
               <a:spcAft>
@@ -6291,7 +6847,7 @@
                   <a:schemeClr val="tx1"/>
                 </a:solidFill>
               </a:rPr>
-              <a:t> and invert.</a:t>
+              <a:t> every sentence is marked Said, Partly or Not found in the conversation.</a:t>
             </a:r>
             <a:endParaRPr lang="en-US" sz="1500" dirty="0"/>
           </a:p>
@@ -6309,7 +6865,7 @@
                   <a:schemeClr val="tx1"/>
                 </a:solidFill>
               </a:rPr>
-              <a:t>Virus-scanned</a:t>
+              <a:t>Always a draft:</a:t>
             </a:r>
             <a:pPr indent="0" marL="0">
               <a:spcAft>
@@ -6323,22 +6879,54 @@
                   <a:schemeClr val="tx1"/>
                 </a:solidFill>
               </a:rPr>
-              <a:t> before they are let in.</a:t>
+              <a:t> the clinician checks and approves before anything is saved.</a:t>
             </a:r>
             <a:endParaRPr lang="en-US" sz="1500" dirty="0"/>
           </a:p>
-        </p:txBody>
-      </p:sp>
-      <p:sp>
-        <p:nvSpPr>
-          <p:cNvPr id="4" name="Image sharing: X-ray and MRI frame"/>
+          <a:p>
+            <a:pPr marL="342900" indent="-342900">
+              <a:spcAft>
+                <a:spcPts val="800"/>
+              </a:spcAft>
+              <a:buSzPct val="100000"/>
+              <a:buChar char="•"/>
+            </a:pPr>
+            <a:r>
+              <a:rPr lang="en-US" sz="1500" b="1" dirty="0">
+                <a:solidFill>
+                  <a:schemeClr val="tx1"/>
+                </a:solidFill>
+              </a:rPr>
+              <a:t>Nothing leaves the PC:</a:t>
+            </a:r>
+            <a:pPr indent="0" marL="0">
+              <a:spcAft>
+                <a:spcPts val="800"/>
+              </a:spcAft>
+              <a:buNone/>
+            </a:pPr>
+            <a:r>
+              <a:rPr lang="en-US" sz="1500" dirty="0">
+                <a:solidFill>
+                  <a:schemeClr val="tx1"/>
+                </a:solidFill>
+              </a:rPr>
+              <a:t> the recording is deleted as soon as the text is made.</a:t>
+            </a:r>
+            <a:endParaRPr lang="en-US" sz="1500" dirty="0"/>
+          </a:p>
+        </p:txBody>
+      </p:sp>
+      <p:sp>
+        <p:nvSpPr>
+          <p:cNvPr id="4" name="The journal assistant frame"/>
           <p:cNvSpPr/>
           <p:nvPr/>
         </p:nvSpPr>
         <p:spPr>
           <a:xfrm>
             <a:off x="4526280" y="1371600"/>
-            <a:ext cx="7132320" cy="4457700"/>
+            <a:ext cx="7132320" cy="4532830"/>
           </a:xfrm>
           <a:prstGeom prst="rect">
             <a:avLst/>
@@ -6363,7 +6951,7 @@
       </p:sp>
       <p:pic>
         <p:nvPicPr>
-          <p:cNvPr id="5" name="Image sharing: X-ray and MRI" descr="Image sharing: X-ray and MRI">    </p:cNvPr>
+          <p:cNvPr id="5" name="The journal assistant" descr="The journal assistant">    </p:cNvPr>
           <p:cNvPicPr>
             <a:picLocks noChangeAspect="1"/>
           </p:cNvPicPr>
@@ -6378,7 +6966,7 @@
         <p:spPr>
           <a:xfrm>
             <a:off x="4526280" y="1371600"/>
-            <a:ext cx="7132320" cy="4457700"/>
+            <a:ext cx="7132320" cy="4532830"/>
           </a:xfrm>
           <a:prstGeom prst="rect">
             <a:avLst/>
@@ -6487,7 +7075,7 @@
                   <a:schemeClr val="tx2"/>
                 </a:solidFill>
               </a:rPr>
-              <a:t>Medicus Nettleser (the browser)</a:t>
+              <a:t>Patient record</a:t>
             </a:r>
             <a:endParaRPr lang="en-US" sz="3200" dirty="0"/>
           </a:p>
@@ -6529,7 +7117,7 @@
                   <a:schemeClr val="tx1"/>
                 </a:solidFill>
               </a:rPr>
-              <a:t>Its own browser</a:t>
+              <a:t>Critical information</a:t>
             </a:r>
             <a:pPr indent="0" marL="0">
               <a:spcAft>
@@ -6543,7 +7131,7 @@
                   <a:schemeClr val="tx1"/>
                 </a:solidFill>
               </a:rPr>
-              <a:t> with its own icon: a light-blue Earth with a rocket in orbit.</a:t>
+              <a:t> at the top: allergies, conditions, implants.</a:t>
             </a:r>
             <a:endParaRPr lang="en-US" sz="1500" dirty="0"/>
           </a:p>
@@ -6561,7 +7149,7 @@
                   <a:schemeClr val="tx1"/>
                 </a:solidFill>
               </a:rPr>
-              <a:t>Approved websites only:</a:t>
+              <a:t>Visits and notes</a:t>
             </a:r>
             <a:pPr indent="0" marL="0">
               <a:spcAft>
@@ -6575,7 +7163,7 @@
                   <a:schemeClr val="tx1"/>
                 </a:solidFill>
               </a:rPr>
-              <a:t> health, public services and Norwegian news.</a:t>
+              <a:t> from every provider in one place.</a:t>
             </a:r>
             <a:endParaRPr lang="en-US" sz="1500" dirty="0"/>
           </a:p>
@@ -6593,7 +7181,7 @@
                   <a:schemeClr val="tx1"/>
                 </a:solidFill>
               </a:rPr>
-              <a:t>No ads or tracking,</a:t>
+              <a:t>E-prescriptions</a:t>
             </a:r>
             <a:pPr indent="0" marL="0">
               <a:spcAft>
@@ -6607,15 +7195,47 @@
                   <a:schemeClr val="tx1"/>
                 </a:solidFill>
               </a:rPr>
-              <a:t> nothing is stored, no other brands.</a:t>
+              <a:t> for doctors.</a:t>
             </a:r>
             <a:endParaRPr lang="en-US" sz="1500" dirty="0"/>
           </a:p>
-        </p:txBody>
-      </p:sp>
-      <p:sp>
-        <p:nvSpPr>
-          <p:cNvPr id="4" name="Medicus Nettleser (the browser) frame"/>
+          <a:p>
+            <a:pPr marL="342900" indent="-342900">
+              <a:spcAft>
+                <a:spcPts val="800"/>
+              </a:spcAft>
+              <a:buSzPct val="100000"/>
+              <a:buChar char="•"/>
+            </a:pPr>
+            <a:r>
+              <a:rPr lang="en-US" sz="1500" b="1" dirty="0">
+                <a:solidFill>
+                  <a:schemeClr val="tx1"/>
+                </a:solidFill>
+              </a:rPr>
+              <a:t>Every opening is logged</a:t>
+            </a:r>
+            <a:pPr indent="0" marL="0">
+              <a:spcAft>
+                <a:spcPts val="800"/>
+              </a:spcAft>
+              <a:buNone/>
+            </a:pPr>
+            <a:r>
+              <a:rPr lang="en-US" sz="1500" dirty="0">
+                <a:solidFill>
+                  <a:schemeClr val="tx1"/>
+                </a:solidFill>
+              </a:rPr>
+              <a:t> and shown to the patient.</a:t>
+            </a:r>
+            <a:endParaRPr lang="en-US" sz="1500" dirty="0"/>
+          </a:p>
+        </p:txBody>
+      </p:sp>
+      <p:sp>
+        <p:nvSpPr>
+          <p:cNvPr id="4" name="Patient record frame"/>
           <p:cNvSpPr/>
           <p:nvPr/>
         </p:nvSpPr>
@@ -6647,7 +7267,7 @@
       </p:sp>
       <p:pic>
         <p:nvPicPr>
-          <p:cNvPr id="5" name="Medicus Nettleser (the browser)" descr="Medicus Nettleser (the browser)">    </p:cNvPr>
+          <p:cNvPr id="5" name="Patient record" descr="Patient record">    </p:cNvPr>
           <p:cNvPicPr>
             <a:picLocks noChangeAspect="1"/>
           </p:cNvPicPr>
@@ -7487,7 +8107,7 @@
                   <a:schemeClr val="tx2"/>
                 </a:solidFill>
               </a:rPr>
-              <a:t>Security Center</a:t>
+              <a:t>Medicus Post – phishing warning</a:t>
             </a:r>
             <a:endParaRPr lang="en-US" sz="3200" dirty="0"/>
           </a:p>
@@ -7529,7 +8149,7 @@
                   <a:schemeClr val="tx1"/>
                 </a:solidFill>
               </a:rPr>
-              <a:t>Checks live</a:t>
+              <a:t>Green:</a:t>
             </a:r>
             <a:pPr indent="0" marL="0">
               <a:spcAft>
@@ -7543,7 +8163,7 @@
                   <a:schemeClr val="tx1"/>
                 </a:solidFill>
               </a:rPr>
-              <a:t> that the protection works.</a:t>
+              <a:t> verified health worker in the health network.</a:t>
             </a:r>
             <a:endParaRPr lang="en-US" sz="1500" dirty="0"/>
           </a:p>
@@ -7561,7 +8181,7 @@
                   <a:schemeClr val="tx1"/>
                 </a:solidFill>
               </a:rPr>
-              <a:t>Green:</a:t>
+              <a:t>Red:</a:t>
             </a:r>
             <a:pPr indent="0" marL="0">
               <a:spcAft>
@@ -7575,7 +8195,7 @@
                   <a:schemeClr val="tx1"/>
                 </a:solidFill>
               </a:rPr>
-              <a:t> all is well. Red: contact IT.</a:t>
+              <a:t> suspicious e-mail, with an explanation in plain language.</a:t>
             </a:r>
             <a:endParaRPr lang="en-US" sz="1500" dirty="0"/>
           </a:p>
@@ -7593,7 +8213,7 @@
                   <a:schemeClr val="tx1"/>
                 </a:solidFill>
               </a:rPr>
-              <a:t>Firewall, USB, virus,</a:t>
+              <a:t>Links and attachments</a:t>
             </a:r>
             <a:pPr indent="0" marL="0">
               <a:spcAft>
@@ -7607,7 +8227,7 @@
                   <a:schemeClr val="tx1"/>
                 </a:solidFill>
               </a:rPr>
-              <a:t> security log, updates, VPN.</a:t>
+              <a:t> from outside are blocked.</a:t>
             </a:r>
             <a:endParaRPr lang="en-US" sz="1500" dirty="0"/>
           </a:p>
@@ -7615,7 +8235,7 @@
       </p:sp>
       <p:sp>
         <p:nvSpPr>
-          <p:cNvPr id="4" name="Security Center frame"/>
+          <p:cNvPr id="4" name="Medicus Post – phishing warning frame"/>
           <p:cNvSpPr/>
           <p:nvPr/>
         </p:nvSpPr>
@@ -7647,7 +8267,7 @@
       </p:sp>
       <p:pic>
         <p:nvPicPr>
-          <p:cNvPr id="5" name="Security Center" descr="Security Center">    </p:cNvPr>
+          <p:cNvPr id="5" name="Medicus Post – phishing warning" descr="Medicus Post – phishing warning">    </p:cNvPr>
           <p:cNvPicPr>
             <a:picLocks noChangeAspect="1"/>
           </p:cNvPicPr>
@@ -7771,7 +8391,7 @@
                   <a:schemeClr val="tx2"/>
                 </a:solidFill>
               </a:rPr>
-              <a:t>Patients see who has opened their record</a:t>
+              <a:t>Image sharing: X-ray and MRI</a:t>
             </a:r>
             <a:endParaRPr lang="en-US" sz="3200" dirty="0"/>
           </a:p>
@@ -7813,7 +8433,7 @@
                   <a:schemeClr val="tx1"/>
                 </a:solidFill>
               </a:rPr>
-              <a:t>The citizen portal</a:t>
+              <a:t>DICOM images</a:t>
             </a:r>
             <a:pPr indent="0" marL="0">
               <a:spcAft>
@@ -7827,7 +8447,7 @@
                   <a:schemeClr val="tx1"/>
                 </a:solidFill>
               </a:rPr>
-              <a:t> (simulated Helsenorge).</a:t>
+              <a:t> are shown right in the message.</a:t>
             </a:r>
             <a:endParaRPr lang="en-US" sz="1500" dirty="0"/>
           </a:p>
@@ -7845,7 +8465,7 @@
                   <a:schemeClr val="tx1"/>
                 </a:solidFill>
               </a:rPr>
-              <a:t>Name, role, place and reason</a:t>
+              <a:t>Brightness, contrast</a:t>
             </a:r>
             <a:pPr indent="0" marL="0">
               <a:spcAft>
@@ -7859,7 +8479,7 @@
                   <a:schemeClr val="tx1"/>
                 </a:solidFill>
               </a:rPr>
-              <a:t> for every opening.</a:t>
+              <a:t> and invert.</a:t>
             </a:r>
             <a:endParaRPr lang="en-US" sz="1500" dirty="0"/>
           </a:p>
@@ -7877,7 +8497,7 @@
                   <a:schemeClr val="tx1"/>
                 </a:solidFill>
               </a:rPr>
-              <a:t>Emergency access</a:t>
+              <a:t>Virus-scanned</a:t>
             </a:r>
             <a:pPr indent="0" marL="0">
               <a:spcAft>
@@ -7891,7 +8511,7 @@
                   <a:schemeClr val="tx1"/>
                 </a:solidFill>
               </a:rPr>
-              <a:t> is clearly marked.</a:t>
+              <a:t> before they are let in.</a:t>
             </a:r>
             <a:endParaRPr lang="en-US" sz="1500" dirty="0"/>
           </a:p>
@@ -7899,7 +8519,7 @@
       </p:sp>
       <p:sp>
         <p:nvSpPr>
-          <p:cNvPr id="4" name="Patients see who has opened their record frame"/>
+          <p:cNvPr id="4" name="Image sharing: X-ray and MRI frame"/>
           <p:cNvSpPr/>
           <p:nvPr/>
         </p:nvSpPr>
@@ -7931,7 +8551,7 @@
       </p:sp>
       <p:pic>
         <p:nvPicPr>
-          <p:cNvPr id="5" name="Patients see who has opened their record" descr="Patients see who has opened their record">    </p:cNvPr>
+          <p:cNvPr id="5" name="Image sharing: X-ray and MRI" descr="Image sharing: X-ray and MRI">    </p:cNvPr>
           <p:cNvPicPr>
             <a:picLocks noChangeAspect="1"/>
           </p:cNvPicPr>
@@ -8055,7 +8675,7 @@
                   <a:schemeClr val="tx2"/>
                 </a:solidFill>
               </a:rPr>
-              <a:t>Requests from authorities</a:t>
+              <a:t>Medicus Nettleser (the browser)</a:t>
             </a:r>
             <a:endParaRPr lang="en-US" sz="3200" dirty="0"/>
           </a:p>
@@ -8097,7 +8717,7 @@
                   <a:schemeClr val="tx1"/>
                 </a:solidFill>
               </a:rPr>
-              <a:t>Only with a legal basis</a:t>
+              <a:t>Its own browser</a:t>
             </a:r>
             <a:pPr indent="0" marL="0">
               <a:spcAft>
@@ -8111,7 +8731,7 @@
                   <a:schemeClr val="tx1"/>
                 </a:solidFill>
               </a:rPr>
-              <a:t> that applies to that exact authority.</a:t>
+              <a:t> with its own icon: a light-blue Earth with a rocket in orbit.</a:t>
             </a:r>
             <a:endParaRPr lang="en-US" sz="1500" dirty="0"/>
           </a:p>
@@ -8129,7 +8749,7 @@
                   <a:schemeClr val="tx1"/>
                 </a:solidFill>
               </a:rPr>
-              <a:t>Police, child welfare, NAV, supervisory bodies:</a:t>
+              <a:t>Approved websites only:</a:t>
             </a:r>
             <a:pPr indent="0" marL="0">
               <a:spcAft>
@@ -8143,7 +8763,7 @@
                   <a:schemeClr val="tx1"/>
                 </a:solidFill>
               </a:rPr>
-              <a:t> each has its own legal bases. Others need consent.</a:t>
+              <a:t> health, public services and Norwegian news.</a:t>
             </a:r>
             <a:endParaRPr lang="en-US" sz="1500" dirty="0"/>
           </a:p>
@@ -8161,7 +8781,7 @@
                   <a:schemeClr val="tx1"/>
                 </a:solidFill>
               </a:rPr>
-              <a:t>A person decides,</a:t>
+              <a:t>No ads or tracking,</a:t>
             </a:r>
             <a:pPr indent="0" marL="0">
               <a:spcAft>
@@ -8175,7 +8795,7 @@
                   <a:schemeClr val="tx1"/>
                 </a:solidFill>
               </a:rPr>
-              <a:t> as little as possible is disclosed, and the patient is notified.</a:t>
+              <a:t> nothing is stored, no other brands.</a:t>
             </a:r>
             <a:endParaRPr lang="en-US" sz="1500" dirty="0"/>
           </a:p>
@@ -8183,7 +8803,7 @@
       </p:sp>
       <p:sp>
         <p:nvSpPr>
-          <p:cNvPr id="4" name="Requests from authorities frame"/>
+          <p:cNvPr id="4" name="Medicus Nettleser (the browser) frame"/>
           <p:cNvSpPr/>
           <p:nvPr/>
         </p:nvSpPr>
@@ -8215,7 +8835,7 @@
       </p:sp>
       <p:pic>
         <p:nvPicPr>
-          <p:cNvPr id="5" name="Requests from authorities" descr="Requests from authorities">    </p:cNvPr>
+          <p:cNvPr id="5" name="Medicus Nettleser (the browser)" descr="Medicus Nettleser (the browser)">    </p:cNvPr>
           <p:cNvPicPr>
             <a:picLocks noChangeAspect="1"/>
           </p:cNvPicPr>
@@ -8339,7 +8959,7 @@
                   <a:schemeClr val="tx2"/>
                 </a:solidFill>
               </a:rPr>
-              <a:t>Medicus Calculator</a:t>
+              <a:t>Security Center</a:t>
             </a:r>
             <a:endParaRPr lang="en-US" sz="3200" dirty="0"/>
           </a:p>
@@ -8381,7 +9001,7 @@
                   <a:schemeClr val="tx1"/>
                 </a:solidFill>
               </a:rPr>
-              <a:t>Calculator</a:t>
+              <a:t>Checks live</a:t>
             </a:r>
             <a:pPr indent="0" marL="0">
               <a:spcAft>
@@ -8395,7 +9015,7 @@
                   <a:schemeClr val="tx1"/>
                 </a:solidFill>
               </a:rPr>
-              <a:t> with decimal comma.</a:t>
+              <a:t> that the protection works.</a:t>
             </a:r>
             <a:endParaRPr lang="en-US" sz="1500" dirty="0"/>
           </a:p>
@@ -8413,7 +9033,7 @@
                   <a:schemeClr val="tx1"/>
                 </a:solidFill>
               </a:rPr>
-              <a:t>All units:</a:t>
+              <a:t>Green:</a:t>
             </a:r>
             <a:pPr indent="0" marL="0">
               <a:spcAft>
@@ -8427,7 +9047,7 @@
                   <a:schemeClr val="tx1"/>
                 </a:solidFill>
               </a:rPr>
-              <a:t> µg–kg, µl–litre, teaspoon and tablespoon.</a:t>
+              <a:t> all is well. Red: contact IT.</a:t>
             </a:r>
             <a:endParaRPr lang="en-US" sz="1500" dirty="0"/>
           </a:p>
@@ -8445,7 +9065,7 @@
                   <a:schemeClr val="tx1"/>
                 </a:solidFill>
               </a:rPr>
-              <a:t>Weight ↔ volume:</a:t>
+              <a:t>Firewall, USB, virus,</a:t>
             </a:r>
             <a:pPr indent="0" marL="0">
               <a:spcAft>
@@ -8459,47 +9079,15 @@
                   <a:schemeClr val="tx1"/>
                 </a:solidFill>
               </a:rPr>
-              <a:t> e.g. litres → kg, with densities for blood, saline and more.</a:t>
+              <a:t> security log, updates, VPN.</a:t>
             </a:r>
             <a:endParaRPr lang="en-US" sz="1500" dirty="0"/>
           </a:p>
-          <a:p>
-            <a:pPr marL="342900" indent="-342900">
-              <a:spcAft>
-                <a:spcPts val="800"/>
-              </a:spcAft>
-              <a:buSzPct val="100000"/>
-              <a:buChar char="•"/>
-            </a:pPr>
-            <a:r>
-              <a:rPr lang="en-US" sz="1500" b="1" dirty="0">
-                <a:solidFill>
-                  <a:schemeClr val="tx1"/>
-                </a:solidFill>
-              </a:rPr>
-              <a:t>Warning:</a:t>
-            </a:r>
-            <a:pPr indent="0" marL="0">
-              <a:spcAft>
-                <a:spcPts val="800"/>
-              </a:spcAft>
-              <a:buNone/>
-            </a:pPr>
-            <a:r>
-              <a:rPr lang="en-US" sz="1500" dirty="0">
-                <a:solidFill>
-                  <a:schemeClr val="tx1"/>
-                </a:solidFill>
-              </a:rPr>
-              <a:t> not for medicine dosing.</a:t>
-            </a:r>
-            <a:endParaRPr lang="en-US" sz="1500" dirty="0"/>
-          </a:p>
-        </p:txBody>
-      </p:sp>
-      <p:sp>
-        <p:nvSpPr>
-          <p:cNvPr id="4" name="Medicus Calculator frame"/>
+        </p:txBody>
+      </p:sp>
+      <p:sp>
+        <p:nvSpPr>
+          <p:cNvPr id="4" name="Security Center frame"/>
           <p:cNvSpPr/>
           <p:nvPr/>
         </p:nvSpPr>
@@ -8531,7 +9119,7 @@
       </p:sp>
       <p:pic>
         <p:nvPicPr>
-          <p:cNvPr id="5" name="Medicus Calculator" descr="Medicus Calculator">    </p:cNvPr>
+          <p:cNvPr id="5" name="Security Center" descr="Security Center">    </p:cNvPr>
           <p:cNvPicPr>
             <a:picLocks noChangeAspect="1"/>
           </p:cNvPicPr>
@@ -8628,13 +9216,13 @@
           <p:cNvPr id="2" name="Text 0"/>
           <p:cNvSpPr/>
           <p:nvPr>
-            <p:ph idx="100" type="body" hasCustomPrompt="1"/>
-          </p:nvPr>
-        </p:nvSpPr>
-        <p:spPr>
-          <a:xfrm>
-            <a:off x="731520" y="2103120"/>
-            <a:ext cx="2743200" cy="1097280"/>
+            <p:ph idx="100" type="title" hasCustomPrompt="1"/>
+          </p:nvPr>
+        </p:nvSpPr>
+        <p:spPr>
+          <a:xfrm>
+            <a:off x="548640" y="365760"/>
+            <a:ext cx="11064240" cy="731520"/>
           </a:xfrm>
           <a:prstGeom prst="rect">
             <a:avLst/>
@@ -8646,18 +9234,18 @@
           <a:bodyPr wrap="square" rtlCol="0"/>
           <a:lstStyle/>
           <a:p>
-            <a:pPr indent="0" marL="0">
-              <a:buNone/>
-            </a:pPr>
-            <a:r>
-              <a:rPr lang="en-US" sz="6000" b="1" dirty="0">
-                <a:solidFill>
-                  <a:schemeClr val="accent2"/>
-                </a:solidFill>
-              </a:rPr>
-              <a:t>05</a:t>
-            </a:r>
-            <a:endParaRPr lang="en-US" sz="6000" dirty="0"/>
+            <a:pPr algn="l" indent="0" marL="0">
+              <a:buNone/>
+            </a:pPr>
+            <a:r>
+              <a:rPr lang="en-US" sz="3200" b="1" dirty="0">
+                <a:solidFill>
+                  <a:schemeClr val="tx2"/>
+                </a:solidFill>
+              </a:rPr>
+              <a:t>Patients see who has opened their record</a:t>
+            </a:r>
+            <a:endParaRPr lang="en-US" sz="3200" dirty="0"/>
           </a:p>
         </p:txBody>
       </p:sp>
@@ -8666,13 +9254,13 @@
           <p:cNvPr id="3" name="Text 0"/>
           <p:cNvSpPr/>
           <p:nvPr>
-            <p:ph idx="101" type="title" hasCustomPrompt="1"/>
-          </p:nvPr>
-        </p:nvSpPr>
-        <p:spPr>
-          <a:xfrm>
-            <a:off x="731520" y="3108960"/>
-            <a:ext cx="10698480" cy="914400"/>
+            <p:ph idx="101" type="body" hasCustomPrompt="1"/>
+          </p:nvPr>
+        </p:nvSpPr>
+        <p:spPr>
+          <a:xfrm>
+            <a:off x="548640" y="1371600"/>
+            <a:ext cx="3657600" cy="4754880"/>
           </a:xfrm>
           <a:prstGeom prst="rect">
             <a:avLst/>
@@ -8681,59 +9269,204 @@
           <a:ln/>
         </p:spPr>
         <p:txBody>
-          <a:bodyPr wrap="square" rtlCol="0"/>
-          <a:lstStyle/>
-          <a:p>
-            <a:pPr algn="l" indent="0" marL="0">
-              <a:buNone/>
-            </a:pPr>
-            <a:r>
-              <a:rPr lang="en-US" sz="4000" b="1" dirty="0">
-                <a:solidFill>
-                  <a:schemeClr val="bg1"/>
-                </a:solidFill>
-              </a:rPr>
-              <a:t>Security</a:t>
-            </a:r>
-            <a:endParaRPr lang="en-US" sz="4000" dirty="0"/>
-          </a:p>
-        </p:txBody>
-      </p:sp>
-      <p:sp>
-        <p:nvSpPr>
-          <p:cNvPr id="4" name="Text 0"/>
+          <a:bodyPr wrap="square" rtlCol="0" anchor="t"/>
+          <a:lstStyle/>
+          <a:p>
+            <a:pPr marL="342900" indent="-342900">
+              <a:spcAft>
+                <a:spcPts val="800"/>
+              </a:spcAft>
+              <a:buSzPct val="100000"/>
+              <a:buChar char="•"/>
+            </a:pPr>
+            <a:r>
+              <a:rPr lang="en-US" sz="1500" b="1" dirty="0">
+                <a:solidFill>
+                  <a:schemeClr val="tx1"/>
+                </a:solidFill>
+              </a:rPr>
+              <a:t>The citizen portal</a:t>
+            </a:r>
+            <a:pPr indent="0" marL="0">
+              <a:spcAft>
+                <a:spcPts val="800"/>
+              </a:spcAft>
+              <a:buNone/>
+            </a:pPr>
+            <a:r>
+              <a:rPr lang="en-US" sz="1500" dirty="0">
+                <a:solidFill>
+                  <a:schemeClr val="tx1"/>
+                </a:solidFill>
+              </a:rPr>
+              <a:t> (simulated Helsenorge).</a:t>
+            </a:r>
+            <a:endParaRPr lang="en-US" sz="1500" dirty="0"/>
+          </a:p>
+          <a:p>
+            <a:pPr marL="342900" indent="-342900">
+              <a:spcAft>
+                <a:spcPts val="800"/>
+              </a:spcAft>
+              <a:buSzPct val="100000"/>
+              <a:buChar char="•"/>
+            </a:pPr>
+            <a:r>
+              <a:rPr lang="en-US" sz="1500" b="1" dirty="0">
+                <a:solidFill>
+                  <a:schemeClr val="tx1"/>
+                </a:solidFill>
+              </a:rPr>
+              <a:t>Name, role, place and reason</a:t>
+            </a:r>
+            <a:pPr indent="0" marL="0">
+              <a:spcAft>
+                <a:spcPts val="800"/>
+              </a:spcAft>
+              <a:buNone/>
+            </a:pPr>
+            <a:r>
+              <a:rPr lang="en-US" sz="1500" dirty="0">
+                <a:solidFill>
+                  <a:schemeClr val="tx1"/>
+                </a:solidFill>
+              </a:rPr>
+              <a:t> for every opening.</a:t>
+            </a:r>
+            <a:endParaRPr lang="en-US" sz="1500" dirty="0"/>
+          </a:p>
+          <a:p>
+            <a:pPr marL="342900" indent="-342900">
+              <a:spcAft>
+                <a:spcPts val="800"/>
+              </a:spcAft>
+              <a:buSzPct val="100000"/>
+              <a:buChar char="•"/>
+            </a:pPr>
+            <a:r>
+              <a:rPr lang="en-US" sz="1500" b="1" dirty="0">
+                <a:solidFill>
+                  <a:schemeClr val="tx1"/>
+                </a:solidFill>
+              </a:rPr>
+              <a:t>Emergency access</a:t>
+            </a:r>
+            <a:pPr indent="0" marL="0">
+              <a:spcAft>
+                <a:spcPts val="800"/>
+              </a:spcAft>
+              <a:buNone/>
+            </a:pPr>
+            <a:r>
+              <a:rPr lang="en-US" sz="1500" dirty="0">
+                <a:solidFill>
+                  <a:schemeClr val="tx1"/>
+                </a:solidFill>
+              </a:rPr>
+              <a:t> is clearly marked.</a:t>
+            </a:r>
+            <a:endParaRPr lang="en-US" sz="1500" dirty="0"/>
+          </a:p>
+        </p:txBody>
+      </p:sp>
+      <p:sp>
+        <p:nvSpPr>
+          <p:cNvPr id="4" name="Patients see who has opened their record frame"/>
           <p:cNvSpPr/>
-          <p:nvPr>
-            <p:ph idx="102" type="body" hasCustomPrompt="1"/>
-          </p:nvPr>
-        </p:nvSpPr>
-        <p:spPr>
-          <a:xfrm>
-            <a:off x="731520" y="4023360"/>
-            <a:ext cx="10698480" cy="822960"/>
-          </a:xfrm>
-          <a:prstGeom prst="rect">
-            <a:avLst/>
-          </a:prstGeom>
-          <a:noFill/>
-          <a:ln/>
-        </p:spPr>
-        <p:txBody>
-          <a:bodyPr wrap="square" rtlCol="0"/>
-          <a:lstStyle/>
-          <a:p>
-            <a:pPr indent="0" marL="0">
-              <a:buNone/>
-            </a:pPr>
-            <a:r>
-              <a:rPr lang="en-US" sz="1800" dirty="0">
-                <a:solidFill>
-                  <a:schemeClr val="accent2"/>
-                </a:solidFill>
-              </a:rPr>
-              <a:t>Layer upon layer – no single fault opens everything</a:t>
-            </a:r>
-            <a:endParaRPr lang="en-US" sz="1800" dirty="0"/>
+          <p:nvPr/>
+        </p:nvSpPr>
+        <p:spPr>
+          <a:xfrm>
+            <a:off x="4526280" y="1371600"/>
+            <a:ext cx="7132320" cy="4457700"/>
+          </a:xfrm>
+          <a:prstGeom prst="rect">
+            <a:avLst/>
+          </a:prstGeom>
+          <a:solidFill>
+            <a:schemeClr val="bg1"/>
+          </a:solidFill>
+          <a:ln w="9525">
+            <a:solidFill>
+              <a:srgbClr val="D2DDD5"/>
+            </a:solidFill>
+            <a:prstDash val="solid"/>
+          </a:ln>
+          <a:effectLst>
+            <a:outerShdw sx="100000" sy="100000" kx="0" ky="0" algn="bl" rotWithShape="0" blurRad="101600" dist="38100" dir="5400000">
+              <a:srgbClr val="000000">
+                <a:alpha val="25000"/>
+              </a:srgbClr>
+            </a:outerShdw>
+          </a:effectLst>
+        </p:spPr>
+      </p:sp>
+      <p:pic>
+        <p:nvPicPr>
+          <p:cNvPr id="5" name="Patients see who has opened their record" descr="Patients see who has opened their record">    </p:cNvPr>
+          <p:cNvPicPr>
+            <a:picLocks noChangeAspect="1"/>
+          </p:cNvPicPr>
+          <p:nvPr/>
+        </p:nvPicPr>
+        <p:blipFill>
+          <a:blip r:embed="rId1"/>
+          <a:stretch>
+            <a:fillRect/>
+          </a:stretch>
+        </p:blipFill>
+        <p:spPr>
+          <a:xfrm>
+            <a:off x="4526280" y="1371600"/>
+            <a:ext cx="7132320" cy="4457700"/>
+          </a:xfrm>
+          <a:prstGeom prst="rect">
+            <a:avLst/>
+          </a:prstGeom>
+        </p:spPr>
+      </p:pic>
+      <p:sp>
+        <p:nvSpPr>
+          <p:cNvPr id="25" name="Slide Number Placeholder 0"/>
+          <p:cNvSpPr>
+            <a:spLocks noGrp="1"/>
+          </p:cNvSpPr>
+          <p:nvPr>
+            <p:ph type="sldNum" sz="quarter" idx="4294967295"/>
+          </p:nvPr>
+        </p:nvSpPr>
+        <p:spPr>
+          <a:xfrm>
+            <a:off x="11247120" y="6400800"/>
+            <a:ext cx="457200" cy="274320"/>
+          </a:xfrm>
+          <a:prstGeom prst="rect">
+            <a:avLst/>
+          </a:prstGeom>
+          <a:extLst>
+            <a:ext uri="{C572A759-6A51-4108-AA02-DFA0A04FC94B}">
+              <ma14:wrappingTextBoxFlag xmlns:ma14="http://schemas.microsoft.com/office/mac/drawingml/2011/main" val="0"/>
+            </a:ext>
+          </a:extLst>
+        </p:spPr>
+        <p:txBody>
+          <a:bodyPr/>
+          <a:lstStyle>
+            <a:lvl1pPr>
+              <a:defRPr sz="1000">
+                <a:solidFill>
+                  <a:schemeClr val="accent6"/>
+                </a:solidFill>
+              </a:defRPr>
+            </a:lvl1pPr>
+          </a:lstStyle>
+          <a:p>
+            <a:pPr algn="r"/>
+            <a:fld id="{F7021451-1387-4CA6-816F-3879F97B5CBC}" type="slidenum">
+              <a:rPr b="0" lang="en-US"/>
+              <a:t>24</a:t>
+            </a:fld>
+            <a:endParaRPr lang="en-US"/>
           </a:p>
         </p:txBody>
       </p:sp>
@@ -8794,7 +9527,7 @@
                   <a:schemeClr val="tx2"/>
                 </a:solidFill>
               </a:rPr>
-              <a:t>Protection in layers</a:t>
+              <a:t>Requests from authorities</a:t>
             </a:r>
             <a:endParaRPr lang="en-US" sz="3200" dirty="0"/>
           </a:p>
@@ -8802,19 +9535,137 @@
       </p:sp>
       <p:sp>
         <p:nvSpPr>
-          <p:cNvPr id="3" name="Firewall card"/>
+          <p:cNvPr id="3" name="Text 0"/>
           <p:cNvSpPr/>
-          <p:nvPr/>
-        </p:nvSpPr>
-        <p:spPr>
-          <a:xfrm>
-            <a:off x="548640" y="1234440"/>
-            <a:ext cx="2567178" cy="2377440"/>
-          </a:xfrm>
-          <a:prstGeom prst="roundRect">
-            <a:avLst>
-              <a:gd name="adj" fmla="val 4615"/>
-            </a:avLst>
+          <p:nvPr>
+            <p:ph idx="101" type="body" hasCustomPrompt="1"/>
+          </p:nvPr>
+        </p:nvSpPr>
+        <p:spPr>
+          <a:xfrm>
+            <a:off x="548640" y="1371600"/>
+            <a:ext cx="3657600" cy="4754880"/>
+          </a:xfrm>
+          <a:prstGeom prst="rect">
+            <a:avLst/>
+          </a:prstGeom>
+          <a:noFill/>
+          <a:ln/>
+        </p:spPr>
+        <p:txBody>
+          <a:bodyPr wrap="square" rtlCol="0" anchor="t"/>
+          <a:lstStyle/>
+          <a:p>
+            <a:pPr marL="342900" indent="-342900">
+              <a:spcAft>
+                <a:spcPts val="800"/>
+              </a:spcAft>
+              <a:buSzPct val="100000"/>
+              <a:buChar char="•"/>
+            </a:pPr>
+            <a:r>
+              <a:rPr lang="en-US" sz="1500" b="1" dirty="0">
+                <a:solidFill>
+                  <a:schemeClr val="tx1"/>
+                </a:solidFill>
+              </a:rPr>
+              <a:t>Only with a legal basis</a:t>
+            </a:r>
+            <a:pPr indent="0" marL="0">
+              <a:spcAft>
+                <a:spcPts val="800"/>
+              </a:spcAft>
+              <a:buNone/>
+            </a:pPr>
+            <a:r>
+              <a:rPr lang="en-US" sz="1500" dirty="0">
+                <a:solidFill>
+                  <a:schemeClr val="tx1"/>
+                </a:solidFill>
+              </a:rPr>
+              <a:t> that applies to that exact authority.</a:t>
+            </a:r>
+            <a:endParaRPr lang="en-US" sz="1500" dirty="0"/>
+          </a:p>
+          <a:p>
+            <a:pPr marL="342900" indent="-342900">
+              <a:spcAft>
+                <a:spcPts val="800"/>
+              </a:spcAft>
+              <a:buSzPct val="100000"/>
+              <a:buChar char="•"/>
+            </a:pPr>
+            <a:r>
+              <a:rPr lang="en-US" sz="1500" b="1" dirty="0">
+                <a:solidFill>
+                  <a:schemeClr val="tx1"/>
+                </a:solidFill>
+              </a:rPr>
+              <a:t>Police, child welfare, NAV, supervisory bodies:</a:t>
+            </a:r>
+            <a:pPr indent="0" marL="0">
+              <a:spcAft>
+                <a:spcPts val="800"/>
+              </a:spcAft>
+              <a:buNone/>
+            </a:pPr>
+            <a:r>
+              <a:rPr lang="en-US" sz="1500" dirty="0">
+                <a:solidFill>
+                  <a:schemeClr val="tx1"/>
+                </a:solidFill>
+              </a:rPr>
+              <a:t> each has its own legal bases. Others need consent.</a:t>
+            </a:r>
+            <a:endParaRPr lang="en-US" sz="1500" dirty="0"/>
+          </a:p>
+          <a:p>
+            <a:pPr marL="342900" indent="-342900">
+              <a:spcAft>
+                <a:spcPts val="800"/>
+              </a:spcAft>
+              <a:buSzPct val="100000"/>
+              <a:buChar char="•"/>
+            </a:pPr>
+            <a:r>
+              <a:rPr lang="en-US" sz="1500" b="1" dirty="0">
+                <a:solidFill>
+                  <a:schemeClr val="tx1"/>
+                </a:solidFill>
+              </a:rPr>
+              <a:t>A person decides,</a:t>
+            </a:r>
+            <a:pPr indent="0" marL="0">
+              <a:spcAft>
+                <a:spcPts val="800"/>
+              </a:spcAft>
+              <a:buNone/>
+            </a:pPr>
+            <a:r>
+              <a:rPr lang="en-US" sz="1500" dirty="0">
+                <a:solidFill>
+                  <a:schemeClr val="tx1"/>
+                </a:solidFill>
+              </a:rPr>
+              <a:t> as little as possible is disclosed, and the patient is notified.</a:t>
+            </a:r>
+            <a:endParaRPr lang="en-US" sz="1500" dirty="0"/>
+          </a:p>
+        </p:txBody>
+      </p:sp>
+      <p:sp>
+        <p:nvSpPr>
+          <p:cNvPr id="4" name="Requests from authorities frame"/>
+          <p:cNvSpPr/>
+          <p:nvPr/>
+        </p:nvSpPr>
+        <p:spPr>
+          <a:xfrm>
+            <a:off x="4526280" y="1371600"/>
+            <a:ext cx="7132320" cy="4457700"/>
+          </a:xfrm>
+          <a:prstGeom prst="rect">
+            <a:avLst/>
           </a:prstGeom>
           <a:solidFill>
             <a:schemeClr val="bg1"/>
@@ -8825,31 +9676,18 @@
             </a:solidFill>
             <a:prstDash val="solid"/>
           </a:ln>
-        </p:spPr>
-      </p:sp>
-      <p:sp>
-        <p:nvSpPr>
-          <p:cNvPr id="4" name="Firewall icon ring"/>
-          <p:cNvSpPr/>
-          <p:nvPr/>
-        </p:nvSpPr>
-        <p:spPr>
-          <a:xfrm>
-            <a:off x="822960" y="1508760"/>
-            <a:ext cx="640080" cy="640080"/>
-          </a:xfrm>
-          <a:prstGeom prst="ellipse">
-            <a:avLst/>
-          </a:prstGeom>
-          <a:solidFill>
-            <a:schemeClr val="accent1"/>
-          </a:solidFill>
-          <a:ln/>
+          <a:effectLst>
+            <a:outerShdw sx="100000" sy="100000" kx="0" ky="0" algn="bl" rotWithShape="0" blurRad="101600" dist="38100" dir="5400000">
+              <a:srgbClr val="000000">
+                <a:alpha val="25000"/>
+              </a:srgbClr>
+            </a:outerShdw>
+          </a:effectLst>
         </p:spPr>
       </p:sp>
       <p:pic>
         <p:nvPicPr>
-          <p:cNvPr id="5" name="Firewall icon" descr="Firewall">    </p:cNvPr>
+          <p:cNvPr id="5" name="Requests from authorities" descr="Requests from authorities">    </p:cNvPr>
           <p:cNvPicPr>
             <a:picLocks noChangeAspect="1"/>
           </p:cNvPicPr>
@@ -8863,1087 +9701,14 @@
         </p:blipFill>
         <p:spPr>
           <a:xfrm>
-            <a:off x="960120" y="1645920"/>
-            <a:ext cx="365760" cy="365760"/>
+            <a:off x="4526280" y="1371600"/>
+            <a:ext cx="7132320" cy="4457700"/>
           </a:xfrm>
           <a:prstGeom prst="rect">
             <a:avLst/>
           </a:prstGeom>
         </p:spPr>
       </p:pic>
-      <p:sp>
-        <p:nvSpPr>
-          <p:cNvPr id="6" name="Text 3"/>
-          <p:cNvSpPr txBox="1"/>
-          <p:nvPr/>
-        </p:nvSpPr>
-        <p:spPr>
-          <a:xfrm>
-            <a:off x="822960" y="2286000"/>
-            <a:ext cx="2018538" cy="594360"/>
-          </a:xfrm>
-          <a:prstGeom prst="rect">
-            <a:avLst/>
-          </a:prstGeom>
-          <a:noFill/>
-          <a:ln/>
-        </p:spPr>
-        <p:txBody>
-          <a:bodyPr wrap="square" lIns="0" tIns="0" rIns="0" bIns="0" rtlCol="0" anchor="t"/>
-          <a:lstStyle/>
-          <a:p>
-            <a:pPr indent="0" marL="0">
-              <a:buNone/>
-            </a:pPr>
-            <a:r>
-              <a:rPr lang="en-US" sz="1700" b="1" dirty="0">
-                <a:solidFill>
-                  <a:schemeClr val="tx2"/>
-                </a:solidFill>
-              </a:rPr>
-              <a:t>Firewall</a:t>
-            </a:r>
-            <a:endParaRPr lang="en-US" sz="1700" dirty="0"/>
-          </a:p>
-        </p:txBody>
-      </p:sp>
-      <p:sp>
-        <p:nvSpPr>
-          <p:cNvPr id="7" name="Text 4"/>
-          <p:cNvSpPr txBox="1"/>
-          <p:nvPr/>
-        </p:nvSpPr>
-        <p:spPr>
-          <a:xfrm>
-            <a:off x="822960" y="2926080"/>
-            <a:ext cx="2018538" cy="548640"/>
-          </a:xfrm>
-          <a:prstGeom prst="rect">
-            <a:avLst/>
-          </a:prstGeom>
-          <a:noFill/>
-          <a:ln/>
-        </p:spPr>
-        <p:txBody>
-          <a:bodyPr wrap="square" lIns="0" tIns="0" rIns="0" bIns="0" rtlCol="0" anchor="t"/>
-          <a:lstStyle/>
-          <a:p>
-            <a:pPr indent="0" marL="0">
-              <a:buNone/>
-            </a:pPr>
-            <a:r>
-              <a:rPr lang="en-US" sz="1400" dirty="0">
-                <a:solidFill>
-                  <a:schemeClr val="tx1"/>
-                </a:solidFill>
-              </a:rPr>
-              <a:t>Nobody can connect from outside. Apps reach only the health network.</a:t>
-            </a:r>
-            <a:endParaRPr lang="en-US" sz="1400" dirty="0"/>
-          </a:p>
-        </p:txBody>
-      </p:sp>
-      <p:sp>
-        <p:nvSpPr>
-          <p:cNvPr id="8" name="USB lock card"/>
-          <p:cNvSpPr/>
-          <p:nvPr/>
-        </p:nvSpPr>
-        <p:spPr>
-          <a:xfrm>
-            <a:off x="3390138" y="1234440"/>
-            <a:ext cx="2567178" cy="2377440"/>
-          </a:xfrm>
-          <a:prstGeom prst="roundRect">
-            <a:avLst>
-              <a:gd name="adj" fmla="val 4615"/>
-            </a:avLst>
-          </a:prstGeom>
-          <a:solidFill>
-            <a:schemeClr val="bg1"/>
-          </a:solidFill>
-          <a:ln w="9525">
-            <a:solidFill>
-              <a:srgbClr val="D2DDD5"/>
-            </a:solidFill>
-            <a:prstDash val="solid"/>
-          </a:ln>
-        </p:spPr>
-      </p:sp>
-      <p:sp>
-        <p:nvSpPr>
-          <p:cNvPr id="9" name="USB lock icon ring"/>
-          <p:cNvSpPr/>
-          <p:nvPr/>
-        </p:nvSpPr>
-        <p:spPr>
-          <a:xfrm>
-            <a:off x="3664458" y="1508760"/>
-            <a:ext cx="640080" cy="640080"/>
-          </a:xfrm>
-          <a:prstGeom prst="ellipse">
-            <a:avLst/>
-          </a:prstGeom>
-          <a:solidFill>
-            <a:schemeClr val="accent1"/>
-          </a:solidFill>
-          <a:ln/>
-        </p:spPr>
-      </p:sp>
-      <p:pic>
-        <p:nvPicPr>
-          <p:cNvPr id="10" name="USB lock icon" descr="USB lock">    </p:cNvPr>
-          <p:cNvPicPr>
-            <a:picLocks noChangeAspect="1"/>
-          </p:cNvPicPr>
-          <p:nvPr/>
-        </p:nvPicPr>
-        <p:blipFill>
-          <a:blip r:embed="rId2"/>
-          <a:stretch>
-            <a:fillRect/>
-          </a:stretch>
-        </p:blipFill>
-        <p:spPr>
-          <a:xfrm>
-            <a:off x="3801618" y="1645920"/>
-            <a:ext cx="365760" cy="365760"/>
-          </a:xfrm>
-          <a:prstGeom prst="rect">
-            <a:avLst/>
-          </a:prstGeom>
-        </p:spPr>
-      </p:pic>
-      <p:sp>
-        <p:nvSpPr>
-          <p:cNvPr id="11" name="Text 7"/>
-          <p:cNvSpPr txBox="1"/>
-          <p:nvPr/>
-        </p:nvSpPr>
-        <p:spPr>
-          <a:xfrm>
-            <a:off x="3664458" y="2286000"/>
-            <a:ext cx="2018538" cy="594360"/>
-          </a:xfrm>
-          <a:prstGeom prst="rect">
-            <a:avLst/>
-          </a:prstGeom>
-          <a:noFill/>
-          <a:ln/>
-        </p:spPr>
-        <p:txBody>
-          <a:bodyPr wrap="square" lIns="0" tIns="0" rIns="0" bIns="0" rtlCol="0" anchor="t"/>
-          <a:lstStyle/>
-          <a:p>
-            <a:pPr indent="0" marL="0">
-              <a:buNone/>
-            </a:pPr>
-            <a:r>
-              <a:rPr lang="en-US" sz="1700" b="1" dirty="0">
-                <a:solidFill>
-                  <a:schemeClr val="tx2"/>
-                </a:solidFill>
-              </a:rPr>
-              <a:t>USB lock</a:t>
-            </a:r>
-            <a:endParaRPr lang="en-US" sz="1700" dirty="0"/>
-          </a:p>
-        </p:txBody>
-      </p:sp>
-      <p:sp>
-        <p:nvSpPr>
-          <p:cNvPr id="12" name="Text 8"/>
-          <p:cNvSpPr txBox="1"/>
-          <p:nvPr/>
-        </p:nvSpPr>
-        <p:spPr>
-          <a:xfrm>
-            <a:off x="3664458" y="2926080"/>
-            <a:ext cx="2018538" cy="548640"/>
-          </a:xfrm>
-          <a:prstGeom prst="rect">
-            <a:avLst/>
-          </a:prstGeom>
-          <a:noFill/>
-          <a:ln/>
-        </p:spPr>
-        <p:txBody>
-          <a:bodyPr wrap="square" lIns="0" tIns="0" rIns="0" bIns="0" rtlCol="0" anchor="t"/>
-          <a:lstStyle/>
-          <a:p>
-            <a:pPr indent="0" marL="0">
-              <a:buNone/>
-            </a:pPr>
-            <a:r>
-              <a:rPr lang="en-US" sz="1400" dirty="0">
-                <a:solidFill>
-                  <a:schemeClr val="tx1"/>
-                </a:solidFill>
-              </a:rPr>
-              <a:t>Memory sticks blocked. Only keyboard, mouse, headset and card reader.</a:t>
-            </a:r>
-            <a:endParaRPr lang="en-US" sz="1400" dirty="0"/>
-          </a:p>
-        </p:txBody>
-      </p:sp>
-      <p:sp>
-        <p:nvSpPr>
-          <p:cNvPr id="13" name="Virus scanning card"/>
-          <p:cNvSpPr/>
-          <p:nvPr/>
-        </p:nvSpPr>
-        <p:spPr>
-          <a:xfrm>
-            <a:off x="6231636" y="1234440"/>
-            <a:ext cx="2567178" cy="2377440"/>
-          </a:xfrm>
-          <a:prstGeom prst="roundRect">
-            <a:avLst>
-              <a:gd name="adj" fmla="val 4615"/>
-            </a:avLst>
-          </a:prstGeom>
-          <a:solidFill>
-            <a:schemeClr val="bg1"/>
-          </a:solidFill>
-          <a:ln w="9525">
-            <a:solidFill>
-              <a:srgbClr val="D2DDD5"/>
-            </a:solidFill>
-            <a:prstDash val="solid"/>
-          </a:ln>
-        </p:spPr>
-      </p:sp>
-      <p:sp>
-        <p:nvSpPr>
-          <p:cNvPr id="14" name="Virus scanning icon ring"/>
-          <p:cNvSpPr/>
-          <p:nvPr/>
-        </p:nvSpPr>
-        <p:spPr>
-          <a:xfrm>
-            <a:off x="6505956" y="1508760"/>
-            <a:ext cx="640080" cy="640080"/>
-          </a:xfrm>
-          <a:prstGeom prst="ellipse">
-            <a:avLst/>
-          </a:prstGeom>
-          <a:solidFill>
-            <a:schemeClr val="accent1"/>
-          </a:solidFill>
-          <a:ln/>
-        </p:spPr>
-      </p:sp>
-      <p:pic>
-        <p:nvPicPr>
-          <p:cNvPr id="15" name="Virus scanning icon" descr="Virus scanning">    </p:cNvPr>
-          <p:cNvPicPr>
-            <a:picLocks noChangeAspect="1"/>
-          </p:cNvPicPr>
-          <p:nvPr/>
-        </p:nvPicPr>
-        <p:blipFill>
-          <a:blip r:embed="rId3"/>
-          <a:stretch>
-            <a:fillRect/>
-          </a:stretch>
-        </p:blipFill>
-        <p:spPr>
-          <a:xfrm>
-            <a:off x="6643116" y="1645920"/>
-            <a:ext cx="365760" cy="365760"/>
-          </a:xfrm>
-          <a:prstGeom prst="rect">
-            <a:avLst/>
-          </a:prstGeom>
-        </p:spPr>
-      </p:pic>
-      <p:sp>
-        <p:nvSpPr>
-          <p:cNvPr id="16" name="Text 11"/>
-          <p:cNvSpPr txBox="1"/>
-          <p:nvPr/>
-        </p:nvSpPr>
-        <p:spPr>
-          <a:xfrm>
-            <a:off x="6505956" y="2286000"/>
-            <a:ext cx="2018538" cy="594360"/>
-          </a:xfrm>
-          <a:prstGeom prst="rect">
-            <a:avLst/>
-          </a:prstGeom>
-          <a:noFill/>
-          <a:ln/>
-        </p:spPr>
-        <p:txBody>
-          <a:bodyPr wrap="square" lIns="0" tIns="0" rIns="0" bIns="0" rtlCol="0" anchor="t"/>
-          <a:lstStyle/>
-          <a:p>
-            <a:pPr indent="0" marL="0">
-              <a:buNone/>
-            </a:pPr>
-            <a:r>
-              <a:rPr lang="en-US" sz="1700" b="1" dirty="0">
-                <a:solidFill>
-                  <a:schemeClr val="tx2"/>
-                </a:solidFill>
-              </a:rPr>
-              <a:t>Virus scanning</a:t>
-            </a:r>
-            <a:endParaRPr lang="en-US" sz="1700" dirty="0"/>
-          </a:p>
-        </p:txBody>
-      </p:sp>
-      <p:sp>
-        <p:nvSpPr>
-          <p:cNvPr id="17" name="Text 12"/>
-          <p:cNvSpPr txBox="1"/>
-          <p:nvPr/>
-        </p:nvSpPr>
-        <p:spPr>
-          <a:xfrm>
-            <a:off x="6505956" y="2926080"/>
-            <a:ext cx="2018538" cy="548640"/>
-          </a:xfrm>
-          <a:prstGeom prst="rect">
-            <a:avLst/>
-          </a:prstGeom>
-          <a:noFill/>
-          <a:ln/>
-        </p:spPr>
-        <p:txBody>
-          <a:bodyPr wrap="square" lIns="0" tIns="0" rIns="0" bIns="0" rtlCol="0" anchor="t"/>
-          <a:lstStyle/>
-          <a:p>
-            <a:pPr indent="0" marL="0">
-              <a:buNone/>
-            </a:pPr>
-            <a:r>
-              <a:rPr lang="en-US" sz="1400" dirty="0">
-                <a:solidFill>
-                  <a:schemeClr val="tx1"/>
-                </a:solidFill>
-              </a:rPr>
-              <a:t>Every attachment is scanned before it is let in.</a:t>
-            </a:r>
-            <a:endParaRPr lang="en-US" sz="1400" dirty="0"/>
-          </a:p>
-        </p:txBody>
-      </p:sp>
-      <p:sp>
-        <p:nvSpPr>
-          <p:cNvPr id="18" name="VPN with kill switch card"/>
-          <p:cNvSpPr/>
-          <p:nvPr/>
-        </p:nvSpPr>
-        <p:spPr>
-          <a:xfrm>
-            <a:off x="9073134" y="1234440"/>
-            <a:ext cx="2567178" cy="2377440"/>
-          </a:xfrm>
-          <a:prstGeom prst="roundRect">
-            <a:avLst>
-              <a:gd name="adj" fmla="val 4615"/>
-            </a:avLst>
-          </a:prstGeom>
-          <a:solidFill>
-            <a:schemeClr val="bg1"/>
-          </a:solidFill>
-          <a:ln w="9525">
-            <a:solidFill>
-              <a:srgbClr val="D2DDD5"/>
-            </a:solidFill>
-            <a:prstDash val="solid"/>
-          </a:ln>
-        </p:spPr>
-      </p:sp>
-      <p:sp>
-        <p:nvSpPr>
-          <p:cNvPr id="19" name="VPN with kill switch icon ring"/>
-          <p:cNvSpPr/>
-          <p:nvPr/>
-        </p:nvSpPr>
-        <p:spPr>
-          <a:xfrm>
-            <a:off x="9347454" y="1508760"/>
-            <a:ext cx="640080" cy="640080"/>
-          </a:xfrm>
-          <a:prstGeom prst="ellipse">
-            <a:avLst/>
-          </a:prstGeom>
-          <a:solidFill>
-            <a:schemeClr val="accent1"/>
-          </a:solidFill>
-          <a:ln/>
-        </p:spPr>
-      </p:sp>
-      <p:pic>
-        <p:nvPicPr>
-          <p:cNvPr id="20" name="VPN with kill switch icon" descr="VPN with kill switch">    </p:cNvPr>
-          <p:cNvPicPr>
-            <a:picLocks noChangeAspect="1"/>
-          </p:cNvPicPr>
-          <p:nvPr/>
-        </p:nvPicPr>
-        <p:blipFill>
-          <a:blip r:embed="rId4"/>
-          <a:stretch>
-            <a:fillRect/>
-          </a:stretch>
-        </p:blipFill>
-        <p:spPr>
-          <a:xfrm>
-            <a:off x="9484614" y="1645920"/>
-            <a:ext cx="365760" cy="365760"/>
-          </a:xfrm>
-          <a:prstGeom prst="rect">
-            <a:avLst/>
-          </a:prstGeom>
-        </p:spPr>
-      </p:pic>
-      <p:sp>
-        <p:nvSpPr>
-          <p:cNvPr id="21" name="Text 15"/>
-          <p:cNvSpPr txBox="1"/>
-          <p:nvPr/>
-        </p:nvSpPr>
-        <p:spPr>
-          <a:xfrm>
-            <a:off x="9347454" y="2286000"/>
-            <a:ext cx="2018538" cy="594360"/>
-          </a:xfrm>
-          <a:prstGeom prst="rect">
-            <a:avLst/>
-          </a:prstGeom>
-          <a:noFill/>
-          <a:ln/>
-        </p:spPr>
-        <p:txBody>
-          <a:bodyPr wrap="square" lIns="0" tIns="0" rIns="0" bIns="0" rtlCol="0" anchor="t"/>
-          <a:lstStyle/>
-          <a:p>
-            <a:pPr indent="0" marL="0">
-              <a:buNone/>
-            </a:pPr>
-            <a:r>
-              <a:rPr lang="en-US" sz="1700" b="1" dirty="0">
-                <a:solidFill>
-                  <a:schemeClr val="tx2"/>
-                </a:solidFill>
-              </a:rPr>
-              <a:t>VPN with kill switch</a:t>
-            </a:r>
-            <a:endParaRPr lang="en-US" sz="1700" dirty="0"/>
-          </a:p>
-        </p:txBody>
-      </p:sp>
-      <p:sp>
-        <p:nvSpPr>
-          <p:cNvPr id="22" name="Text 16"/>
-          <p:cNvSpPr txBox="1"/>
-          <p:nvPr/>
-        </p:nvSpPr>
-        <p:spPr>
-          <a:xfrm>
-            <a:off x="9347454" y="2926080"/>
-            <a:ext cx="2018538" cy="548640"/>
-          </a:xfrm>
-          <a:prstGeom prst="rect">
-            <a:avLst/>
-          </a:prstGeom>
-          <a:noFill/>
-          <a:ln/>
-        </p:spPr>
-        <p:txBody>
-          <a:bodyPr wrap="square" lIns="0" tIns="0" rIns="0" bIns="0" rtlCol="0" anchor="t"/>
-          <a:lstStyle/>
-          <a:p>
-            <a:pPr indent="0" marL="0">
-              <a:buNone/>
-            </a:pPr>
-            <a:r>
-              <a:rPr lang="en-US" sz="1400" dirty="0">
-                <a:solidFill>
-                  <a:schemeClr val="tx1"/>
-                </a:solidFill>
-              </a:rPr>
-              <a:t>All traffic encrypted to the health network, no other way out.</a:t>
-            </a:r>
-            <a:endParaRPr lang="en-US" sz="1400" dirty="0"/>
-          </a:p>
-        </p:txBody>
-      </p:sp>
-      <p:sp>
-        <p:nvSpPr>
-          <p:cNvPr id="23" name="No running programs card"/>
-          <p:cNvSpPr/>
-          <p:nvPr/>
-        </p:nvSpPr>
-        <p:spPr>
-          <a:xfrm>
-            <a:off x="548640" y="3886200"/>
-            <a:ext cx="2567178" cy="2377440"/>
-          </a:xfrm>
-          <a:prstGeom prst="roundRect">
-            <a:avLst>
-              <a:gd name="adj" fmla="val 4615"/>
-            </a:avLst>
-          </a:prstGeom>
-          <a:solidFill>
-            <a:schemeClr val="bg1"/>
-          </a:solidFill>
-          <a:ln w="9525">
-            <a:solidFill>
-              <a:srgbClr val="D2DDD5"/>
-            </a:solidFill>
-            <a:prstDash val="solid"/>
-          </a:ln>
-        </p:spPr>
-      </p:sp>
-      <p:sp>
-        <p:nvSpPr>
-          <p:cNvPr id="24" name="No running programs icon ring"/>
-          <p:cNvSpPr/>
-          <p:nvPr/>
-        </p:nvSpPr>
-        <p:spPr>
-          <a:xfrm>
-            <a:off x="822960" y="4160520"/>
-            <a:ext cx="640080" cy="640080"/>
-          </a:xfrm>
-          <a:prstGeom prst="ellipse">
-            <a:avLst/>
-          </a:prstGeom>
-          <a:solidFill>
-            <a:schemeClr val="accent1"/>
-          </a:solidFill>
-          <a:ln/>
-        </p:spPr>
-      </p:sp>
-      <p:pic>
-        <p:nvPicPr>
-          <p:cNvPr id="25" name="No running programs icon" descr="No running programs">    </p:cNvPr>
-          <p:cNvPicPr>
-            <a:picLocks noChangeAspect="1"/>
-          </p:cNvPicPr>
-          <p:nvPr/>
-        </p:nvPicPr>
-        <p:blipFill>
-          <a:blip r:embed="rId5"/>
-          <a:stretch>
-            <a:fillRect/>
-          </a:stretch>
-        </p:blipFill>
-        <p:spPr>
-          <a:xfrm>
-            <a:off x="960120" y="4297680"/>
-            <a:ext cx="365760" cy="365760"/>
-          </a:xfrm>
-          <a:prstGeom prst="rect">
-            <a:avLst/>
-          </a:prstGeom>
-        </p:spPr>
-      </p:pic>
-      <p:sp>
-        <p:nvSpPr>
-          <p:cNvPr id="26" name="Text 19"/>
-          <p:cNvSpPr txBox="1"/>
-          <p:nvPr/>
-        </p:nvSpPr>
-        <p:spPr>
-          <a:xfrm>
-            <a:off x="822960" y="4937760"/>
-            <a:ext cx="2018538" cy="594360"/>
-          </a:xfrm>
-          <a:prstGeom prst="rect">
-            <a:avLst/>
-          </a:prstGeom>
-          <a:noFill/>
-          <a:ln/>
-        </p:spPr>
-        <p:txBody>
-          <a:bodyPr wrap="square" lIns="0" tIns="0" rIns="0" bIns="0" rtlCol="0" anchor="t"/>
-          <a:lstStyle/>
-          <a:p>
-            <a:pPr indent="0" marL="0">
-              <a:buNone/>
-            </a:pPr>
-            <a:r>
-              <a:rPr lang="en-US" sz="1700" b="1" dirty="0">
-                <a:solidFill>
-                  <a:schemeClr val="tx2"/>
-                </a:solidFill>
-              </a:rPr>
-              <a:t>No running programs</a:t>
-            </a:r>
-            <a:endParaRPr lang="en-US" sz="1700" dirty="0"/>
-          </a:p>
-        </p:txBody>
-      </p:sp>
-      <p:sp>
-        <p:nvSpPr>
-          <p:cNvPr id="27" name="Text 20"/>
-          <p:cNvSpPr txBox="1"/>
-          <p:nvPr/>
-        </p:nvSpPr>
-        <p:spPr>
-          <a:xfrm>
-            <a:off x="822960" y="5577840"/>
-            <a:ext cx="2018538" cy="548640"/>
-          </a:xfrm>
-          <a:prstGeom prst="rect">
-            <a:avLst/>
-          </a:prstGeom>
-          <a:noFill/>
-          <a:ln/>
-        </p:spPr>
-        <p:txBody>
-          <a:bodyPr wrap="square" lIns="0" tIns="0" rIns="0" bIns="0" rtlCol="0" anchor="t"/>
-          <a:lstStyle/>
-          <a:p>
-            <a:pPr indent="0" marL="0">
-              <a:buNone/>
-            </a:pPr>
-            <a:r>
-              <a:rPr lang="en-US" sz="1400" dirty="0">
-                <a:solidFill>
-                  <a:schemeClr val="tx1"/>
-                </a:solidFill>
-              </a:rPr>
-              <a:t>Not from the home folder, downloads or temp folders.</a:t>
-            </a:r>
-            <a:endParaRPr lang="en-US" sz="1400" dirty="0"/>
-          </a:p>
-        </p:txBody>
-      </p:sp>
-      <p:sp>
-        <p:nvSpPr>
-          <p:cNvPr id="28" name="Session guard card"/>
-          <p:cNvSpPr/>
-          <p:nvPr/>
-        </p:nvSpPr>
-        <p:spPr>
-          <a:xfrm>
-            <a:off x="3390138" y="3886200"/>
-            <a:ext cx="2567178" cy="2377440"/>
-          </a:xfrm>
-          <a:prstGeom prst="roundRect">
-            <a:avLst>
-              <a:gd name="adj" fmla="val 4615"/>
-            </a:avLst>
-          </a:prstGeom>
-          <a:solidFill>
-            <a:schemeClr val="bg1"/>
-          </a:solidFill>
-          <a:ln w="9525">
-            <a:solidFill>
-              <a:srgbClr val="D2DDD5"/>
-            </a:solidFill>
-            <a:prstDash val="solid"/>
-          </a:ln>
-        </p:spPr>
-      </p:sp>
-      <p:sp>
-        <p:nvSpPr>
-          <p:cNvPr id="29" name="Session guard icon ring"/>
-          <p:cNvSpPr/>
-          <p:nvPr/>
-        </p:nvSpPr>
-        <p:spPr>
-          <a:xfrm>
-            <a:off x="3664458" y="4160520"/>
-            <a:ext cx="640080" cy="640080"/>
-          </a:xfrm>
-          <a:prstGeom prst="ellipse">
-            <a:avLst/>
-          </a:prstGeom>
-          <a:solidFill>
-            <a:schemeClr val="accent1"/>
-          </a:solidFill>
-          <a:ln/>
-        </p:spPr>
-      </p:sp>
-      <p:pic>
-        <p:nvPicPr>
-          <p:cNvPr id="30" name="Session guard icon" descr="Session guard">    </p:cNvPr>
-          <p:cNvPicPr>
-            <a:picLocks noChangeAspect="1"/>
-          </p:cNvPicPr>
-          <p:nvPr/>
-        </p:nvPicPr>
-        <p:blipFill>
-          <a:blip r:embed="rId6"/>
-          <a:stretch>
-            <a:fillRect/>
-          </a:stretch>
-        </p:blipFill>
-        <p:spPr>
-          <a:xfrm>
-            <a:off x="3801618" y="4297680"/>
-            <a:ext cx="365760" cy="365760"/>
-          </a:xfrm>
-          <a:prstGeom prst="rect">
-            <a:avLst/>
-          </a:prstGeom>
-        </p:spPr>
-      </p:pic>
-      <p:sp>
-        <p:nvSpPr>
-          <p:cNvPr id="31" name="Text 23"/>
-          <p:cNvSpPr txBox="1"/>
-          <p:nvPr/>
-        </p:nvSpPr>
-        <p:spPr>
-          <a:xfrm>
-            <a:off x="3664458" y="4937760"/>
-            <a:ext cx="2018538" cy="594360"/>
-          </a:xfrm>
-          <a:prstGeom prst="rect">
-            <a:avLst/>
-          </a:prstGeom>
-          <a:noFill/>
-          <a:ln/>
-        </p:spPr>
-        <p:txBody>
-          <a:bodyPr wrap="square" lIns="0" tIns="0" rIns="0" bIns="0" rtlCol="0" anchor="t"/>
-          <a:lstStyle/>
-          <a:p>
-            <a:pPr indent="0" marL="0">
-              <a:buNone/>
-            </a:pPr>
-            <a:r>
-              <a:rPr lang="en-US" sz="1700" b="1" dirty="0">
-                <a:solidFill>
-                  <a:schemeClr val="tx2"/>
-                </a:solidFill>
-              </a:rPr>
-              <a:t>Session guard</a:t>
-            </a:r>
-            <a:endParaRPr lang="en-US" sz="1700" dirty="0"/>
-          </a:p>
-        </p:txBody>
-      </p:sp>
-      <p:sp>
-        <p:nvSpPr>
-          <p:cNvPr id="32" name="Text 24"/>
-          <p:cNvSpPr txBox="1"/>
-          <p:nvPr/>
-        </p:nvSpPr>
-        <p:spPr>
-          <a:xfrm>
-            <a:off x="3664458" y="5577840"/>
-            <a:ext cx="2018538" cy="548640"/>
-          </a:xfrm>
-          <a:prstGeom prst="rect">
-            <a:avLst/>
-          </a:prstGeom>
-          <a:noFill/>
-          <a:ln/>
-        </p:spPr>
-        <p:txBody>
-          <a:bodyPr wrap="square" lIns="0" tIns="0" rIns="0" bIns="0" rtlCol="0" anchor="t"/>
-          <a:lstStyle/>
-          <a:p>
-            <a:pPr indent="0" marL="0">
-              <a:buNone/>
-            </a:pPr>
-            <a:r>
-              <a:rPr lang="en-US" sz="1400" dirty="0">
-                <a:solidFill>
-                  <a:schemeClr val="tx1"/>
-                </a:solidFill>
-              </a:rPr>
-              <a:t>Card out – the session ends immediately.</a:t>
-            </a:r>
-            <a:endParaRPr lang="en-US" sz="1400" dirty="0"/>
-          </a:p>
-        </p:txBody>
-      </p:sp>
-      <p:sp>
-        <p:nvSpPr>
-          <p:cNvPr id="33" name="Security log card"/>
-          <p:cNvSpPr/>
-          <p:nvPr/>
-        </p:nvSpPr>
-        <p:spPr>
-          <a:xfrm>
-            <a:off x="6231636" y="3886200"/>
-            <a:ext cx="2567178" cy="2377440"/>
-          </a:xfrm>
-          <a:prstGeom prst="roundRect">
-            <a:avLst>
-              <a:gd name="adj" fmla="val 4615"/>
-            </a:avLst>
-          </a:prstGeom>
-          <a:solidFill>
-            <a:schemeClr val="bg1"/>
-          </a:solidFill>
-          <a:ln w="9525">
-            <a:solidFill>
-              <a:srgbClr val="D2DDD5"/>
-            </a:solidFill>
-            <a:prstDash val="solid"/>
-          </a:ln>
-        </p:spPr>
-      </p:sp>
-      <p:sp>
-        <p:nvSpPr>
-          <p:cNvPr id="34" name="Security log icon ring"/>
-          <p:cNvSpPr/>
-          <p:nvPr/>
-        </p:nvSpPr>
-        <p:spPr>
-          <a:xfrm>
-            <a:off x="6505956" y="4160520"/>
-            <a:ext cx="640080" cy="640080"/>
-          </a:xfrm>
-          <a:prstGeom prst="ellipse">
-            <a:avLst/>
-          </a:prstGeom>
-          <a:solidFill>
-            <a:schemeClr val="accent1"/>
-          </a:solidFill>
-          <a:ln/>
-        </p:spPr>
-      </p:sp>
-      <p:pic>
-        <p:nvPicPr>
-          <p:cNvPr id="35" name="Security log icon" descr="Security log">    </p:cNvPr>
-          <p:cNvPicPr>
-            <a:picLocks noChangeAspect="1"/>
-          </p:cNvPicPr>
-          <p:nvPr/>
-        </p:nvPicPr>
-        <p:blipFill>
-          <a:blip r:embed="rId7"/>
-          <a:stretch>
-            <a:fillRect/>
-          </a:stretch>
-        </p:blipFill>
-        <p:spPr>
-          <a:xfrm>
-            <a:off x="6643116" y="4297680"/>
-            <a:ext cx="365760" cy="365760"/>
-          </a:xfrm>
-          <a:prstGeom prst="rect">
-            <a:avLst/>
-          </a:prstGeom>
-        </p:spPr>
-      </p:pic>
-      <p:sp>
-        <p:nvSpPr>
-          <p:cNvPr id="36" name="Text 27"/>
-          <p:cNvSpPr txBox="1"/>
-          <p:nvPr/>
-        </p:nvSpPr>
-        <p:spPr>
-          <a:xfrm>
-            <a:off x="6505956" y="4937760"/>
-            <a:ext cx="2018538" cy="594360"/>
-          </a:xfrm>
-          <a:prstGeom prst="rect">
-            <a:avLst/>
-          </a:prstGeom>
-          <a:noFill/>
-          <a:ln/>
-        </p:spPr>
-        <p:txBody>
-          <a:bodyPr wrap="square" lIns="0" tIns="0" rIns="0" bIns="0" rtlCol="0" anchor="t"/>
-          <a:lstStyle/>
-          <a:p>
-            <a:pPr indent="0" marL="0">
-              <a:buNone/>
-            </a:pPr>
-            <a:r>
-              <a:rPr lang="en-US" sz="1700" b="1" dirty="0">
-                <a:solidFill>
-                  <a:schemeClr val="tx2"/>
-                </a:solidFill>
-              </a:rPr>
-              <a:t>Security log</a:t>
-            </a:r>
-            <a:endParaRPr lang="en-US" sz="1700" dirty="0"/>
-          </a:p>
-        </p:txBody>
-      </p:sp>
-      <p:sp>
-        <p:nvSpPr>
-          <p:cNvPr id="37" name="Text 28"/>
-          <p:cNvSpPr txBox="1"/>
-          <p:nvPr/>
-        </p:nvSpPr>
-        <p:spPr>
-          <a:xfrm>
-            <a:off x="6505956" y="5577840"/>
-            <a:ext cx="2018538" cy="548640"/>
-          </a:xfrm>
-          <a:prstGeom prst="rect">
-            <a:avLst/>
-          </a:prstGeom>
-          <a:noFill/>
-          <a:ln/>
-        </p:spPr>
-        <p:txBody>
-          <a:bodyPr wrap="square" lIns="0" tIns="0" rIns="0" bIns="0" rtlCol="0" anchor="t"/>
-          <a:lstStyle/>
-          <a:p>
-            <a:pPr indent="0" marL="0">
-              <a:buNone/>
-            </a:pPr>
-            <a:r>
-              <a:rPr lang="en-US" sz="1400" dirty="0">
-                <a:solidFill>
-                  <a:schemeClr val="tx1"/>
-                </a:solidFill>
-              </a:rPr>
-              <a:t>Changes to logins, the firewall and settings are logged.</a:t>
-            </a:r>
-            <a:endParaRPr lang="en-US" sz="1400" dirty="0"/>
-          </a:p>
-        </p:txBody>
-      </p:sp>
-      <p:sp>
-        <p:nvSpPr>
-          <p:cNvPr id="38" name="Updates card"/>
-          <p:cNvSpPr/>
-          <p:nvPr/>
-        </p:nvSpPr>
-        <p:spPr>
-          <a:xfrm>
-            <a:off x="9073134" y="3886200"/>
-            <a:ext cx="2567178" cy="2377440"/>
-          </a:xfrm>
-          <a:prstGeom prst="roundRect">
-            <a:avLst>
-              <a:gd name="adj" fmla="val 4615"/>
-            </a:avLst>
-          </a:prstGeom>
-          <a:solidFill>
-            <a:schemeClr val="bg1"/>
-          </a:solidFill>
-          <a:ln w="9525">
-            <a:solidFill>
-              <a:srgbClr val="D2DDD5"/>
-            </a:solidFill>
-            <a:prstDash val="solid"/>
-          </a:ln>
-        </p:spPr>
-      </p:sp>
-      <p:sp>
-        <p:nvSpPr>
-          <p:cNvPr id="39" name="Updates icon ring"/>
-          <p:cNvSpPr/>
-          <p:nvPr/>
-        </p:nvSpPr>
-        <p:spPr>
-          <a:xfrm>
-            <a:off x="9347454" y="4160520"/>
-            <a:ext cx="640080" cy="640080"/>
-          </a:xfrm>
-          <a:prstGeom prst="ellipse">
-            <a:avLst/>
-          </a:prstGeom>
-          <a:solidFill>
-            <a:schemeClr val="accent1"/>
-          </a:solidFill>
-          <a:ln/>
-        </p:spPr>
-      </p:sp>
-      <p:pic>
-        <p:nvPicPr>
-          <p:cNvPr id="40" name="Updates icon" descr="Updates">    </p:cNvPr>
-          <p:cNvPicPr>
-            <a:picLocks noChangeAspect="1"/>
-          </p:cNvPicPr>
-          <p:nvPr/>
-        </p:nvPicPr>
-        <p:blipFill>
-          <a:blip r:embed="rId8"/>
-          <a:stretch>
-            <a:fillRect/>
-          </a:stretch>
-        </p:blipFill>
-        <p:spPr>
-          <a:xfrm>
-            <a:off x="9484614" y="4297680"/>
-            <a:ext cx="365760" cy="365760"/>
-          </a:xfrm>
-          <a:prstGeom prst="rect">
-            <a:avLst/>
-          </a:prstGeom>
-        </p:spPr>
-      </p:pic>
-      <p:sp>
-        <p:nvSpPr>
-          <p:cNvPr id="41" name="Text 31"/>
-          <p:cNvSpPr txBox="1"/>
-          <p:nvPr/>
-        </p:nvSpPr>
-        <p:spPr>
-          <a:xfrm>
-            <a:off x="9347454" y="4937760"/>
-            <a:ext cx="2018538" cy="594360"/>
-          </a:xfrm>
-          <a:prstGeom prst="rect">
-            <a:avLst/>
-          </a:prstGeom>
-          <a:noFill/>
-          <a:ln/>
-        </p:spPr>
-        <p:txBody>
-          <a:bodyPr wrap="square" lIns="0" tIns="0" rIns="0" bIns="0" rtlCol="0" anchor="t"/>
-          <a:lstStyle/>
-          <a:p>
-            <a:pPr indent="0" marL="0">
-              <a:buNone/>
-            </a:pPr>
-            <a:r>
-              <a:rPr lang="en-US" sz="1700" b="1" dirty="0">
-                <a:solidFill>
-                  <a:schemeClr val="tx2"/>
-                </a:solidFill>
-              </a:rPr>
-              <a:t>Updates</a:t>
-            </a:r>
-            <a:endParaRPr lang="en-US" sz="1700" dirty="0"/>
-          </a:p>
-        </p:txBody>
-      </p:sp>
-      <p:sp>
-        <p:nvSpPr>
-          <p:cNvPr id="42" name="Text 32"/>
-          <p:cNvSpPr txBox="1"/>
-          <p:nvPr/>
-        </p:nvSpPr>
-        <p:spPr>
-          <a:xfrm>
-            <a:off x="9347454" y="5577840"/>
-            <a:ext cx="2018538" cy="548640"/>
-          </a:xfrm>
-          <a:prstGeom prst="rect">
-            <a:avLst/>
-          </a:prstGeom>
-          <a:noFill/>
-          <a:ln/>
-        </p:spPr>
-        <p:txBody>
-          <a:bodyPr wrap="square" lIns="0" tIns="0" rIns="0" bIns="0" rtlCol="0" anchor="t"/>
-          <a:lstStyle/>
-          <a:p>
-            <a:pPr indent="0" marL="0">
-              <a:buNone/>
-            </a:pPr>
-            <a:r>
-              <a:rPr lang="en-US" sz="1400" dirty="0">
-                <a:solidFill>
-                  <a:schemeClr val="tx1"/>
-                </a:solidFill>
-              </a:rPr>
-              <a:t>Security updates are installed automatically.</a:t>
-            </a:r>
-            <a:endParaRPr lang="en-US" sz="1400" dirty="0"/>
-          </a:p>
-        </p:txBody>
-      </p:sp>
       <p:sp>
         <p:nvSpPr>
           <p:cNvPr id="25" name="Slide Number Placeholder 0"/>
@@ -10019,13 +9784,13 @@
           <p:cNvPr id="2" name="Text 0"/>
           <p:cNvSpPr/>
           <p:nvPr>
-            <p:ph idx="100" type="body" hasCustomPrompt="1"/>
-          </p:nvPr>
-        </p:nvSpPr>
-        <p:spPr>
-          <a:xfrm>
-            <a:off x="731520" y="2103120"/>
-            <a:ext cx="2743200" cy="1097280"/>
+            <p:ph idx="100" type="title" hasCustomPrompt="1"/>
+          </p:nvPr>
+        </p:nvSpPr>
+        <p:spPr>
+          <a:xfrm>
+            <a:off x="548640" y="365760"/>
+            <a:ext cx="11064240" cy="731520"/>
           </a:xfrm>
           <a:prstGeom prst="rect">
             <a:avLst/>
@@ -10037,18 +9802,18 @@
           <a:bodyPr wrap="square" rtlCol="0"/>
           <a:lstStyle/>
           <a:p>
-            <a:pPr indent="0" marL="0">
-              <a:buNone/>
-            </a:pPr>
-            <a:r>
-              <a:rPr lang="en-US" sz="6000" b="1" dirty="0">
-                <a:solidFill>
-                  <a:schemeClr val="accent2"/>
-                </a:solidFill>
-              </a:rPr>
-              <a:t>06</a:t>
-            </a:r>
-            <a:endParaRPr lang="en-US" sz="6000" dirty="0"/>
+            <a:pPr algn="l" indent="0" marL="0">
+              <a:buNone/>
+            </a:pPr>
+            <a:r>
+              <a:rPr lang="en-US" sz="3200" b="1" dirty="0">
+                <a:solidFill>
+                  <a:schemeClr val="tx2"/>
+                </a:solidFill>
+              </a:rPr>
+              <a:t>Medicus Calculator</a:t>
+            </a:r>
+            <a:endParaRPr lang="en-US" sz="3200" dirty="0"/>
           </a:p>
         </p:txBody>
       </p:sp>
@@ -10057,13 +9822,13 @@
           <p:cNvPr id="3" name="Text 0"/>
           <p:cNvSpPr/>
           <p:nvPr>
-            <p:ph idx="101" type="title" hasCustomPrompt="1"/>
-          </p:nvPr>
-        </p:nvSpPr>
-        <p:spPr>
-          <a:xfrm>
-            <a:off x="731520" y="3108960"/>
-            <a:ext cx="10698480" cy="914400"/>
+            <p:ph idx="101" type="body" hasCustomPrompt="1"/>
+          </p:nvPr>
+        </p:nvSpPr>
+        <p:spPr>
+          <a:xfrm>
+            <a:off x="548640" y="1371600"/>
+            <a:ext cx="3657600" cy="4754880"/>
           </a:xfrm>
           <a:prstGeom prst="rect">
             <a:avLst/>
@@ -10072,59 +9837,268 @@
           <a:ln/>
         </p:spPr>
         <p:txBody>
-          <a:bodyPr wrap="square" rtlCol="0"/>
-          <a:lstStyle/>
-          <a:p>
-            <a:pPr algn="l" indent="0" marL="0">
-              <a:buNone/>
-            </a:pPr>
-            <a:r>
-              <a:rPr lang="en-US" sz="4000" b="1" dirty="0">
-                <a:solidFill>
-                  <a:schemeClr val="bg1"/>
-                </a:solidFill>
-              </a:rPr>
-              <a:t>Shutdown</a:t>
-            </a:r>
-            <a:endParaRPr lang="en-US" sz="4000" dirty="0"/>
-          </a:p>
-        </p:txBody>
-      </p:sp>
-      <p:sp>
-        <p:nvSpPr>
-          <p:cNvPr id="4" name="Text 0"/>
+          <a:bodyPr wrap="square" rtlCol="0" anchor="t"/>
+          <a:lstStyle/>
+          <a:p>
+            <a:pPr marL="342900" indent="-342900">
+              <a:spcAft>
+                <a:spcPts val="800"/>
+              </a:spcAft>
+              <a:buSzPct val="100000"/>
+              <a:buChar char="•"/>
+            </a:pPr>
+            <a:r>
+              <a:rPr lang="en-US" sz="1500" b="1" dirty="0">
+                <a:solidFill>
+                  <a:schemeClr val="tx1"/>
+                </a:solidFill>
+              </a:rPr>
+              <a:t>Calculator</a:t>
+            </a:r>
+            <a:pPr indent="0" marL="0">
+              <a:spcAft>
+                <a:spcPts val="800"/>
+              </a:spcAft>
+              <a:buNone/>
+            </a:pPr>
+            <a:r>
+              <a:rPr lang="en-US" sz="1500" dirty="0">
+                <a:solidFill>
+                  <a:schemeClr val="tx1"/>
+                </a:solidFill>
+              </a:rPr>
+              <a:t> with decimal comma.</a:t>
+            </a:r>
+            <a:endParaRPr lang="en-US" sz="1500" dirty="0"/>
+          </a:p>
+          <a:p>
+            <a:pPr marL="342900" indent="-342900">
+              <a:spcAft>
+                <a:spcPts val="800"/>
+              </a:spcAft>
+              <a:buSzPct val="100000"/>
+              <a:buChar char="•"/>
+            </a:pPr>
+            <a:r>
+              <a:rPr lang="en-US" sz="1500" b="1" dirty="0">
+                <a:solidFill>
+                  <a:schemeClr val="tx1"/>
+                </a:solidFill>
+              </a:rPr>
+              <a:t>All units:</a:t>
+            </a:r>
+            <a:pPr indent="0" marL="0">
+              <a:spcAft>
+                <a:spcPts val="800"/>
+              </a:spcAft>
+              <a:buNone/>
+            </a:pPr>
+            <a:r>
+              <a:rPr lang="en-US" sz="1500" dirty="0">
+                <a:solidFill>
+                  <a:schemeClr val="tx1"/>
+                </a:solidFill>
+              </a:rPr>
+              <a:t> µg–kg, µl–litre, teaspoon and tablespoon.</a:t>
+            </a:r>
+            <a:endParaRPr lang="en-US" sz="1500" dirty="0"/>
+          </a:p>
+          <a:p>
+            <a:pPr marL="342900" indent="-342900">
+              <a:spcAft>
+                <a:spcPts val="800"/>
+              </a:spcAft>
+              <a:buSzPct val="100000"/>
+              <a:buChar char="•"/>
+            </a:pPr>
+            <a:r>
+              <a:rPr lang="en-US" sz="1500" b="1" dirty="0">
+                <a:solidFill>
+                  <a:schemeClr val="tx1"/>
+                </a:solidFill>
+              </a:rPr>
+              <a:t>Weight ↔ volume:</a:t>
+            </a:r>
+            <a:pPr indent="0" marL="0">
+              <a:spcAft>
+                <a:spcPts val="800"/>
+              </a:spcAft>
+              <a:buNone/>
+            </a:pPr>
+            <a:r>
+              <a:rPr lang="en-US" sz="1500" dirty="0">
+                <a:solidFill>
+                  <a:schemeClr val="tx1"/>
+                </a:solidFill>
+              </a:rPr>
+              <a:t> e.g. litres → kg, with densities for blood, saline and more.</a:t>
+            </a:r>
+            <a:endParaRPr lang="en-US" sz="1500" dirty="0"/>
+          </a:p>
+          <a:p>
+            <a:pPr marL="342900" indent="-342900">
+              <a:spcAft>
+                <a:spcPts val="800"/>
+              </a:spcAft>
+              <a:buSzPct val="100000"/>
+              <a:buChar char="•"/>
+            </a:pPr>
+            <a:r>
+              <a:rPr lang="en-US" sz="1500" b="1" dirty="0">
+                <a:solidFill>
+                  <a:schemeClr val="tx1"/>
+                </a:solidFill>
+              </a:rPr>
+              <a:t>Clinical scores:</a:t>
+            </a:r>
+            <a:pPr indent="0" marL="0">
+              <a:spcAft>
+                <a:spcPts val="800"/>
+              </a:spcAft>
+              <a:buNone/>
+            </a:pPr>
+            <a:r>
+              <a:rPr lang="en-US" sz="1500" dirty="0">
+                <a:solidFill>
+                  <a:schemeClr val="tx1"/>
+                </a:solidFill>
+              </a:rPr>
+              <a:t> BMI, eGFR (CKD-EPI 2021), CHA₂DS₂-VASc, NEWS2, GCS, CURB-65, QTc and more.</a:t>
+            </a:r>
+            <a:endParaRPr lang="en-US" sz="1500" dirty="0"/>
+          </a:p>
+          <a:p>
+            <a:pPr marL="342900" indent="-342900">
+              <a:spcAft>
+                <a:spcPts val="800"/>
+              </a:spcAft>
+              <a:buSzPct val="100000"/>
+              <a:buChar char="•"/>
+            </a:pPr>
+            <a:r>
+              <a:rPr lang="en-US" sz="1500" b="1" dirty="0">
+                <a:solidFill>
+                  <a:schemeClr val="tx1"/>
+                </a:solidFill>
+              </a:rPr>
+              <a:t>Warning:</a:t>
+            </a:r>
+            <a:pPr indent="0" marL="0">
+              <a:spcAft>
+                <a:spcPts val="800"/>
+              </a:spcAft>
+              <a:buNone/>
+            </a:pPr>
+            <a:r>
+              <a:rPr lang="en-US" sz="1500" dirty="0">
+                <a:solidFill>
+                  <a:schemeClr val="tx1"/>
+                </a:solidFill>
+              </a:rPr>
+              <a:t> decision support, not a decision – and not for medicine dosing.</a:t>
+            </a:r>
+            <a:endParaRPr lang="en-US" sz="1500" dirty="0"/>
+          </a:p>
+        </p:txBody>
+      </p:sp>
+      <p:sp>
+        <p:nvSpPr>
+          <p:cNvPr id="4" name="Medicus Calculator frame"/>
           <p:cNvSpPr/>
-          <p:nvPr>
-            <p:ph idx="102" type="body" hasCustomPrompt="1"/>
-          </p:nvPr>
-        </p:nvSpPr>
-        <p:spPr>
-          <a:xfrm>
-            <a:off x="731520" y="4023360"/>
-            <a:ext cx="10698480" cy="822960"/>
-          </a:xfrm>
-          <a:prstGeom prst="rect">
-            <a:avLst/>
-          </a:prstGeom>
-          <a:noFill/>
-          <a:ln/>
-        </p:spPr>
-        <p:txBody>
-          <a:bodyPr wrap="square" rtlCol="0"/>
-          <a:lstStyle/>
-          <a:p>
-            <a:pPr indent="0" marL="0">
-              <a:buNone/>
-            </a:pPr>
-            <a:r>
-              <a:rPr lang="en-US" sz="1800" dirty="0">
-                <a:solidFill>
-                  <a:schemeClr val="accent2"/>
-                </a:solidFill>
-              </a:rPr>
-              <a:t>Log out, lock or shut down</a:t>
-            </a:r>
-            <a:endParaRPr lang="en-US" sz="1800" dirty="0"/>
+          <p:nvPr/>
+        </p:nvSpPr>
+        <p:spPr>
+          <a:xfrm>
+            <a:off x="4526280" y="1371600"/>
+            <a:ext cx="7132320" cy="4457700"/>
+          </a:xfrm>
+          <a:prstGeom prst="rect">
+            <a:avLst/>
+          </a:prstGeom>
+          <a:solidFill>
+            <a:schemeClr val="bg1"/>
+          </a:solidFill>
+          <a:ln w="9525">
+            <a:solidFill>
+              <a:srgbClr val="D2DDD5"/>
+            </a:solidFill>
+            <a:prstDash val="solid"/>
+          </a:ln>
+          <a:effectLst>
+            <a:outerShdw sx="100000" sy="100000" kx="0" ky="0" algn="bl" rotWithShape="0" blurRad="101600" dist="38100" dir="5400000">
+              <a:srgbClr val="000000">
+                <a:alpha val="25000"/>
+              </a:srgbClr>
+            </a:outerShdw>
+          </a:effectLst>
+        </p:spPr>
+      </p:sp>
+      <p:pic>
+        <p:nvPicPr>
+          <p:cNvPr id="5" name="Medicus Calculator" descr="Medicus Calculator">    </p:cNvPr>
+          <p:cNvPicPr>
+            <a:picLocks noChangeAspect="1"/>
+          </p:cNvPicPr>
+          <p:nvPr/>
+        </p:nvPicPr>
+        <p:blipFill>
+          <a:blip r:embed="rId1"/>
+          <a:stretch>
+            <a:fillRect/>
+          </a:stretch>
+        </p:blipFill>
+        <p:spPr>
+          <a:xfrm>
+            <a:off x="4526280" y="1371600"/>
+            <a:ext cx="7132320" cy="4457700"/>
+          </a:xfrm>
+          <a:prstGeom prst="rect">
+            <a:avLst/>
+          </a:prstGeom>
+        </p:spPr>
+      </p:pic>
+      <p:sp>
+        <p:nvSpPr>
+          <p:cNvPr id="25" name="Slide Number Placeholder 0"/>
+          <p:cNvSpPr>
+            <a:spLocks noGrp="1"/>
+          </p:cNvSpPr>
+          <p:nvPr>
+            <p:ph type="sldNum" sz="quarter" idx="4294967295"/>
+          </p:nvPr>
+        </p:nvSpPr>
+        <p:spPr>
+          <a:xfrm>
+            <a:off x="11247120" y="6400800"/>
+            <a:ext cx="457200" cy="274320"/>
+          </a:xfrm>
+          <a:prstGeom prst="rect">
+            <a:avLst/>
+          </a:prstGeom>
+          <a:extLst>
+            <a:ext uri="{C572A759-6A51-4108-AA02-DFA0A04FC94B}">
+              <ma14:wrappingTextBoxFlag xmlns:ma14="http://schemas.microsoft.com/office/mac/drawingml/2011/main" val="0"/>
+            </a:ext>
+          </a:extLst>
+        </p:spPr>
+        <p:txBody>
+          <a:bodyPr/>
+          <a:lstStyle>
+            <a:lvl1pPr>
+              <a:defRPr sz="1000">
+                <a:solidFill>
+                  <a:schemeClr val="accent6"/>
+                </a:solidFill>
+              </a:defRPr>
+            </a:lvl1pPr>
+          </a:lstStyle>
+          <a:p>
+            <a:pPr algn="r"/>
+            <a:fld id="{F7021451-1387-4CA6-816F-3879F97B5CBC}" type="slidenum">
+              <a:rPr b="0" lang="en-US"/>
+              <a:t>26</a:t>
+            </a:fld>
+            <a:endParaRPr lang="en-US"/>
           </a:p>
         </p:txBody>
       </p:sp>
@@ -10158,13 +10132,13 @@
           <p:cNvPr id="2" name="Text 0"/>
           <p:cNvSpPr/>
           <p:nvPr>
-            <p:ph idx="100" type="title" hasCustomPrompt="1"/>
-          </p:nvPr>
-        </p:nvSpPr>
-        <p:spPr>
-          <a:xfrm>
-            <a:off x="548640" y="365760"/>
-            <a:ext cx="11064240" cy="731520"/>
+            <p:ph idx="100" type="body" hasCustomPrompt="1"/>
+          </p:nvPr>
+        </p:nvSpPr>
+        <p:spPr>
+          <a:xfrm>
+            <a:off x="731520" y="2103120"/>
+            <a:ext cx="2743200" cy="1097280"/>
           </a:xfrm>
           <a:prstGeom prst="rect">
             <a:avLst/>
@@ -10176,18 +10150,18 @@
           <a:bodyPr wrap="square" rtlCol="0"/>
           <a:lstStyle/>
           <a:p>
-            <a:pPr algn="l" indent="0" marL="0">
-              <a:buNone/>
-            </a:pPr>
-            <a:r>
-              <a:rPr lang="en-US" sz="3200" b="1" dirty="0">
-                <a:solidFill>
-                  <a:schemeClr val="tx2"/>
-                </a:solidFill>
-              </a:rPr>
-              <a:t>The power menu</a:t>
-            </a:r>
-            <a:endParaRPr lang="en-US" sz="3200" dirty="0"/>
+            <a:pPr indent="0" marL="0">
+              <a:buNone/>
+            </a:pPr>
+            <a:r>
+              <a:rPr lang="en-US" sz="6000" b="1" dirty="0">
+                <a:solidFill>
+                  <a:schemeClr val="accent2"/>
+                </a:solidFill>
+              </a:rPr>
+              <a:t>05</a:t>
+            </a:r>
+            <a:endParaRPr lang="en-US" sz="6000" dirty="0"/>
           </a:p>
         </p:txBody>
       </p:sp>
@@ -10196,13 +10170,13 @@
           <p:cNvPr id="3" name="Text 0"/>
           <p:cNvSpPr/>
           <p:nvPr>
-            <p:ph idx="101" type="body" hasCustomPrompt="1"/>
-          </p:nvPr>
-        </p:nvSpPr>
-        <p:spPr>
-          <a:xfrm>
-            <a:off x="548640" y="1371600"/>
-            <a:ext cx="3657600" cy="4754880"/>
+            <p:ph idx="101" type="title" hasCustomPrompt="1"/>
+          </p:nvPr>
+        </p:nvSpPr>
+        <p:spPr>
+          <a:xfrm>
+            <a:off x="731520" y="3108960"/>
+            <a:ext cx="10698480" cy="914400"/>
           </a:xfrm>
           <a:prstGeom prst="rect">
             <a:avLst/>
@@ -10211,204 +10185,59 @@
           <a:ln/>
         </p:spPr>
         <p:txBody>
-          <a:bodyPr wrap="square" rtlCol="0" anchor="t"/>
-          <a:lstStyle/>
-          <a:p>
-            <a:pPr marL="342900" indent="-342900">
-              <a:spcAft>
-                <a:spcPts val="800"/>
-              </a:spcAft>
-              <a:buSzPct val="100000"/>
-              <a:buChar char="•"/>
-            </a:pPr>
-            <a:r>
-              <a:rPr lang="en-US" sz="1500" b="1" dirty="0">
-                <a:solidFill>
-                  <a:schemeClr val="tx1"/>
-                </a:solidFill>
-              </a:rPr>
-              <a:t>Lock screen,</a:t>
-            </a:r>
+          <a:bodyPr wrap="square" rtlCol="0"/>
+          <a:lstStyle/>
+          <a:p>
+            <a:pPr algn="l" indent="0" marL="0">
+              <a:buNone/>
+            </a:pPr>
+            <a:r>
+              <a:rPr lang="en-US" sz="4000" b="1" dirty="0">
+                <a:solidFill>
+                  <a:schemeClr val="bg1"/>
+                </a:solidFill>
+              </a:rPr>
+              <a:t>Security</a:t>
+            </a:r>
+            <a:endParaRPr lang="en-US" sz="4000" dirty="0"/>
+          </a:p>
+        </p:txBody>
+      </p:sp>
+      <p:sp>
+        <p:nvSpPr>
+          <p:cNvPr id="4" name="Text 0"/>
+          <p:cNvSpPr/>
+          <p:nvPr>
+            <p:ph idx="102" type="body" hasCustomPrompt="1"/>
+          </p:nvPr>
+        </p:nvSpPr>
+        <p:spPr>
+          <a:xfrm>
+            <a:off x="731520" y="4023360"/>
+            <a:ext cx="10698480" cy="822960"/>
+          </a:xfrm>
+          <a:prstGeom prst="rect">
+            <a:avLst/>
+          </a:prstGeom>
+          <a:noFill/>
+          <a:ln/>
+        </p:spPr>
+        <p:txBody>
+          <a:bodyPr wrap="square" rtlCol="0"/>
+          <a:lstStyle/>
+          <a:p>
             <a:pPr indent="0" marL="0">
-              <a:spcAft>
-                <a:spcPts val="800"/>
-              </a:spcAft>
-              <a:buNone/>
-            </a:pPr>
-            <a:r>
-              <a:rPr lang="en-US" sz="1500" dirty="0">
-                <a:solidFill>
-                  <a:schemeClr val="tx1"/>
-                </a:solidFill>
-              </a:rPr>
-              <a:t> sleep, restart, shut down, log out.</a:t>
-            </a:r>
-            <a:endParaRPr lang="en-US" sz="1500" dirty="0"/>
-          </a:p>
-          <a:p>
-            <a:pPr marL="342900" indent="-342900">
-              <a:spcAft>
-                <a:spcPts val="800"/>
-              </a:spcAft>
-              <a:buSzPct val="100000"/>
-              <a:buChar char="•"/>
-            </a:pPr>
-            <a:r>
-              <a:rPr lang="en-US" sz="1500" b="1" dirty="0">
-                <a:solidFill>
-                  <a:schemeClr val="tx1"/>
-                </a:solidFill>
-              </a:rPr>
-              <a:t>No hibernate:</a:t>
-            </a:r>
-            <a:pPr indent="0" marL="0">
-              <a:spcAft>
-                <a:spcPts val="800"/>
-              </a:spcAft>
-              <a:buNone/>
-            </a:pPr>
-            <a:r>
-              <a:rPr lang="en-US" sz="1500" dirty="0">
-                <a:solidFill>
-                  <a:schemeClr val="tx1"/>
-                </a:solidFill>
-              </a:rPr>
-              <a:t> it would write patient data to disk.</a:t>
-            </a:r>
-            <a:endParaRPr lang="en-US" sz="1500" dirty="0"/>
-          </a:p>
-          <a:p>
-            <a:pPr marL="342900" indent="-342900">
-              <a:spcAft>
-                <a:spcPts val="800"/>
-              </a:spcAft>
-              <a:buSzPct val="100000"/>
-              <a:buChar char="•"/>
-            </a:pPr>
-            <a:r>
-              <a:rPr lang="en-US" sz="1500" b="1" dirty="0">
-                <a:solidFill>
-                  <a:schemeClr val="tx1"/>
-                </a:solidFill>
-              </a:rPr>
-              <a:t>No "switch user":</a:t>
-            </a:r>
-            <a:pPr indent="0" marL="0">
-              <a:spcAft>
-                <a:spcPts val="800"/>
-              </a:spcAft>
-              <a:buNone/>
-            </a:pPr>
-            <a:r>
-              <a:rPr lang="en-US" sz="1500" dirty="0">
-                <a:solidFill>
-                  <a:schemeClr val="tx1"/>
-                </a:solidFill>
-              </a:rPr>
-              <a:t> the card decides who is logged in.</a:t>
-            </a:r>
-            <a:endParaRPr lang="en-US" sz="1500" dirty="0"/>
-          </a:p>
-        </p:txBody>
-      </p:sp>
-      <p:sp>
-        <p:nvSpPr>
-          <p:cNvPr id="4" name="The power menu frame"/>
-          <p:cNvSpPr/>
-          <p:nvPr/>
-        </p:nvSpPr>
-        <p:spPr>
-          <a:xfrm>
-            <a:off x="4526280" y="1371600"/>
-            <a:ext cx="7132320" cy="4457700"/>
-          </a:xfrm>
-          <a:prstGeom prst="rect">
-            <a:avLst/>
-          </a:prstGeom>
-          <a:solidFill>
-            <a:schemeClr val="bg1"/>
-          </a:solidFill>
-          <a:ln w="9525">
-            <a:solidFill>
-              <a:srgbClr val="D2DDD5"/>
-            </a:solidFill>
-            <a:prstDash val="solid"/>
-          </a:ln>
-          <a:effectLst>
-            <a:outerShdw sx="100000" sy="100000" kx="0" ky="0" algn="bl" rotWithShape="0" blurRad="101600" dist="38100" dir="5400000">
-              <a:srgbClr val="000000">
-                <a:alpha val="25000"/>
-              </a:srgbClr>
-            </a:outerShdw>
-          </a:effectLst>
-        </p:spPr>
-      </p:sp>
-      <p:pic>
-        <p:nvPicPr>
-          <p:cNvPr id="5" name="The power menu" descr="The power menu">    </p:cNvPr>
-          <p:cNvPicPr>
-            <a:picLocks noChangeAspect="1"/>
-          </p:cNvPicPr>
-          <p:nvPr/>
-        </p:nvPicPr>
-        <p:blipFill>
-          <a:blip r:embed="rId1"/>
-          <a:stretch>
-            <a:fillRect/>
-          </a:stretch>
-        </p:blipFill>
-        <p:spPr>
-          <a:xfrm>
-            <a:off x="4526280" y="1371600"/>
-            <a:ext cx="7132320" cy="4457700"/>
-          </a:xfrm>
-          <a:prstGeom prst="rect">
-            <a:avLst/>
-          </a:prstGeom>
-        </p:spPr>
-      </p:pic>
-      <p:sp>
-        <p:nvSpPr>
-          <p:cNvPr id="25" name="Slide Number Placeholder 0"/>
-          <p:cNvSpPr>
-            <a:spLocks noGrp="1"/>
-          </p:cNvSpPr>
-          <p:nvPr>
-            <p:ph type="sldNum" sz="quarter" idx="4294967295"/>
-          </p:nvPr>
-        </p:nvSpPr>
-        <p:spPr>
-          <a:xfrm>
-            <a:off x="11247120" y="6400800"/>
-            <a:ext cx="457200" cy="274320"/>
-          </a:xfrm>
-          <a:prstGeom prst="rect">
-            <a:avLst/>
-          </a:prstGeom>
-          <a:extLst>
-            <a:ext uri="{C572A759-6A51-4108-AA02-DFA0A04FC94B}">
-              <ma14:wrappingTextBoxFlag xmlns:ma14="http://schemas.microsoft.com/office/mac/drawingml/2011/main" val="0"/>
-            </a:ext>
-          </a:extLst>
-        </p:spPr>
-        <p:txBody>
-          <a:bodyPr/>
-          <a:lstStyle>
-            <a:lvl1pPr>
-              <a:defRPr sz="1000">
-                <a:solidFill>
-                  <a:schemeClr val="accent6"/>
-                </a:solidFill>
-              </a:defRPr>
-            </a:lvl1pPr>
-          </a:lstStyle>
-          <a:p>
-            <a:pPr algn="r"/>
-            <a:fld id="{F7021451-1387-4CA6-816F-3879F97B5CBC}" type="slidenum">
-              <a:rPr b="0" lang="en-US"/>
-              <a:t>27</a:t>
-            </a:fld>
-            <a:endParaRPr lang="en-US"/>
+              <a:buNone/>
+            </a:pPr>
+            <a:r>
+              <a:rPr lang="en-US" sz="1800" dirty="0">
+                <a:solidFill>
+                  <a:schemeClr val="accent2"/>
+                </a:solidFill>
+              </a:rPr>
+              <a:t>Layer upon layer – no single fault opens everything</a:t>
+            </a:r>
+            <a:endParaRPr lang="en-US" sz="1800" dirty="0"/>
           </a:p>
         </p:txBody>
       </p:sp>
@@ -10469,7 +10298,7 @@
                   <a:schemeClr val="tx2"/>
                 </a:solidFill>
               </a:rPr>
-              <a:t>The road ahead</a:t>
+              <a:t>Protection in layers</a:t>
             </a:r>
             <a:endParaRPr lang="en-US" sz="3200" dirty="0"/>
           </a:p>
@@ -10477,18 +10306,18 @@
       </p:sp>
       <p:sp>
         <p:nvSpPr>
-          <p:cNvPr id="3" name="Agreement with Norsk helsenett card"/>
+          <p:cNvPr id="3" name="Firewall card"/>
           <p:cNvSpPr/>
           <p:nvPr/>
         </p:nvSpPr>
         <p:spPr>
           <a:xfrm>
-            <a:off x="548640" y="1463040"/>
-            <a:ext cx="2567178" cy="2926080"/>
+            <a:off x="548640" y="1234440"/>
+            <a:ext cx="2567178" cy="2377440"/>
           </a:xfrm>
           <a:prstGeom prst="roundRect">
             <a:avLst>
-              <a:gd name="adj" fmla="val 4274"/>
+              <a:gd name="adj" fmla="val 4615"/>
             </a:avLst>
           </a:prstGeom>
           <a:solidFill>
@@ -10504,13 +10333,13 @@
       </p:sp>
       <p:sp>
         <p:nvSpPr>
-          <p:cNvPr id="4" name="Agreement with Norsk helsenett icon ring"/>
+          <p:cNvPr id="4" name="Firewall icon ring"/>
           <p:cNvSpPr/>
           <p:nvPr/>
         </p:nvSpPr>
         <p:spPr>
           <a:xfrm>
-            <a:off x="822960" y="1737360"/>
+            <a:off x="822960" y="1508760"/>
             <a:ext cx="640080" cy="640080"/>
           </a:xfrm>
           <a:prstGeom prst="ellipse">
@@ -10524,7 +10353,7 @@
       </p:sp>
       <p:pic>
         <p:nvPicPr>
-          <p:cNvPr id="5" name="Agreement with Norsk helsenett icon" descr="Agreement with Norsk helsenett">    </p:cNvPr>
+          <p:cNvPr id="5" name="Firewall icon" descr="Firewall">    </p:cNvPr>
           <p:cNvPicPr>
             <a:picLocks noChangeAspect="1"/>
           </p:cNvPicPr>
@@ -10538,7 +10367,7 @@
         </p:blipFill>
         <p:spPr>
           <a:xfrm>
-            <a:off x="960120" y="1874520"/>
+            <a:off x="960120" y="1645920"/>
             <a:ext cx="365760" cy="365760"/>
           </a:xfrm>
           <a:prstGeom prst="rect">
@@ -10554,7 +10383,7 @@
         </p:nvSpPr>
         <p:spPr>
           <a:xfrm>
-            <a:off x="822960" y="2514600"/>
+            <a:off x="822960" y="2286000"/>
             <a:ext cx="2018538" cy="594360"/>
           </a:xfrm>
           <a:prstGeom prst="rect">
@@ -10576,7 +10405,7 @@
                   <a:schemeClr val="tx2"/>
                 </a:solidFill>
               </a:rPr>
-              <a:t>Agreement with Norsk helsenett</a:t>
+              <a:t>Firewall</a:t>
             </a:r>
             <a:endParaRPr lang="en-US" sz="1700" dirty="0"/>
           </a:p>
@@ -10590,8 +10419,8 @@
         </p:nvSpPr>
         <p:spPr>
           <a:xfrm>
-            <a:off x="822960" y="3154680"/>
-            <a:ext cx="2018538" cy="1097280"/>
+            <a:off x="822960" y="2926080"/>
+            <a:ext cx="2018538" cy="548640"/>
           </a:xfrm>
           <a:prstGeom prst="rect">
             <a:avLst/>
@@ -10612,7 +10441,7 @@
                   <a:schemeClr val="tx1"/>
                 </a:solidFill>
               </a:rPr>
-              <a:t>Membership, HelseID and approval – the interface is ready.</a:t>
+              <a:t>Nobody can connect from outside. Apps reach only the health network.</a:t>
             </a:r>
             <a:endParaRPr lang="en-US" sz="1400" dirty="0"/>
           </a:p>
@@ -10620,18 +10449,18 @@
       </p:sp>
       <p:sp>
         <p:nvSpPr>
-          <p:cNvPr id="8" name="Real health-worker ID cards card"/>
+          <p:cNvPr id="8" name="USB lock card"/>
           <p:cNvSpPr/>
           <p:nvPr/>
         </p:nvSpPr>
         <p:spPr>
           <a:xfrm>
-            <a:off x="3390138" y="1463040"/>
-            <a:ext cx="2567178" cy="2926080"/>
+            <a:off x="3390138" y="1234440"/>
+            <a:ext cx="2567178" cy="2377440"/>
           </a:xfrm>
           <a:prstGeom prst="roundRect">
             <a:avLst>
-              <a:gd name="adj" fmla="val 4274"/>
+              <a:gd name="adj" fmla="val 4615"/>
             </a:avLst>
           </a:prstGeom>
           <a:solidFill>
@@ -10647,13 +10476,13 @@
       </p:sp>
       <p:sp>
         <p:nvSpPr>
-          <p:cNvPr id="9" name="Real health-worker ID cards icon ring"/>
+          <p:cNvPr id="9" name="USB lock icon ring"/>
           <p:cNvSpPr/>
           <p:nvPr/>
         </p:nvSpPr>
         <p:spPr>
           <a:xfrm>
-            <a:off x="3664458" y="1737360"/>
+            <a:off x="3664458" y="1508760"/>
             <a:ext cx="640080" cy="640080"/>
           </a:xfrm>
           <a:prstGeom prst="ellipse">
@@ -10667,7 +10496,7 @@
       </p:sp>
       <p:pic>
         <p:nvPicPr>
-          <p:cNvPr id="10" name="Real health-worker ID cards icon" descr="Real health-worker ID cards">    </p:cNvPr>
+          <p:cNvPr id="10" name="USB lock icon" descr="USB lock">    </p:cNvPr>
           <p:cNvPicPr>
             <a:picLocks noChangeAspect="1"/>
           </p:cNvPicPr>
@@ -10681,7 +10510,7 @@
         </p:blipFill>
         <p:spPr>
           <a:xfrm>
-            <a:off x="3801618" y="1874520"/>
+            <a:off x="3801618" y="1645920"/>
             <a:ext cx="365760" cy="365760"/>
           </a:xfrm>
           <a:prstGeom prst="rect">
@@ -10697,7 +10526,7 @@
         </p:nvSpPr>
         <p:spPr>
           <a:xfrm>
-            <a:off x="3664458" y="2514600"/>
+            <a:off x="3664458" y="2286000"/>
             <a:ext cx="2018538" cy="594360"/>
           </a:xfrm>
           <a:prstGeom prst="rect">
@@ -10719,7 +10548,7 @@
                   <a:schemeClr val="tx2"/>
                 </a:solidFill>
               </a:rPr>
-              <a:t>Real health-worker ID cards</a:t>
+              <a:t>USB lock</a:t>
             </a:r>
             <a:endParaRPr lang="en-US" sz="1700" dirty="0"/>
           </a:p>
@@ -10733,8 +10562,8 @@
         </p:nvSpPr>
         <p:spPr>
           <a:xfrm>
-            <a:off x="3664458" y="3154680"/>
-            <a:ext cx="2018538" cy="1097280"/>
+            <a:off x="3664458" y="2926080"/>
+            <a:ext cx="2018538" cy="548640"/>
           </a:xfrm>
           <a:prstGeom prst="rect">
             <a:avLst/>
@@ -10755,7 +10584,7 @@
                   <a:schemeClr val="tx1"/>
                 </a:solidFill>
               </a:rPr>
-              <a:t>Replace the simulated card reader with a real one (PKCS#11).</a:t>
+              <a:t>Memory sticks blocked. Only keyboard, mouse, headset and card reader.</a:t>
             </a:r>
             <a:endParaRPr lang="en-US" sz="1400" dirty="0"/>
           </a:p>
@@ -10763,18 +10592,18 @@
       </p:sp>
       <p:sp>
         <p:nvSpPr>
-          <p:cNvPr id="13" name="Installation to disk card"/>
+          <p:cNvPr id="13" name="Virus scanning card"/>
           <p:cNvSpPr/>
           <p:nvPr/>
         </p:nvSpPr>
         <p:spPr>
           <a:xfrm>
-            <a:off x="6231636" y="1463040"/>
-            <a:ext cx="2567178" cy="2926080"/>
+            <a:off x="6231636" y="1234440"/>
+            <a:ext cx="2567178" cy="2377440"/>
           </a:xfrm>
           <a:prstGeom prst="roundRect">
             <a:avLst>
-              <a:gd name="adj" fmla="val 4274"/>
+              <a:gd name="adj" fmla="val 4615"/>
             </a:avLst>
           </a:prstGeom>
           <a:solidFill>
@@ -10790,13 +10619,13 @@
       </p:sp>
       <p:sp>
         <p:nvSpPr>
-          <p:cNvPr id="14" name="Installation to disk icon ring"/>
+          <p:cNvPr id="14" name="Virus scanning icon ring"/>
           <p:cNvSpPr/>
           <p:nvPr/>
         </p:nvSpPr>
         <p:spPr>
           <a:xfrm>
-            <a:off x="6505956" y="1737360"/>
+            <a:off x="6505956" y="1508760"/>
             <a:ext cx="640080" cy="640080"/>
           </a:xfrm>
           <a:prstGeom prst="ellipse">
@@ -10810,7 +10639,7 @@
       </p:sp>
       <p:pic>
         <p:nvPicPr>
-          <p:cNvPr id="15" name="Installation to disk icon" descr="Installation to disk">    </p:cNvPr>
+          <p:cNvPr id="15" name="Virus scanning icon" descr="Virus scanning">    </p:cNvPr>
           <p:cNvPicPr>
             <a:picLocks noChangeAspect="1"/>
           </p:cNvPicPr>
@@ -10824,7 +10653,7 @@
         </p:blipFill>
         <p:spPr>
           <a:xfrm>
-            <a:off x="6643116" y="1874520"/>
+            <a:off x="6643116" y="1645920"/>
             <a:ext cx="365760" cy="365760"/>
           </a:xfrm>
           <a:prstGeom prst="rect">
@@ -10840,7 +10669,7 @@
         </p:nvSpPr>
         <p:spPr>
           <a:xfrm>
-            <a:off x="6505956" y="2514600"/>
+            <a:off x="6505956" y="2286000"/>
             <a:ext cx="2018538" cy="594360"/>
           </a:xfrm>
           <a:prstGeom prst="rect">
@@ -10862,7 +10691,7 @@
                   <a:schemeClr val="tx2"/>
                 </a:solidFill>
               </a:rPr>
-              <a:t>Installation to disk</a:t>
+              <a:t>Virus scanning</a:t>
             </a:r>
             <a:endParaRPr lang="en-US" sz="1700" dirty="0"/>
           </a:p>
@@ -10876,8 +10705,8 @@
         </p:nvSpPr>
         <p:spPr>
           <a:xfrm>
-            <a:off x="6505956" y="3154680"/>
-            <a:ext cx="2018538" cy="1097280"/>
+            <a:off x="6505956" y="2926080"/>
+            <a:ext cx="2018538" cy="548640"/>
           </a:xfrm>
           <a:prstGeom prst="rect">
             <a:avLst/>
@@ -10898,7 +10727,7 @@
                   <a:schemeClr val="tx1"/>
                 </a:solidFill>
               </a:rPr>
-              <a:t>An installation mode for IT, with full disk encryption.</a:t>
+              <a:t>Every attachment is scanned before it is let in.</a:t>
             </a:r>
             <a:endParaRPr lang="en-US" sz="1400" dirty="0"/>
           </a:p>
@@ -10906,18 +10735,18 @@
       </p:sp>
       <p:sp>
         <p:nvSpPr>
-          <p:cNvPr id="18" name="Security audit card"/>
+          <p:cNvPr id="18" name="VPN with kill switch card"/>
           <p:cNvSpPr/>
           <p:nvPr/>
         </p:nvSpPr>
         <p:spPr>
           <a:xfrm>
-            <a:off x="9073134" y="1463040"/>
-            <a:ext cx="2567178" cy="2926080"/>
+            <a:off x="9073134" y="1234440"/>
+            <a:ext cx="2567178" cy="2377440"/>
           </a:xfrm>
           <a:prstGeom prst="roundRect">
             <a:avLst>
-              <a:gd name="adj" fmla="val 4274"/>
+              <a:gd name="adj" fmla="val 4615"/>
             </a:avLst>
           </a:prstGeom>
           <a:solidFill>
@@ -10933,13 +10762,13 @@
       </p:sp>
       <p:sp>
         <p:nvSpPr>
-          <p:cNvPr id="19" name="Security audit icon ring"/>
+          <p:cNvPr id="19" name="VPN with kill switch icon ring"/>
           <p:cNvSpPr/>
           <p:nvPr/>
         </p:nvSpPr>
         <p:spPr>
           <a:xfrm>
-            <a:off x="9347454" y="1737360"/>
+            <a:off x="9347454" y="1508760"/>
             <a:ext cx="640080" cy="640080"/>
           </a:xfrm>
           <a:prstGeom prst="ellipse">
@@ -10953,7 +10782,7 @@
       </p:sp>
       <p:pic>
         <p:nvPicPr>
-          <p:cNvPr id="20" name="Security audit icon" descr="Security audit">    </p:cNvPr>
+          <p:cNvPr id="20" name="VPN with kill switch icon" descr="VPN with kill switch">    </p:cNvPr>
           <p:cNvPicPr>
             <a:picLocks noChangeAspect="1"/>
           </p:cNvPicPr>
@@ -10967,7 +10796,7 @@
         </p:blipFill>
         <p:spPr>
           <a:xfrm>
-            <a:off x="9484614" y="1874520"/>
+            <a:off x="9484614" y="1645920"/>
             <a:ext cx="365760" cy="365760"/>
           </a:xfrm>
           <a:prstGeom prst="rect">
@@ -10983,7 +10812,7 @@
         </p:nvSpPr>
         <p:spPr>
           <a:xfrm>
-            <a:off x="9347454" y="2514600"/>
+            <a:off x="9347454" y="2286000"/>
             <a:ext cx="2018538" cy="594360"/>
           </a:xfrm>
           <a:prstGeom prst="rect">
@@ -11005,7 +10834,7 @@
                   <a:schemeClr val="tx2"/>
                 </a:solidFill>
               </a:rPr>
-              <a:t>Security audit</a:t>
+              <a:t>VPN with kill switch</a:t>
             </a:r>
             <a:endParaRPr lang="en-US" sz="1700" dirty="0"/>
           </a:p>
@@ -11019,8 +10848,8 @@
         </p:nvSpPr>
         <p:spPr>
           <a:xfrm>
-            <a:off x="9347454" y="3154680"/>
-            <a:ext cx="2018538" cy="1097280"/>
+            <a:off x="9347454" y="2926080"/>
+            <a:ext cx="2018538" cy="548640"/>
           </a:xfrm>
           <a:prstGeom prst="rect">
             <a:avLst/>
@@ -11041,7 +10870,579 @@
                   <a:schemeClr val="tx1"/>
                 </a:solidFill>
               </a:rPr>
-              <a:t>External penetration test, Normen, GDPR and MDR assessment.</a:t>
+              <a:t>All traffic encrypted to the health network, no other way out.</a:t>
+            </a:r>
+            <a:endParaRPr lang="en-US" sz="1400" dirty="0"/>
+          </a:p>
+        </p:txBody>
+      </p:sp>
+      <p:sp>
+        <p:nvSpPr>
+          <p:cNvPr id="23" name="No running programs card"/>
+          <p:cNvSpPr/>
+          <p:nvPr/>
+        </p:nvSpPr>
+        <p:spPr>
+          <a:xfrm>
+            <a:off x="548640" y="3886200"/>
+            <a:ext cx="2567178" cy="2377440"/>
+          </a:xfrm>
+          <a:prstGeom prst="roundRect">
+            <a:avLst>
+              <a:gd name="adj" fmla="val 4615"/>
+            </a:avLst>
+          </a:prstGeom>
+          <a:solidFill>
+            <a:schemeClr val="bg1"/>
+          </a:solidFill>
+          <a:ln w="9525">
+            <a:solidFill>
+              <a:srgbClr val="D2DDD5"/>
+            </a:solidFill>
+            <a:prstDash val="solid"/>
+          </a:ln>
+        </p:spPr>
+      </p:sp>
+      <p:sp>
+        <p:nvSpPr>
+          <p:cNvPr id="24" name="No running programs icon ring"/>
+          <p:cNvSpPr/>
+          <p:nvPr/>
+        </p:nvSpPr>
+        <p:spPr>
+          <a:xfrm>
+            <a:off x="822960" y="4160520"/>
+            <a:ext cx="640080" cy="640080"/>
+          </a:xfrm>
+          <a:prstGeom prst="ellipse">
+            <a:avLst/>
+          </a:prstGeom>
+          <a:solidFill>
+            <a:schemeClr val="accent1"/>
+          </a:solidFill>
+          <a:ln/>
+        </p:spPr>
+      </p:sp>
+      <p:pic>
+        <p:nvPicPr>
+          <p:cNvPr id="25" name="No running programs icon" descr="No running programs">    </p:cNvPr>
+          <p:cNvPicPr>
+            <a:picLocks noChangeAspect="1"/>
+          </p:cNvPicPr>
+          <p:nvPr/>
+        </p:nvPicPr>
+        <p:blipFill>
+          <a:blip r:embed="rId5"/>
+          <a:stretch>
+            <a:fillRect/>
+          </a:stretch>
+        </p:blipFill>
+        <p:spPr>
+          <a:xfrm>
+            <a:off x="960120" y="4297680"/>
+            <a:ext cx="365760" cy="365760"/>
+          </a:xfrm>
+          <a:prstGeom prst="rect">
+            <a:avLst/>
+          </a:prstGeom>
+        </p:spPr>
+      </p:pic>
+      <p:sp>
+        <p:nvSpPr>
+          <p:cNvPr id="26" name="Text 19"/>
+          <p:cNvSpPr txBox="1"/>
+          <p:nvPr/>
+        </p:nvSpPr>
+        <p:spPr>
+          <a:xfrm>
+            <a:off x="822960" y="4937760"/>
+            <a:ext cx="2018538" cy="594360"/>
+          </a:xfrm>
+          <a:prstGeom prst="rect">
+            <a:avLst/>
+          </a:prstGeom>
+          <a:noFill/>
+          <a:ln/>
+        </p:spPr>
+        <p:txBody>
+          <a:bodyPr wrap="square" lIns="0" tIns="0" rIns="0" bIns="0" rtlCol="0" anchor="t"/>
+          <a:lstStyle/>
+          <a:p>
+            <a:pPr indent="0" marL="0">
+              <a:buNone/>
+            </a:pPr>
+            <a:r>
+              <a:rPr lang="en-US" sz="1700" b="1" dirty="0">
+                <a:solidFill>
+                  <a:schemeClr val="tx2"/>
+                </a:solidFill>
+              </a:rPr>
+              <a:t>No running programs</a:t>
+            </a:r>
+            <a:endParaRPr lang="en-US" sz="1700" dirty="0"/>
+          </a:p>
+        </p:txBody>
+      </p:sp>
+      <p:sp>
+        <p:nvSpPr>
+          <p:cNvPr id="27" name="Text 20"/>
+          <p:cNvSpPr txBox="1"/>
+          <p:nvPr/>
+        </p:nvSpPr>
+        <p:spPr>
+          <a:xfrm>
+            <a:off x="822960" y="5577840"/>
+            <a:ext cx="2018538" cy="548640"/>
+          </a:xfrm>
+          <a:prstGeom prst="rect">
+            <a:avLst/>
+          </a:prstGeom>
+          <a:noFill/>
+          <a:ln/>
+        </p:spPr>
+        <p:txBody>
+          <a:bodyPr wrap="square" lIns="0" tIns="0" rIns="0" bIns="0" rtlCol="0" anchor="t"/>
+          <a:lstStyle/>
+          <a:p>
+            <a:pPr indent="0" marL="0">
+              <a:buNone/>
+            </a:pPr>
+            <a:r>
+              <a:rPr lang="en-US" sz="1400" dirty="0">
+                <a:solidFill>
+                  <a:schemeClr val="tx1"/>
+                </a:solidFill>
+              </a:rPr>
+              <a:t>Not from the home folder, downloads or temp folders.</a:t>
+            </a:r>
+            <a:endParaRPr lang="en-US" sz="1400" dirty="0"/>
+          </a:p>
+        </p:txBody>
+      </p:sp>
+      <p:sp>
+        <p:nvSpPr>
+          <p:cNvPr id="28" name="Session guard card"/>
+          <p:cNvSpPr/>
+          <p:nvPr/>
+        </p:nvSpPr>
+        <p:spPr>
+          <a:xfrm>
+            <a:off x="3390138" y="3886200"/>
+            <a:ext cx="2567178" cy="2377440"/>
+          </a:xfrm>
+          <a:prstGeom prst="roundRect">
+            <a:avLst>
+              <a:gd name="adj" fmla="val 4615"/>
+            </a:avLst>
+          </a:prstGeom>
+          <a:solidFill>
+            <a:schemeClr val="bg1"/>
+          </a:solidFill>
+          <a:ln w="9525">
+            <a:solidFill>
+              <a:srgbClr val="D2DDD5"/>
+            </a:solidFill>
+            <a:prstDash val="solid"/>
+          </a:ln>
+        </p:spPr>
+      </p:sp>
+      <p:sp>
+        <p:nvSpPr>
+          <p:cNvPr id="29" name="Session guard icon ring"/>
+          <p:cNvSpPr/>
+          <p:nvPr/>
+        </p:nvSpPr>
+        <p:spPr>
+          <a:xfrm>
+            <a:off x="3664458" y="4160520"/>
+            <a:ext cx="640080" cy="640080"/>
+          </a:xfrm>
+          <a:prstGeom prst="ellipse">
+            <a:avLst/>
+          </a:prstGeom>
+          <a:solidFill>
+            <a:schemeClr val="accent1"/>
+          </a:solidFill>
+          <a:ln/>
+        </p:spPr>
+      </p:sp>
+      <p:pic>
+        <p:nvPicPr>
+          <p:cNvPr id="30" name="Session guard icon" descr="Session guard">    </p:cNvPr>
+          <p:cNvPicPr>
+            <a:picLocks noChangeAspect="1"/>
+          </p:cNvPicPr>
+          <p:nvPr/>
+        </p:nvPicPr>
+        <p:blipFill>
+          <a:blip r:embed="rId6"/>
+          <a:stretch>
+            <a:fillRect/>
+          </a:stretch>
+        </p:blipFill>
+        <p:spPr>
+          <a:xfrm>
+            <a:off x="3801618" y="4297680"/>
+            <a:ext cx="365760" cy="365760"/>
+          </a:xfrm>
+          <a:prstGeom prst="rect">
+            <a:avLst/>
+          </a:prstGeom>
+        </p:spPr>
+      </p:pic>
+      <p:sp>
+        <p:nvSpPr>
+          <p:cNvPr id="31" name="Text 23"/>
+          <p:cNvSpPr txBox="1"/>
+          <p:nvPr/>
+        </p:nvSpPr>
+        <p:spPr>
+          <a:xfrm>
+            <a:off x="3664458" y="4937760"/>
+            <a:ext cx="2018538" cy="594360"/>
+          </a:xfrm>
+          <a:prstGeom prst="rect">
+            <a:avLst/>
+          </a:prstGeom>
+          <a:noFill/>
+          <a:ln/>
+        </p:spPr>
+        <p:txBody>
+          <a:bodyPr wrap="square" lIns="0" tIns="0" rIns="0" bIns="0" rtlCol="0" anchor="t"/>
+          <a:lstStyle/>
+          <a:p>
+            <a:pPr indent="0" marL="0">
+              <a:buNone/>
+            </a:pPr>
+            <a:r>
+              <a:rPr lang="en-US" sz="1700" b="1" dirty="0">
+                <a:solidFill>
+                  <a:schemeClr val="tx2"/>
+                </a:solidFill>
+              </a:rPr>
+              <a:t>Session guard</a:t>
+            </a:r>
+            <a:endParaRPr lang="en-US" sz="1700" dirty="0"/>
+          </a:p>
+        </p:txBody>
+      </p:sp>
+      <p:sp>
+        <p:nvSpPr>
+          <p:cNvPr id="32" name="Text 24"/>
+          <p:cNvSpPr txBox="1"/>
+          <p:nvPr/>
+        </p:nvSpPr>
+        <p:spPr>
+          <a:xfrm>
+            <a:off x="3664458" y="5577840"/>
+            <a:ext cx="2018538" cy="548640"/>
+          </a:xfrm>
+          <a:prstGeom prst="rect">
+            <a:avLst/>
+          </a:prstGeom>
+          <a:noFill/>
+          <a:ln/>
+        </p:spPr>
+        <p:txBody>
+          <a:bodyPr wrap="square" lIns="0" tIns="0" rIns="0" bIns="0" rtlCol="0" anchor="t"/>
+          <a:lstStyle/>
+          <a:p>
+            <a:pPr indent="0" marL="0">
+              <a:buNone/>
+            </a:pPr>
+            <a:r>
+              <a:rPr lang="en-US" sz="1400" dirty="0">
+                <a:solidFill>
+                  <a:schemeClr val="tx1"/>
+                </a:solidFill>
+              </a:rPr>
+              <a:t>Card out – the screen locks at once. Held 15 min for the same card, then ended and wiped.</a:t>
+            </a:r>
+            <a:endParaRPr lang="en-US" sz="1400" dirty="0"/>
+          </a:p>
+        </p:txBody>
+      </p:sp>
+      <p:sp>
+        <p:nvSpPr>
+          <p:cNvPr id="33" name="Security log card"/>
+          <p:cNvSpPr/>
+          <p:nvPr/>
+        </p:nvSpPr>
+        <p:spPr>
+          <a:xfrm>
+            <a:off x="6231636" y="3886200"/>
+            <a:ext cx="2567178" cy="2377440"/>
+          </a:xfrm>
+          <a:prstGeom prst="roundRect">
+            <a:avLst>
+              <a:gd name="adj" fmla="val 4615"/>
+            </a:avLst>
+          </a:prstGeom>
+          <a:solidFill>
+            <a:schemeClr val="bg1"/>
+          </a:solidFill>
+          <a:ln w="9525">
+            <a:solidFill>
+              <a:srgbClr val="D2DDD5"/>
+            </a:solidFill>
+            <a:prstDash val="solid"/>
+          </a:ln>
+        </p:spPr>
+      </p:sp>
+      <p:sp>
+        <p:nvSpPr>
+          <p:cNvPr id="34" name="Security log icon ring"/>
+          <p:cNvSpPr/>
+          <p:nvPr/>
+        </p:nvSpPr>
+        <p:spPr>
+          <a:xfrm>
+            <a:off x="6505956" y="4160520"/>
+            <a:ext cx="640080" cy="640080"/>
+          </a:xfrm>
+          <a:prstGeom prst="ellipse">
+            <a:avLst/>
+          </a:prstGeom>
+          <a:solidFill>
+            <a:schemeClr val="accent1"/>
+          </a:solidFill>
+          <a:ln/>
+        </p:spPr>
+      </p:sp>
+      <p:pic>
+        <p:nvPicPr>
+          <p:cNvPr id="35" name="Security log icon" descr="Security log">    </p:cNvPr>
+          <p:cNvPicPr>
+            <a:picLocks noChangeAspect="1"/>
+          </p:cNvPicPr>
+          <p:nvPr/>
+        </p:nvPicPr>
+        <p:blipFill>
+          <a:blip r:embed="rId7"/>
+          <a:stretch>
+            <a:fillRect/>
+          </a:stretch>
+        </p:blipFill>
+        <p:spPr>
+          <a:xfrm>
+            <a:off x="6643116" y="4297680"/>
+            <a:ext cx="365760" cy="365760"/>
+          </a:xfrm>
+          <a:prstGeom prst="rect">
+            <a:avLst/>
+          </a:prstGeom>
+        </p:spPr>
+      </p:pic>
+      <p:sp>
+        <p:nvSpPr>
+          <p:cNvPr id="36" name="Text 27"/>
+          <p:cNvSpPr txBox="1"/>
+          <p:nvPr/>
+        </p:nvSpPr>
+        <p:spPr>
+          <a:xfrm>
+            <a:off x="6505956" y="4937760"/>
+            <a:ext cx="2018538" cy="594360"/>
+          </a:xfrm>
+          <a:prstGeom prst="rect">
+            <a:avLst/>
+          </a:prstGeom>
+          <a:noFill/>
+          <a:ln/>
+        </p:spPr>
+        <p:txBody>
+          <a:bodyPr wrap="square" lIns="0" tIns="0" rIns="0" bIns="0" rtlCol="0" anchor="t"/>
+          <a:lstStyle/>
+          <a:p>
+            <a:pPr indent="0" marL="0">
+              <a:buNone/>
+            </a:pPr>
+            <a:r>
+              <a:rPr lang="en-US" sz="1700" b="1" dirty="0">
+                <a:solidFill>
+                  <a:schemeClr val="tx2"/>
+                </a:solidFill>
+              </a:rPr>
+              <a:t>Security log</a:t>
+            </a:r>
+            <a:endParaRPr lang="en-US" sz="1700" dirty="0"/>
+          </a:p>
+        </p:txBody>
+      </p:sp>
+      <p:sp>
+        <p:nvSpPr>
+          <p:cNvPr id="37" name="Text 28"/>
+          <p:cNvSpPr txBox="1"/>
+          <p:nvPr/>
+        </p:nvSpPr>
+        <p:spPr>
+          <a:xfrm>
+            <a:off x="6505956" y="5577840"/>
+            <a:ext cx="2018538" cy="548640"/>
+          </a:xfrm>
+          <a:prstGeom prst="rect">
+            <a:avLst/>
+          </a:prstGeom>
+          <a:noFill/>
+          <a:ln/>
+        </p:spPr>
+        <p:txBody>
+          <a:bodyPr wrap="square" lIns="0" tIns="0" rIns="0" bIns="0" rtlCol="0" anchor="t"/>
+          <a:lstStyle/>
+          <a:p>
+            <a:pPr indent="0" marL="0">
+              <a:buNone/>
+            </a:pPr>
+            <a:r>
+              <a:rPr lang="en-US" sz="1400" dirty="0">
+                <a:solidFill>
+                  <a:schemeClr val="tx1"/>
+                </a:solidFill>
+              </a:rPr>
+              <a:t>Changes to logins, the firewall and settings are logged.</a:t>
+            </a:r>
+            <a:endParaRPr lang="en-US" sz="1400" dirty="0"/>
+          </a:p>
+        </p:txBody>
+      </p:sp>
+      <p:sp>
+        <p:nvSpPr>
+          <p:cNvPr id="38" name="Updates card"/>
+          <p:cNvSpPr/>
+          <p:nvPr/>
+        </p:nvSpPr>
+        <p:spPr>
+          <a:xfrm>
+            <a:off x="9073134" y="3886200"/>
+            <a:ext cx="2567178" cy="2377440"/>
+          </a:xfrm>
+          <a:prstGeom prst="roundRect">
+            <a:avLst>
+              <a:gd name="adj" fmla="val 4615"/>
+            </a:avLst>
+          </a:prstGeom>
+          <a:solidFill>
+            <a:schemeClr val="bg1"/>
+          </a:solidFill>
+          <a:ln w="9525">
+            <a:solidFill>
+              <a:srgbClr val="D2DDD5"/>
+            </a:solidFill>
+            <a:prstDash val="solid"/>
+          </a:ln>
+        </p:spPr>
+      </p:sp>
+      <p:sp>
+        <p:nvSpPr>
+          <p:cNvPr id="39" name="Updates icon ring"/>
+          <p:cNvSpPr/>
+          <p:nvPr/>
+        </p:nvSpPr>
+        <p:spPr>
+          <a:xfrm>
+            <a:off x="9347454" y="4160520"/>
+            <a:ext cx="640080" cy="640080"/>
+          </a:xfrm>
+          <a:prstGeom prst="ellipse">
+            <a:avLst/>
+          </a:prstGeom>
+          <a:solidFill>
+            <a:schemeClr val="accent1"/>
+          </a:solidFill>
+          <a:ln/>
+        </p:spPr>
+      </p:sp>
+      <p:pic>
+        <p:nvPicPr>
+          <p:cNvPr id="40" name="Updates icon" descr="Updates">    </p:cNvPr>
+          <p:cNvPicPr>
+            <a:picLocks noChangeAspect="1"/>
+          </p:cNvPicPr>
+          <p:nvPr/>
+        </p:nvPicPr>
+        <p:blipFill>
+          <a:blip r:embed="rId8"/>
+          <a:stretch>
+            <a:fillRect/>
+          </a:stretch>
+        </p:blipFill>
+        <p:spPr>
+          <a:xfrm>
+            <a:off x="9484614" y="4297680"/>
+            <a:ext cx="365760" cy="365760"/>
+          </a:xfrm>
+          <a:prstGeom prst="rect">
+            <a:avLst/>
+          </a:prstGeom>
+        </p:spPr>
+      </p:pic>
+      <p:sp>
+        <p:nvSpPr>
+          <p:cNvPr id="41" name="Text 31"/>
+          <p:cNvSpPr txBox="1"/>
+          <p:nvPr/>
+        </p:nvSpPr>
+        <p:spPr>
+          <a:xfrm>
+            <a:off x="9347454" y="4937760"/>
+            <a:ext cx="2018538" cy="594360"/>
+          </a:xfrm>
+          <a:prstGeom prst="rect">
+            <a:avLst/>
+          </a:prstGeom>
+          <a:noFill/>
+          <a:ln/>
+        </p:spPr>
+        <p:txBody>
+          <a:bodyPr wrap="square" lIns="0" tIns="0" rIns="0" bIns="0" rtlCol="0" anchor="t"/>
+          <a:lstStyle/>
+          <a:p>
+            <a:pPr indent="0" marL="0">
+              <a:buNone/>
+            </a:pPr>
+            <a:r>
+              <a:rPr lang="en-US" sz="1700" b="1" dirty="0">
+                <a:solidFill>
+                  <a:schemeClr val="tx2"/>
+                </a:solidFill>
+              </a:rPr>
+              <a:t>Updates</a:t>
+            </a:r>
+            <a:endParaRPr lang="en-US" sz="1700" dirty="0"/>
+          </a:p>
+        </p:txBody>
+      </p:sp>
+      <p:sp>
+        <p:nvSpPr>
+          <p:cNvPr id="42" name="Text 32"/>
+          <p:cNvSpPr txBox="1"/>
+          <p:nvPr/>
+        </p:nvSpPr>
+        <p:spPr>
+          <a:xfrm>
+            <a:off x="9347454" y="5577840"/>
+            <a:ext cx="2018538" cy="548640"/>
+          </a:xfrm>
+          <a:prstGeom prst="rect">
+            <a:avLst/>
+          </a:prstGeom>
+          <a:noFill/>
+          <a:ln/>
+        </p:spPr>
+        <p:txBody>
+          <a:bodyPr wrap="square" lIns="0" tIns="0" rIns="0" bIns="0" rtlCol="0" anchor="t"/>
+          <a:lstStyle/>
+          <a:p>
+            <a:pPr indent="0" marL="0">
+              <a:buNone/>
+            </a:pPr>
+            <a:r>
+              <a:rPr lang="en-US" sz="1400" dirty="0">
+                <a:solidFill>
+                  <a:schemeClr val="tx1"/>
+                </a:solidFill>
+              </a:rPr>
+              <a:t>Security updates are installed automatically.</a:t>
             </a:r>
             <a:endParaRPr lang="en-US" sz="1400" dirty="0"/>
           </a:p>
@@ -11089,6 +11490,145 @@
               <a:t>28</a:t>
             </a:fld>
             <a:endParaRPr lang="en-US"/>
+          </a:p>
+        </p:txBody>
+      </p:sp>
+    </p:spTree>
+  </p:cSld>
+  <p:clrMapOvr>
+    <a:masterClrMapping/>
+  </p:clrMapOvr>
+</p:sld>
+</file>
+
+<file path=ppt/slides/slide29.xml><?xml version="1.0" encoding="utf-8"?>
+<p:sld xmlns:a="http://schemas.openxmlformats.org/drawingml/2006/main" xmlns:r="http://schemas.openxmlformats.org/officeDocument/2006/relationships" xmlns:p="http://schemas.openxmlformats.org/presentationml/2006/main">
+  <p:cSld name="Slide 29">
+    <p:spTree>
+      <p:nvGrpSpPr>
+        <p:cNvPr id="1" name=""/>
+        <p:cNvGrpSpPr/>
+        <p:nvPr/>
+      </p:nvGrpSpPr>
+      <p:grpSpPr>
+        <a:xfrm>
+          <a:off x="0" y="0"/>
+          <a:ext cx="0" cy="0"/>
+          <a:chOff x="0" y="0"/>
+          <a:chExt cx="0" cy="0"/>
+        </a:xfrm>
+      </p:grpSpPr>
+      <p:sp>
+        <p:nvSpPr>
+          <p:cNvPr id="2" name="Text 0"/>
+          <p:cNvSpPr/>
+          <p:nvPr>
+            <p:ph idx="100" type="body" hasCustomPrompt="1"/>
+          </p:nvPr>
+        </p:nvSpPr>
+        <p:spPr>
+          <a:xfrm>
+            <a:off x="731520" y="2103120"/>
+            <a:ext cx="2743200" cy="1097280"/>
+          </a:xfrm>
+          <a:prstGeom prst="rect">
+            <a:avLst/>
+          </a:prstGeom>
+          <a:noFill/>
+          <a:ln/>
+        </p:spPr>
+        <p:txBody>
+          <a:bodyPr wrap="square" rtlCol="0"/>
+          <a:lstStyle/>
+          <a:p>
+            <a:pPr indent="0" marL="0">
+              <a:buNone/>
+            </a:pPr>
+            <a:r>
+              <a:rPr lang="en-US" sz="6000" b="1" dirty="0">
+                <a:solidFill>
+                  <a:schemeClr val="accent2"/>
+                </a:solidFill>
+              </a:rPr>
+              <a:t>06</a:t>
+            </a:r>
+            <a:endParaRPr lang="en-US" sz="6000" dirty="0"/>
+          </a:p>
+        </p:txBody>
+      </p:sp>
+      <p:sp>
+        <p:nvSpPr>
+          <p:cNvPr id="3" name="Text 0"/>
+          <p:cNvSpPr/>
+          <p:nvPr>
+            <p:ph idx="101" type="title" hasCustomPrompt="1"/>
+          </p:nvPr>
+        </p:nvSpPr>
+        <p:spPr>
+          <a:xfrm>
+            <a:off x="731520" y="3108960"/>
+            <a:ext cx="10698480" cy="914400"/>
+          </a:xfrm>
+          <a:prstGeom prst="rect">
+            <a:avLst/>
+          </a:prstGeom>
+          <a:noFill/>
+          <a:ln/>
+        </p:spPr>
+        <p:txBody>
+          <a:bodyPr wrap="square" rtlCol="0"/>
+          <a:lstStyle/>
+          <a:p>
+            <a:pPr algn="l" indent="0" marL="0">
+              <a:buNone/>
+            </a:pPr>
+            <a:r>
+              <a:rPr lang="en-US" sz="4000" b="1" dirty="0">
+                <a:solidFill>
+                  <a:schemeClr val="bg1"/>
+                </a:solidFill>
+              </a:rPr>
+              <a:t>Shutdown</a:t>
+            </a:r>
+            <a:endParaRPr lang="en-US" sz="4000" dirty="0"/>
+          </a:p>
+        </p:txBody>
+      </p:sp>
+      <p:sp>
+        <p:nvSpPr>
+          <p:cNvPr id="4" name="Text 0"/>
+          <p:cNvSpPr/>
+          <p:nvPr>
+            <p:ph idx="102" type="body" hasCustomPrompt="1"/>
+          </p:nvPr>
+        </p:nvSpPr>
+        <p:spPr>
+          <a:xfrm>
+            <a:off x="731520" y="4023360"/>
+            <a:ext cx="10698480" cy="822960"/>
+          </a:xfrm>
+          <a:prstGeom prst="rect">
+            <a:avLst/>
+          </a:prstGeom>
+          <a:noFill/>
+          <a:ln/>
+        </p:spPr>
+        <p:txBody>
+          <a:bodyPr wrap="square" rtlCol="0"/>
+          <a:lstStyle/>
+          <a:p>
+            <a:pPr indent="0" marL="0">
+              <a:buNone/>
+            </a:pPr>
+            <a:r>
+              <a:rPr lang="en-US" sz="1800" dirty="0">
+                <a:solidFill>
+                  <a:schemeClr val="accent2"/>
+                </a:solidFill>
+              </a:rPr>
+              <a:t>Log out, lock or shut down</a:t>
+            </a:r>
+            <a:endParaRPr lang="en-US" sz="1800" dirty="0"/>
           </a:p>
         </p:txBody>
       </p:sp>
@@ -11239,6 +11779,2505 @@
 </p:sld>
 </file>
 
+<file path=ppt/slides/slide30.xml><?xml version="1.0" encoding="utf-8"?>
+<p:sld xmlns:a="http://schemas.openxmlformats.org/drawingml/2006/main" xmlns:r="http://schemas.openxmlformats.org/officeDocument/2006/relationships" xmlns:p="http://schemas.openxmlformats.org/presentationml/2006/main">
+  <p:cSld name="Slide 30">
+    <p:spTree>
+      <p:nvGrpSpPr>
+        <p:cNvPr id="1" name=""/>
+        <p:cNvGrpSpPr/>
+        <p:nvPr/>
+      </p:nvGrpSpPr>
+      <p:grpSpPr>
+        <a:xfrm>
+          <a:off x="0" y="0"/>
+          <a:ext cx="0" cy="0"/>
+          <a:chOff x="0" y="0"/>
+          <a:chExt cx="0" cy="0"/>
+        </a:xfrm>
+      </p:grpSpPr>
+      <p:sp>
+        <p:nvSpPr>
+          <p:cNvPr id="2" name="Text 0"/>
+          <p:cNvSpPr/>
+          <p:nvPr>
+            <p:ph idx="100" type="title" hasCustomPrompt="1"/>
+          </p:nvPr>
+        </p:nvSpPr>
+        <p:spPr>
+          <a:xfrm>
+            <a:off x="548640" y="365760"/>
+            <a:ext cx="11064240" cy="731520"/>
+          </a:xfrm>
+          <a:prstGeom prst="rect">
+            <a:avLst/>
+          </a:prstGeom>
+          <a:noFill/>
+          <a:ln/>
+        </p:spPr>
+        <p:txBody>
+          <a:bodyPr wrap="square" rtlCol="0"/>
+          <a:lstStyle/>
+          <a:p>
+            <a:pPr algn="l" indent="0" marL="0">
+              <a:buNone/>
+            </a:pPr>
+            <a:r>
+              <a:rPr lang="en-US" sz="3200" b="1" dirty="0">
+                <a:solidFill>
+                  <a:schemeClr val="tx2"/>
+                </a:solidFill>
+              </a:rPr>
+              <a:t>The power menu</a:t>
+            </a:r>
+            <a:endParaRPr lang="en-US" sz="3200" dirty="0"/>
+          </a:p>
+        </p:txBody>
+      </p:sp>
+      <p:sp>
+        <p:nvSpPr>
+          <p:cNvPr id="3" name="Text 0"/>
+          <p:cNvSpPr/>
+          <p:nvPr>
+            <p:ph idx="101" type="body" hasCustomPrompt="1"/>
+          </p:nvPr>
+        </p:nvSpPr>
+        <p:spPr>
+          <a:xfrm>
+            <a:off x="548640" y="1371600"/>
+            <a:ext cx="3657600" cy="4754880"/>
+          </a:xfrm>
+          <a:prstGeom prst="rect">
+            <a:avLst/>
+          </a:prstGeom>
+          <a:noFill/>
+          <a:ln/>
+        </p:spPr>
+        <p:txBody>
+          <a:bodyPr wrap="square" rtlCol="0" anchor="t"/>
+          <a:lstStyle/>
+          <a:p>
+            <a:pPr marL="342900" indent="-342900">
+              <a:spcAft>
+                <a:spcPts val="800"/>
+              </a:spcAft>
+              <a:buSzPct val="100000"/>
+              <a:buChar char="•"/>
+            </a:pPr>
+            <a:r>
+              <a:rPr lang="en-US" sz="1500" b="1" dirty="0">
+                <a:solidFill>
+                  <a:schemeClr val="tx1"/>
+                </a:solidFill>
+              </a:rPr>
+              <a:t>Lock screen,</a:t>
+            </a:r>
+            <a:pPr indent="0" marL="0">
+              <a:spcAft>
+                <a:spcPts val="800"/>
+              </a:spcAft>
+              <a:buNone/>
+            </a:pPr>
+            <a:r>
+              <a:rPr lang="en-US" sz="1500" dirty="0">
+                <a:solidFill>
+                  <a:schemeClr val="tx1"/>
+                </a:solidFill>
+              </a:rPr>
+              <a:t> sleep, restart, shut down, log out.</a:t>
+            </a:r>
+            <a:endParaRPr lang="en-US" sz="1500" dirty="0"/>
+          </a:p>
+          <a:p>
+            <a:pPr marL="342900" indent="-342900">
+              <a:spcAft>
+                <a:spcPts val="800"/>
+              </a:spcAft>
+              <a:buSzPct val="100000"/>
+              <a:buChar char="•"/>
+            </a:pPr>
+            <a:r>
+              <a:rPr lang="en-US" sz="1500" b="1" dirty="0">
+                <a:solidFill>
+                  <a:schemeClr val="tx1"/>
+                </a:solidFill>
+              </a:rPr>
+              <a:t>No hibernate:</a:t>
+            </a:r>
+            <a:pPr indent="0" marL="0">
+              <a:spcAft>
+                <a:spcPts val="800"/>
+              </a:spcAft>
+              <a:buNone/>
+            </a:pPr>
+            <a:r>
+              <a:rPr lang="en-US" sz="1500" dirty="0">
+                <a:solidFill>
+                  <a:schemeClr val="tx1"/>
+                </a:solidFill>
+              </a:rPr>
+              <a:t> it would write patient data to disk.</a:t>
+            </a:r>
+            <a:endParaRPr lang="en-US" sz="1500" dirty="0"/>
+          </a:p>
+          <a:p>
+            <a:pPr marL="342900" indent="-342900">
+              <a:spcAft>
+                <a:spcPts val="800"/>
+              </a:spcAft>
+              <a:buSzPct val="100000"/>
+              <a:buChar char="•"/>
+            </a:pPr>
+            <a:r>
+              <a:rPr lang="en-US" sz="1500" b="1" dirty="0">
+                <a:solidFill>
+                  <a:schemeClr val="tx1"/>
+                </a:solidFill>
+              </a:rPr>
+              <a:t>No "switch user":</a:t>
+            </a:r>
+            <a:pPr indent="0" marL="0">
+              <a:spcAft>
+                <a:spcPts val="800"/>
+              </a:spcAft>
+              <a:buNone/>
+            </a:pPr>
+            <a:r>
+              <a:rPr lang="en-US" sz="1500" dirty="0">
+                <a:solidFill>
+                  <a:schemeClr val="tx1"/>
+                </a:solidFill>
+              </a:rPr>
+              <a:t> the card decides who is logged in.</a:t>
+            </a:r>
+            <a:endParaRPr lang="en-US" sz="1500" dirty="0"/>
+          </a:p>
+        </p:txBody>
+      </p:sp>
+      <p:sp>
+        <p:nvSpPr>
+          <p:cNvPr id="4" name="The power menu frame"/>
+          <p:cNvSpPr/>
+          <p:nvPr/>
+        </p:nvSpPr>
+        <p:spPr>
+          <a:xfrm>
+            <a:off x="4526280" y="1371600"/>
+            <a:ext cx="7132320" cy="4457700"/>
+          </a:xfrm>
+          <a:prstGeom prst="rect">
+            <a:avLst/>
+          </a:prstGeom>
+          <a:solidFill>
+            <a:schemeClr val="bg1"/>
+          </a:solidFill>
+          <a:ln w="9525">
+            <a:solidFill>
+              <a:srgbClr val="D2DDD5"/>
+            </a:solidFill>
+            <a:prstDash val="solid"/>
+          </a:ln>
+          <a:effectLst>
+            <a:outerShdw sx="100000" sy="100000" kx="0" ky="0" algn="bl" rotWithShape="0" blurRad="101600" dist="38100" dir="5400000">
+              <a:srgbClr val="000000">
+                <a:alpha val="25000"/>
+              </a:srgbClr>
+            </a:outerShdw>
+          </a:effectLst>
+        </p:spPr>
+      </p:sp>
+      <p:pic>
+        <p:nvPicPr>
+          <p:cNvPr id="5" name="The power menu" descr="The power menu">    </p:cNvPr>
+          <p:cNvPicPr>
+            <a:picLocks noChangeAspect="1"/>
+          </p:cNvPicPr>
+          <p:nvPr/>
+        </p:nvPicPr>
+        <p:blipFill>
+          <a:blip r:embed="rId1"/>
+          <a:stretch>
+            <a:fillRect/>
+          </a:stretch>
+        </p:blipFill>
+        <p:spPr>
+          <a:xfrm>
+            <a:off x="4526280" y="1371600"/>
+            <a:ext cx="7132320" cy="4457700"/>
+          </a:xfrm>
+          <a:prstGeom prst="rect">
+            <a:avLst/>
+          </a:prstGeom>
+        </p:spPr>
+      </p:pic>
+      <p:sp>
+        <p:nvSpPr>
+          <p:cNvPr id="25" name="Slide Number Placeholder 0"/>
+          <p:cNvSpPr>
+            <a:spLocks noGrp="1"/>
+          </p:cNvSpPr>
+          <p:nvPr>
+            <p:ph type="sldNum" sz="quarter" idx="4294967295"/>
+          </p:nvPr>
+        </p:nvSpPr>
+        <p:spPr>
+          <a:xfrm>
+            <a:off x="11247120" y="6400800"/>
+            <a:ext cx="457200" cy="274320"/>
+          </a:xfrm>
+          <a:prstGeom prst="rect">
+            <a:avLst/>
+          </a:prstGeom>
+          <a:extLst>
+            <a:ext uri="{C572A759-6A51-4108-AA02-DFA0A04FC94B}">
+              <ma14:wrappingTextBoxFlag xmlns:ma14="http://schemas.microsoft.com/office/mac/drawingml/2011/main" val="0"/>
+            </a:ext>
+          </a:extLst>
+        </p:spPr>
+        <p:txBody>
+          <a:bodyPr/>
+          <a:lstStyle>
+            <a:lvl1pPr>
+              <a:defRPr sz="1000">
+                <a:solidFill>
+                  <a:schemeClr val="accent6"/>
+                </a:solidFill>
+              </a:defRPr>
+            </a:lvl1pPr>
+          </a:lstStyle>
+          <a:p>
+            <a:pPr algn="r"/>
+            <a:fld id="{F7021451-1387-4CA6-816F-3879F97B5CBC}" type="slidenum">
+              <a:rPr b="0" lang="en-US"/>
+              <a:t>30</a:t>
+            </a:fld>
+            <a:endParaRPr lang="en-US"/>
+          </a:p>
+        </p:txBody>
+      </p:sp>
+    </p:spTree>
+  </p:cSld>
+  <p:clrMapOvr>
+    <a:masterClrMapping/>
+  </p:clrMapOvr>
+</p:sld>
+</file>
+
+<file path=ppt/slides/slide31.xml><?xml version="1.0" encoding="utf-8"?>
+<p:sld xmlns:a="http://schemas.openxmlformats.org/drawingml/2006/main" xmlns:r="http://schemas.openxmlformats.org/officeDocument/2006/relationships" xmlns:p="http://schemas.openxmlformats.org/presentationml/2006/main">
+  <p:cSld name="Slide 31">
+    <p:spTree>
+      <p:nvGrpSpPr>
+        <p:cNvPr id="1" name=""/>
+        <p:cNvGrpSpPr/>
+        <p:nvPr/>
+      </p:nvGrpSpPr>
+      <p:grpSpPr>
+        <a:xfrm>
+          <a:off x="0" y="0"/>
+          <a:ext cx="0" cy="0"/>
+          <a:chOff x="0" y="0"/>
+          <a:chExt cx="0" cy="0"/>
+        </a:xfrm>
+      </p:grpSpPr>
+      <p:sp>
+        <p:nvSpPr>
+          <p:cNvPr id="2" name="Text 0"/>
+          <p:cNvSpPr/>
+          <p:nvPr>
+            <p:ph idx="100" type="body" hasCustomPrompt="1"/>
+          </p:nvPr>
+        </p:nvSpPr>
+        <p:spPr>
+          <a:xfrm>
+            <a:off x="731520" y="2103120"/>
+            <a:ext cx="2743200" cy="1097280"/>
+          </a:xfrm>
+          <a:prstGeom prst="rect">
+            <a:avLst/>
+          </a:prstGeom>
+          <a:noFill/>
+          <a:ln/>
+        </p:spPr>
+        <p:txBody>
+          <a:bodyPr wrap="square" rtlCol="0"/>
+          <a:lstStyle/>
+          <a:p>
+            <a:pPr indent="0" marL="0">
+              <a:buNone/>
+            </a:pPr>
+            <a:r>
+              <a:rPr lang="en-US" sz="6000" b="1" dirty="0">
+                <a:solidFill>
+                  <a:schemeClr val="accent2"/>
+                </a:solidFill>
+              </a:rPr>
+              <a:t>07</a:t>
+            </a:r>
+            <a:endParaRPr lang="en-US" sz="6000" dirty="0"/>
+          </a:p>
+        </p:txBody>
+      </p:sp>
+      <p:sp>
+        <p:nvSpPr>
+          <p:cNvPr id="3" name="Text 0"/>
+          <p:cNvSpPr/>
+          <p:nvPr>
+            <p:ph idx="101" type="title" hasCustomPrompt="1"/>
+          </p:nvPr>
+        </p:nvSpPr>
+        <p:spPr>
+          <a:xfrm>
+            <a:off x="731520" y="3108960"/>
+            <a:ext cx="10698480" cy="914400"/>
+          </a:xfrm>
+          <a:prstGeom prst="rect">
+            <a:avLst/>
+          </a:prstGeom>
+          <a:noFill/>
+          <a:ln/>
+        </p:spPr>
+        <p:txBody>
+          <a:bodyPr wrap="square" rtlCol="0"/>
+          <a:lstStyle/>
+          <a:p>
+            <a:pPr algn="l" indent="0" marL="0">
+              <a:buNone/>
+            </a:pPr>
+            <a:r>
+              <a:rPr lang="en-US" sz="4000" b="1" dirty="0">
+                <a:solidFill>
+                  <a:schemeClr val="bg1"/>
+                </a:solidFill>
+              </a:rPr>
+              <a:t>Pilot</a:t>
+            </a:r>
+            <a:endParaRPr lang="en-US" sz="4000" dirty="0"/>
+          </a:p>
+        </p:txBody>
+      </p:sp>
+      <p:sp>
+        <p:nvSpPr>
+          <p:cNvPr id="4" name="Text 0"/>
+          <p:cNvSpPr/>
+          <p:nvPr>
+            <p:ph idx="102" type="body" hasCustomPrompt="1"/>
+          </p:nvPr>
+        </p:nvSpPr>
+        <p:spPr>
+          <a:xfrm>
+            <a:off x="731520" y="4023360"/>
+            <a:ext cx="10698480" cy="822960"/>
+          </a:xfrm>
+          <a:prstGeom prst="rect">
+            <a:avLst/>
+          </a:prstGeom>
+          <a:noFill/>
+          <a:ln/>
+        </p:spPr>
+        <p:txBody>
+          <a:bodyPr wrap="square" rtlCol="0"/>
+          <a:lstStyle/>
+          <a:p>
+            <a:pPr indent="0" marL="0">
+              <a:buNone/>
+            </a:pPr>
+            <a:r>
+              <a:rPr lang="en-US" sz="1800" dirty="0">
+                <a:solidFill>
+                  <a:schemeClr val="accent2"/>
+                </a:solidFill>
+              </a:rPr>
+              <a:t>Try it yourself, and how a first pilot would run</a:t>
+            </a:r>
+            <a:endParaRPr lang="en-US" sz="1800" dirty="0"/>
+          </a:p>
+        </p:txBody>
+      </p:sp>
+    </p:spTree>
+  </p:cSld>
+  <p:clrMapOvr>
+    <a:masterClrMapping/>
+  </p:clrMapOvr>
+</p:sld>
+</file>
+
+<file path=ppt/slides/slide32.xml><?xml version="1.0" encoding="utf-8"?>
+<p:sld xmlns:a="http://schemas.openxmlformats.org/drawingml/2006/main" xmlns:r="http://schemas.openxmlformats.org/officeDocument/2006/relationships" xmlns:p="http://schemas.openxmlformats.org/presentationml/2006/main">
+  <p:cSld name="Slide 32">
+    <p:spTree>
+      <p:nvGrpSpPr>
+        <p:cNvPr id="1" name=""/>
+        <p:cNvGrpSpPr/>
+        <p:nvPr/>
+      </p:nvGrpSpPr>
+      <p:grpSpPr>
+        <a:xfrm>
+          <a:off x="0" y="0"/>
+          <a:ext cx="0" cy="0"/>
+          <a:chOff x="0" y="0"/>
+          <a:chExt cx="0" cy="0"/>
+        </a:xfrm>
+      </p:grpSpPr>
+      <p:sp>
+        <p:nvSpPr>
+          <p:cNvPr id="2" name="Text 0"/>
+          <p:cNvSpPr/>
+          <p:nvPr>
+            <p:ph idx="100" type="title" hasCustomPrompt="1"/>
+          </p:nvPr>
+        </p:nvSpPr>
+        <p:spPr>
+          <a:xfrm>
+            <a:off x="548640" y="365760"/>
+            <a:ext cx="11064240" cy="731520"/>
+          </a:xfrm>
+          <a:prstGeom prst="rect">
+            <a:avLst/>
+          </a:prstGeom>
+          <a:noFill/>
+          <a:ln/>
+        </p:spPr>
+        <p:txBody>
+          <a:bodyPr wrap="square" rtlCol="0"/>
+          <a:lstStyle/>
+          <a:p>
+            <a:pPr algn="l" indent="0" marL="0">
+              <a:buNone/>
+            </a:pPr>
+            <a:r>
+              <a:rPr lang="en-US" sz="3200" b="1" dirty="0">
+                <a:solidFill>
+                  <a:schemeClr val="tx2"/>
+                </a:solidFill>
+              </a:rPr>
+              <a:t>Try it yourself</a:t>
+            </a:r>
+            <a:endParaRPr lang="en-US" sz="3200" dirty="0"/>
+          </a:p>
+        </p:txBody>
+      </p:sp>
+      <p:sp>
+        <p:nvSpPr>
+          <p:cNvPr id="3" name="Open the web demo card"/>
+          <p:cNvSpPr/>
+          <p:nvPr/>
+        </p:nvSpPr>
+        <p:spPr>
+          <a:xfrm>
+            <a:off x="548640" y="1463040"/>
+            <a:ext cx="2567178" cy="2926080"/>
+          </a:xfrm>
+          <a:prstGeom prst="roundRect">
+            <a:avLst>
+              <a:gd name="adj" fmla="val 4274"/>
+            </a:avLst>
+          </a:prstGeom>
+          <a:solidFill>
+            <a:schemeClr val="bg1"/>
+          </a:solidFill>
+          <a:ln w="9525">
+            <a:solidFill>
+              <a:srgbClr val="D2DDD5"/>
+            </a:solidFill>
+            <a:prstDash val="solid"/>
+          </a:ln>
+        </p:spPr>
+      </p:sp>
+      <p:sp>
+        <p:nvSpPr>
+          <p:cNvPr id="4" name="Open the web demo icon ring"/>
+          <p:cNvSpPr/>
+          <p:nvPr/>
+        </p:nvSpPr>
+        <p:spPr>
+          <a:xfrm>
+            <a:off x="822960" y="1737360"/>
+            <a:ext cx="640080" cy="640080"/>
+          </a:xfrm>
+          <a:prstGeom prst="ellipse">
+            <a:avLst/>
+          </a:prstGeom>
+          <a:solidFill>
+            <a:schemeClr val="accent1"/>
+          </a:solidFill>
+          <a:ln/>
+        </p:spPr>
+      </p:sp>
+      <p:pic>
+        <p:nvPicPr>
+          <p:cNvPr id="5" name="Open the web demo icon" descr="Open the web demo">    </p:cNvPr>
+          <p:cNvPicPr>
+            <a:picLocks noChangeAspect="1"/>
+          </p:cNvPicPr>
+          <p:nvPr/>
+        </p:nvPicPr>
+        <p:blipFill>
+          <a:blip r:embed="rId1"/>
+          <a:stretch>
+            <a:fillRect/>
+          </a:stretch>
+        </p:blipFill>
+        <p:spPr>
+          <a:xfrm>
+            <a:off x="960120" y="1874520"/>
+            <a:ext cx="365760" cy="365760"/>
+          </a:xfrm>
+          <a:prstGeom prst="rect">
+            <a:avLst/>
+          </a:prstGeom>
+        </p:spPr>
+      </p:pic>
+      <p:sp>
+        <p:nvSpPr>
+          <p:cNvPr id="6" name="Text 3"/>
+          <p:cNvSpPr txBox="1"/>
+          <p:nvPr/>
+        </p:nvSpPr>
+        <p:spPr>
+          <a:xfrm>
+            <a:off x="822960" y="2514600"/>
+            <a:ext cx="2018538" cy="594360"/>
+          </a:xfrm>
+          <a:prstGeom prst="rect">
+            <a:avLst/>
+          </a:prstGeom>
+          <a:noFill/>
+          <a:ln/>
+        </p:spPr>
+        <p:txBody>
+          <a:bodyPr wrap="square" lIns="0" tIns="0" rIns="0" bIns="0" rtlCol="0" anchor="t"/>
+          <a:lstStyle/>
+          <a:p>
+            <a:pPr indent="0" marL="0">
+              <a:buNone/>
+            </a:pPr>
+            <a:r>
+              <a:rPr lang="en-US" sz="1700" b="1" dirty="0">
+                <a:solidFill>
+                  <a:schemeClr val="tx2"/>
+                </a:solidFill>
+              </a:rPr>
+              <a:t>Open the web demo</a:t>
+            </a:r>
+            <a:endParaRPr lang="en-US" sz="1700" dirty="0"/>
+          </a:p>
+        </p:txBody>
+      </p:sp>
+      <p:sp>
+        <p:nvSpPr>
+          <p:cNvPr id="7" name="Text 4"/>
+          <p:cNvSpPr txBox="1"/>
+          <p:nvPr/>
+        </p:nvSpPr>
+        <p:spPr>
+          <a:xfrm>
+            <a:off x="822960" y="3154680"/>
+            <a:ext cx="2018538" cy="1097280"/>
+          </a:xfrm>
+          <a:prstGeom prst="rect">
+            <a:avLst/>
+          </a:prstGeom>
+          <a:noFill/>
+          <a:ln/>
+        </p:spPr>
+        <p:txBody>
+          <a:bodyPr wrap="square" lIns="0" tIns="0" rIns="0" bIns="0" rtlCol="0" anchor="t"/>
+          <a:lstStyle/>
+          <a:p>
+            <a:pPr indent="0" marL="0">
+              <a:buNone/>
+            </a:pPr>
+            <a:r>
+              <a:rPr lang="en-US" sz="1400" dirty="0">
+                <a:solidFill>
+                  <a:schemeClr val="tx1"/>
+                </a:solidFill>
+              </a:rPr>
+              <a:t>https://federation-only-emerald-planets.trycloudflare.com/demo</a:t>
+            </a:r>
+            <a:endParaRPr lang="en-US" sz="1400" dirty="0"/>
+          </a:p>
+        </p:txBody>
+      </p:sp>
+      <p:sp>
+        <p:nvSpPr>
+          <p:cNvPr id="8" name="Pick a demo card card"/>
+          <p:cNvSpPr/>
+          <p:nvPr/>
+        </p:nvSpPr>
+        <p:spPr>
+          <a:xfrm>
+            <a:off x="3390138" y="1463040"/>
+            <a:ext cx="2567178" cy="2926080"/>
+          </a:xfrm>
+          <a:prstGeom prst="roundRect">
+            <a:avLst>
+              <a:gd name="adj" fmla="val 4274"/>
+            </a:avLst>
+          </a:prstGeom>
+          <a:solidFill>
+            <a:schemeClr val="bg1"/>
+          </a:solidFill>
+          <a:ln w="9525">
+            <a:solidFill>
+              <a:srgbClr val="D2DDD5"/>
+            </a:solidFill>
+            <a:prstDash val="solid"/>
+          </a:ln>
+        </p:spPr>
+      </p:sp>
+      <p:sp>
+        <p:nvSpPr>
+          <p:cNvPr id="9" name="Pick a demo card icon ring"/>
+          <p:cNvSpPr/>
+          <p:nvPr/>
+        </p:nvSpPr>
+        <p:spPr>
+          <a:xfrm>
+            <a:off x="3664458" y="1737360"/>
+            <a:ext cx="640080" cy="640080"/>
+          </a:xfrm>
+          <a:prstGeom prst="ellipse">
+            <a:avLst/>
+          </a:prstGeom>
+          <a:solidFill>
+            <a:schemeClr val="accent1"/>
+          </a:solidFill>
+          <a:ln/>
+        </p:spPr>
+      </p:sp>
+      <p:pic>
+        <p:nvPicPr>
+          <p:cNvPr id="10" name="Pick a demo card icon" descr="Pick a demo card">    </p:cNvPr>
+          <p:cNvPicPr>
+            <a:picLocks noChangeAspect="1"/>
+          </p:cNvPicPr>
+          <p:nvPr/>
+        </p:nvPicPr>
+        <p:blipFill>
+          <a:blip r:embed="rId2"/>
+          <a:stretch>
+            <a:fillRect/>
+          </a:stretch>
+        </p:blipFill>
+        <p:spPr>
+          <a:xfrm>
+            <a:off x="3801618" y="1874520"/>
+            <a:ext cx="365760" cy="365760"/>
+          </a:xfrm>
+          <a:prstGeom prst="rect">
+            <a:avLst/>
+          </a:prstGeom>
+        </p:spPr>
+      </p:pic>
+      <p:sp>
+        <p:nvSpPr>
+          <p:cNvPr id="11" name="Text 7"/>
+          <p:cNvSpPr txBox="1"/>
+          <p:nvPr/>
+        </p:nvSpPr>
+        <p:spPr>
+          <a:xfrm>
+            <a:off x="3664458" y="2514600"/>
+            <a:ext cx="2018538" cy="594360"/>
+          </a:xfrm>
+          <a:prstGeom prst="rect">
+            <a:avLst/>
+          </a:prstGeom>
+          <a:noFill/>
+          <a:ln/>
+        </p:spPr>
+        <p:txBody>
+          <a:bodyPr wrap="square" lIns="0" tIns="0" rIns="0" bIns="0" rtlCol="0" anchor="t"/>
+          <a:lstStyle/>
+          <a:p>
+            <a:pPr indent="0" marL="0">
+              <a:buNone/>
+            </a:pPr>
+            <a:r>
+              <a:rPr lang="en-US" sz="1700" b="1" dirty="0">
+                <a:solidFill>
+                  <a:schemeClr val="tx2"/>
+                </a:solidFill>
+              </a:rPr>
+              <a:t>Pick a demo card</a:t>
+            </a:r>
+            <a:endParaRPr lang="en-US" sz="1700" dirty="0"/>
+          </a:p>
+        </p:txBody>
+      </p:sp>
+      <p:sp>
+        <p:nvSpPr>
+          <p:cNvPr id="12" name="Text 8"/>
+          <p:cNvSpPr txBox="1"/>
+          <p:nvPr/>
+        </p:nvSpPr>
+        <p:spPr>
+          <a:xfrm>
+            <a:off x="3664458" y="3154680"/>
+            <a:ext cx="2018538" cy="1097280"/>
+          </a:xfrm>
+          <a:prstGeom prst="rect">
+            <a:avLst/>
+          </a:prstGeom>
+          <a:noFill/>
+          <a:ln/>
+        </p:spPr>
+        <p:txBody>
+          <a:bodyPr wrap="square" lIns="0" tIns="0" rIns="0" bIns="0" rtlCol="0" anchor="t"/>
+          <a:lstStyle/>
+          <a:p>
+            <a:pPr indent="0" marL="0">
+              <a:buNone/>
+            </a:pPr>
+            <a:r>
+              <a:rPr lang="en-US" sz="1400" dirty="0">
+                <a:solidFill>
+                  <a:schemeClr val="tx1"/>
+                </a:solidFill>
+              </a:rPr>
+              <a:t>Doctor, nurse, paramedic or IT. Every card has PIN 1234. Three wrong PINs block it.</a:t>
+            </a:r>
+            <a:endParaRPr lang="en-US" sz="1400" dirty="0"/>
+          </a:p>
+        </p:txBody>
+      </p:sp>
+      <p:sp>
+        <p:nvSpPr>
+          <p:cNvPr id="13" name="Try the journal assistant card"/>
+          <p:cNvSpPr/>
+          <p:nvPr/>
+        </p:nvSpPr>
+        <p:spPr>
+          <a:xfrm>
+            <a:off x="6231636" y="1463040"/>
+            <a:ext cx="2567178" cy="2926080"/>
+          </a:xfrm>
+          <a:prstGeom prst="roundRect">
+            <a:avLst>
+              <a:gd name="adj" fmla="val 4274"/>
+            </a:avLst>
+          </a:prstGeom>
+          <a:solidFill>
+            <a:schemeClr val="bg1"/>
+          </a:solidFill>
+          <a:ln w="9525">
+            <a:solidFill>
+              <a:srgbClr val="D2DDD5"/>
+            </a:solidFill>
+            <a:prstDash val="solid"/>
+          </a:ln>
+        </p:spPr>
+      </p:sp>
+      <p:sp>
+        <p:nvSpPr>
+          <p:cNvPr id="14" name="Try the journal assistant icon ring"/>
+          <p:cNvSpPr/>
+          <p:nvPr/>
+        </p:nvSpPr>
+        <p:spPr>
+          <a:xfrm>
+            <a:off x="6505956" y="1737360"/>
+            <a:ext cx="640080" cy="640080"/>
+          </a:xfrm>
+          <a:prstGeom prst="ellipse">
+            <a:avLst/>
+          </a:prstGeom>
+          <a:solidFill>
+            <a:schemeClr val="accent1"/>
+          </a:solidFill>
+          <a:ln/>
+        </p:spPr>
+      </p:sp>
+      <p:pic>
+        <p:nvPicPr>
+          <p:cNvPr id="15" name="Try the journal assistant icon" descr="Try the journal assistant">    </p:cNvPr>
+          <p:cNvPicPr>
+            <a:picLocks noChangeAspect="1"/>
+          </p:cNvPicPr>
+          <p:nvPr/>
+        </p:nvPicPr>
+        <p:blipFill>
+          <a:blip r:embed="rId3"/>
+          <a:stretch>
+            <a:fillRect/>
+          </a:stretch>
+        </p:blipFill>
+        <p:spPr>
+          <a:xfrm>
+            <a:off x="6643116" y="1874520"/>
+            <a:ext cx="365760" cy="365760"/>
+          </a:xfrm>
+          <a:prstGeom prst="rect">
+            <a:avLst/>
+          </a:prstGeom>
+        </p:spPr>
+      </p:pic>
+      <p:sp>
+        <p:nvSpPr>
+          <p:cNvPr id="16" name="Text 11"/>
+          <p:cNvSpPr txBox="1"/>
+          <p:nvPr/>
+        </p:nvSpPr>
+        <p:spPr>
+          <a:xfrm>
+            <a:off x="6505956" y="2514600"/>
+            <a:ext cx="2018538" cy="594360"/>
+          </a:xfrm>
+          <a:prstGeom prst="rect">
+            <a:avLst/>
+          </a:prstGeom>
+          <a:noFill/>
+          <a:ln/>
+        </p:spPr>
+        <p:txBody>
+          <a:bodyPr wrap="square" lIns="0" tIns="0" rIns="0" bIns="0" rtlCol="0" anchor="t"/>
+          <a:lstStyle/>
+          <a:p>
+            <a:pPr indent="0" marL="0">
+              <a:buNone/>
+            </a:pPr>
+            <a:r>
+              <a:rPr lang="en-US" sz="1700" b="1" dirty="0">
+                <a:solidFill>
+                  <a:schemeClr val="tx2"/>
+                </a:solidFill>
+              </a:rPr>
+              <a:t>Try the journal assistant</a:t>
+            </a:r>
+            <a:endParaRPr lang="en-US" sz="1700" dirty="0"/>
+          </a:p>
+        </p:txBody>
+      </p:sp>
+      <p:sp>
+        <p:nvSpPr>
+          <p:cNvPr id="17" name="Text 12"/>
+          <p:cNvSpPr txBox="1"/>
+          <p:nvPr/>
+        </p:nvSpPr>
+        <p:spPr>
+          <a:xfrm>
+            <a:off x="6505956" y="3154680"/>
+            <a:ext cx="2018538" cy="1097280"/>
+          </a:xfrm>
+          <a:prstGeom prst="rect">
+            <a:avLst/>
+          </a:prstGeom>
+          <a:noFill/>
+          <a:ln/>
+        </p:spPr>
+        <p:txBody>
+          <a:bodyPr wrap="square" lIns="0" tIns="0" rIns="0" bIns="0" rtlCol="0" anchor="t"/>
+          <a:lstStyle/>
+          <a:p>
+            <a:pPr indent="0" marL="0">
+              <a:buNone/>
+            </a:pPr>
+            <a:r>
+              <a:rPr lang="en-US" sz="1400" dirty="0">
+                <a:solidFill>
+                  <a:schemeClr val="tx1"/>
+                </a:solidFill>
+              </a:rPr>
+              <a:t>"Use example conversation", then "Create journal note", and look at the source check.</a:t>
+            </a:r>
+            <a:endParaRPr lang="en-US" sz="1400" dirty="0"/>
+          </a:p>
+        </p:txBody>
+      </p:sp>
+      <p:sp>
+        <p:nvSpPr>
+          <p:cNvPr id="18" name="Norsk or English card"/>
+          <p:cNvSpPr/>
+          <p:nvPr/>
+        </p:nvSpPr>
+        <p:spPr>
+          <a:xfrm>
+            <a:off x="9073134" y="1463040"/>
+            <a:ext cx="2567178" cy="2926080"/>
+          </a:xfrm>
+          <a:prstGeom prst="roundRect">
+            <a:avLst>
+              <a:gd name="adj" fmla="val 4274"/>
+            </a:avLst>
+          </a:prstGeom>
+          <a:solidFill>
+            <a:schemeClr val="bg1"/>
+          </a:solidFill>
+          <a:ln w="9525">
+            <a:solidFill>
+              <a:srgbClr val="D2DDD5"/>
+            </a:solidFill>
+            <a:prstDash val="solid"/>
+          </a:ln>
+        </p:spPr>
+      </p:sp>
+      <p:sp>
+        <p:nvSpPr>
+          <p:cNvPr id="19" name="Norsk or English icon ring"/>
+          <p:cNvSpPr/>
+          <p:nvPr/>
+        </p:nvSpPr>
+        <p:spPr>
+          <a:xfrm>
+            <a:off x="9347454" y="1737360"/>
+            <a:ext cx="640080" cy="640080"/>
+          </a:xfrm>
+          <a:prstGeom prst="ellipse">
+            <a:avLst/>
+          </a:prstGeom>
+          <a:solidFill>
+            <a:schemeClr val="accent1"/>
+          </a:solidFill>
+          <a:ln/>
+        </p:spPr>
+      </p:sp>
+      <p:pic>
+        <p:nvPicPr>
+          <p:cNvPr id="20" name="Norsk or English icon" descr="Norsk or English">    </p:cNvPr>
+          <p:cNvPicPr>
+            <a:picLocks noChangeAspect="1"/>
+          </p:cNvPicPr>
+          <p:nvPr/>
+        </p:nvPicPr>
+        <p:blipFill>
+          <a:blip r:embed="rId4"/>
+          <a:stretch>
+            <a:fillRect/>
+          </a:stretch>
+        </p:blipFill>
+        <p:spPr>
+          <a:xfrm>
+            <a:off x="9484614" y="1874520"/>
+            <a:ext cx="365760" cy="365760"/>
+          </a:xfrm>
+          <a:prstGeom prst="rect">
+            <a:avLst/>
+          </a:prstGeom>
+        </p:spPr>
+      </p:pic>
+      <p:sp>
+        <p:nvSpPr>
+          <p:cNvPr id="21" name="Text 15"/>
+          <p:cNvSpPr txBox="1"/>
+          <p:nvPr/>
+        </p:nvSpPr>
+        <p:spPr>
+          <a:xfrm>
+            <a:off x="9347454" y="2514600"/>
+            <a:ext cx="2018538" cy="594360"/>
+          </a:xfrm>
+          <a:prstGeom prst="rect">
+            <a:avLst/>
+          </a:prstGeom>
+          <a:noFill/>
+          <a:ln/>
+        </p:spPr>
+        <p:txBody>
+          <a:bodyPr wrap="square" lIns="0" tIns="0" rIns="0" bIns="0" rtlCol="0" anchor="t"/>
+          <a:lstStyle/>
+          <a:p>
+            <a:pPr indent="0" marL="0">
+              <a:buNone/>
+            </a:pPr>
+            <a:r>
+              <a:rPr lang="en-US" sz="1700" b="1" dirty="0">
+                <a:solidFill>
+                  <a:schemeClr val="tx2"/>
+                </a:solidFill>
+              </a:rPr>
+              <a:t>Norsk or English</a:t>
+            </a:r>
+            <a:endParaRPr lang="en-US" sz="1700" dirty="0"/>
+          </a:p>
+        </p:txBody>
+      </p:sp>
+      <p:sp>
+        <p:nvSpPr>
+          <p:cNvPr id="22" name="Text 16"/>
+          <p:cNvSpPr txBox="1"/>
+          <p:nvPr/>
+        </p:nvSpPr>
+        <p:spPr>
+          <a:xfrm>
+            <a:off x="9347454" y="3154680"/>
+            <a:ext cx="2018538" cy="1097280"/>
+          </a:xfrm>
+          <a:prstGeom prst="rect">
+            <a:avLst/>
+          </a:prstGeom>
+          <a:noFill/>
+          <a:ln/>
+        </p:spPr>
+        <p:txBody>
+          <a:bodyPr wrap="square" lIns="0" tIns="0" rIns="0" bIns="0" rtlCol="0" anchor="t"/>
+          <a:lstStyle/>
+          <a:p>
+            <a:pPr indent="0" marL="0">
+              <a:buNone/>
+            </a:pPr>
+            <a:r>
+              <a:rPr lang="en-US" sz="1400" dirty="0">
+                <a:solidFill>
+                  <a:schemeClr val="tx1"/>
+                </a:solidFill>
+              </a:rPr>
+              <a:t>The button at the top right switches the language on every page.</a:t>
+            </a:r>
+            <a:endParaRPr lang="en-US" sz="1400" dirty="0"/>
+          </a:p>
+        </p:txBody>
+      </p:sp>
+      <p:sp>
+        <p:nvSpPr>
+          <p:cNvPr id="23" name="Text 17"/>
+          <p:cNvSpPr txBox="1"/>
+          <p:nvPr/>
+        </p:nvSpPr>
+        <p:spPr>
+          <a:xfrm>
+            <a:off x="548640" y="5120640"/>
+            <a:ext cx="11064240" cy="548640"/>
+          </a:xfrm>
+          <a:prstGeom prst="rect">
+            <a:avLst/>
+          </a:prstGeom>
+          <a:noFill/>
+          <a:ln/>
+        </p:spPr>
+        <p:txBody>
+          <a:bodyPr wrap="square" rtlCol="0" anchor="ctr"/>
+          <a:lstStyle/>
+          <a:p>
+            <a:pPr indent="0" marL="0">
+              <a:buNone/>
+            </a:pPr>
+            <a:r>
+              <a:rPr lang="en-US" sz="1500" i="1" dirty="0">
+                <a:solidFill>
+                  <a:schemeClr val="accent6"/>
+                </a:solidFill>
+              </a:rPr>
+              <a:t>Synthetic data only. The web demo shows the Medicus apps; the login screen, screen lock and home-folder wipe are in Medicus OS itself. The link is temporary.</a:t>
+            </a:r>
+            <a:endParaRPr lang="en-US" sz="1500" dirty="0"/>
+          </a:p>
+        </p:txBody>
+      </p:sp>
+      <p:sp>
+        <p:nvSpPr>
+          <p:cNvPr id="25" name="Slide Number Placeholder 0"/>
+          <p:cNvSpPr>
+            <a:spLocks noGrp="1"/>
+          </p:cNvSpPr>
+          <p:nvPr>
+            <p:ph type="sldNum" sz="quarter" idx="4294967295"/>
+          </p:nvPr>
+        </p:nvSpPr>
+        <p:spPr>
+          <a:xfrm>
+            <a:off x="11247120" y="6400800"/>
+            <a:ext cx="457200" cy="274320"/>
+          </a:xfrm>
+          <a:prstGeom prst="rect">
+            <a:avLst/>
+          </a:prstGeom>
+          <a:extLst>
+            <a:ext uri="{C572A759-6A51-4108-AA02-DFA0A04FC94B}">
+              <ma14:wrappingTextBoxFlag xmlns:ma14="http://schemas.microsoft.com/office/mac/drawingml/2011/main" val="0"/>
+            </a:ext>
+          </a:extLst>
+        </p:spPr>
+        <p:txBody>
+          <a:bodyPr/>
+          <a:lstStyle>
+            <a:lvl1pPr>
+              <a:defRPr sz="1000">
+                <a:solidFill>
+                  <a:schemeClr val="accent6"/>
+                </a:solidFill>
+              </a:defRPr>
+            </a:lvl1pPr>
+          </a:lstStyle>
+          <a:p>
+            <a:pPr algn="r"/>
+            <a:fld id="{F7021451-1387-4CA6-816F-3879F97B5CBC}" type="slidenum">
+              <a:rPr b="0" lang="en-US"/>
+              <a:t>32</a:t>
+            </a:fld>
+            <a:endParaRPr lang="en-US"/>
+          </a:p>
+        </p:txBody>
+      </p:sp>
+    </p:spTree>
+  </p:cSld>
+  <p:clrMapOvr>
+    <a:masterClrMapping/>
+  </p:clrMapOvr>
+</p:sld>
+</file>
+
+<file path=ppt/slides/slide33.xml><?xml version="1.0" encoding="utf-8"?>
+<p:sld xmlns:a="http://schemas.openxmlformats.org/drawingml/2006/main" xmlns:r="http://schemas.openxmlformats.org/officeDocument/2006/relationships" xmlns:p="http://schemas.openxmlformats.org/presentationml/2006/main">
+  <p:cSld name="Slide 33">
+    <p:spTree>
+      <p:nvGrpSpPr>
+        <p:cNvPr id="1" name=""/>
+        <p:cNvGrpSpPr/>
+        <p:nvPr/>
+      </p:nvGrpSpPr>
+      <p:grpSpPr>
+        <a:xfrm>
+          <a:off x="0" y="0"/>
+          <a:ext cx="0" cy="0"/>
+          <a:chOff x="0" y="0"/>
+          <a:chExt cx="0" cy="0"/>
+        </a:xfrm>
+      </p:grpSpPr>
+      <p:sp>
+        <p:nvSpPr>
+          <p:cNvPr id="2" name="Text 0"/>
+          <p:cNvSpPr/>
+          <p:nvPr>
+            <p:ph idx="100" type="title" hasCustomPrompt="1"/>
+          </p:nvPr>
+        </p:nvSpPr>
+        <p:spPr>
+          <a:xfrm>
+            <a:off x="548640" y="365760"/>
+            <a:ext cx="11064240" cy="731520"/>
+          </a:xfrm>
+          <a:prstGeom prst="rect">
+            <a:avLst/>
+          </a:prstGeom>
+          <a:noFill/>
+          <a:ln/>
+        </p:spPr>
+        <p:txBody>
+          <a:bodyPr wrap="square" rtlCol="0"/>
+          <a:lstStyle/>
+          <a:p>
+            <a:pPr algn="l" indent="0" marL="0">
+              <a:buNone/>
+            </a:pPr>
+            <a:r>
+              <a:rPr lang="en-US" sz="3200" b="1" dirty="0">
+                <a:solidFill>
+                  <a:schemeClr val="tx2"/>
+                </a:solidFill>
+              </a:rPr>
+              <a:t>A first pilot, without risk</a:t>
+            </a:r>
+            <a:endParaRPr lang="en-US" sz="3200" dirty="0"/>
+          </a:p>
+        </p:txBody>
+      </p:sp>
+      <p:sp>
+        <p:nvSpPr>
+          <p:cNvPr id="3" name="Agreements first card"/>
+          <p:cNvSpPr/>
+          <p:nvPr/>
+        </p:nvSpPr>
+        <p:spPr>
+          <a:xfrm>
+            <a:off x="548640" y="1463040"/>
+            <a:ext cx="2567178" cy="2926080"/>
+          </a:xfrm>
+          <a:prstGeom prst="roundRect">
+            <a:avLst>
+              <a:gd name="adj" fmla="val 4274"/>
+            </a:avLst>
+          </a:prstGeom>
+          <a:solidFill>
+            <a:schemeClr val="bg1"/>
+          </a:solidFill>
+          <a:ln w="9525">
+            <a:solidFill>
+              <a:srgbClr val="D2DDD5"/>
+            </a:solidFill>
+            <a:prstDash val="solid"/>
+          </a:ln>
+        </p:spPr>
+      </p:sp>
+      <p:sp>
+        <p:nvSpPr>
+          <p:cNvPr id="4" name="Agreements first icon ring"/>
+          <p:cNvSpPr/>
+          <p:nvPr/>
+        </p:nvSpPr>
+        <p:spPr>
+          <a:xfrm>
+            <a:off x="822960" y="1737360"/>
+            <a:ext cx="640080" cy="640080"/>
+          </a:xfrm>
+          <a:prstGeom prst="ellipse">
+            <a:avLst/>
+          </a:prstGeom>
+          <a:solidFill>
+            <a:schemeClr val="accent1"/>
+          </a:solidFill>
+          <a:ln/>
+        </p:spPr>
+      </p:sp>
+      <p:pic>
+        <p:nvPicPr>
+          <p:cNvPr id="5" name="Agreements first icon" descr="Agreements first">    </p:cNvPr>
+          <p:cNvPicPr>
+            <a:picLocks noChangeAspect="1"/>
+          </p:cNvPicPr>
+          <p:nvPr/>
+        </p:nvPicPr>
+        <p:blipFill>
+          <a:blip r:embed="rId1"/>
+          <a:stretch>
+            <a:fillRect/>
+          </a:stretch>
+        </p:blipFill>
+        <p:spPr>
+          <a:xfrm>
+            <a:off x="960120" y="1874520"/>
+            <a:ext cx="365760" cy="365760"/>
+          </a:xfrm>
+          <a:prstGeom prst="rect">
+            <a:avLst/>
+          </a:prstGeom>
+        </p:spPr>
+      </p:pic>
+      <p:sp>
+        <p:nvSpPr>
+          <p:cNvPr id="6" name="Text 3"/>
+          <p:cNvSpPr txBox="1"/>
+          <p:nvPr/>
+        </p:nvSpPr>
+        <p:spPr>
+          <a:xfrm>
+            <a:off x="822960" y="2514600"/>
+            <a:ext cx="2018538" cy="594360"/>
+          </a:xfrm>
+          <a:prstGeom prst="rect">
+            <a:avLst/>
+          </a:prstGeom>
+          <a:noFill/>
+          <a:ln/>
+        </p:spPr>
+        <p:txBody>
+          <a:bodyPr wrap="square" lIns="0" tIns="0" rIns="0" bIns="0" rtlCol="0" anchor="t"/>
+          <a:lstStyle/>
+          <a:p>
+            <a:pPr indent="0" marL="0">
+              <a:buNone/>
+            </a:pPr>
+            <a:r>
+              <a:rPr lang="en-US" sz="1700" b="1" dirty="0">
+                <a:solidFill>
+                  <a:schemeClr val="tx2"/>
+                </a:solidFill>
+              </a:rPr>
+              <a:t>Agreements first</a:t>
+            </a:r>
+            <a:endParaRPr lang="en-US" sz="1700" dirty="0"/>
+          </a:p>
+        </p:txBody>
+      </p:sp>
+      <p:sp>
+        <p:nvSpPr>
+          <p:cNvPr id="7" name="Text 4"/>
+          <p:cNvSpPr txBox="1"/>
+          <p:nvPr/>
+        </p:nvSpPr>
+        <p:spPr>
+          <a:xfrm>
+            <a:off x="822960" y="3154680"/>
+            <a:ext cx="2018538" cy="1097280"/>
+          </a:xfrm>
+          <a:prstGeom prst="rect">
+            <a:avLst/>
+          </a:prstGeom>
+          <a:noFill/>
+          <a:ln/>
+        </p:spPr>
+        <p:txBody>
+          <a:bodyPr wrap="square" lIns="0" tIns="0" rIns="0" bIns="0" rtlCol="0" anchor="t"/>
+          <a:lstStyle/>
+          <a:p>
+            <a:pPr indent="0" marL="0">
+              <a:buNone/>
+            </a:pPr>
+            <a:r>
+              <a:rPr lang="en-US" sz="1400" dirty="0">
+                <a:solidFill>
+                  <a:schemeClr val="tx1"/>
+                </a:solidFill>
+              </a:rPr>
+              <a:t>DPIA, Normen risk assessment, MDR assessment and talks with employee representatives.</a:t>
+            </a:r>
+            <a:endParaRPr lang="en-US" sz="1400" dirty="0"/>
+          </a:p>
+        </p:txBody>
+      </p:sp>
+      <p:sp>
+        <p:nvSpPr>
+          <p:cNvPr id="8" name="Next to today's PCs card"/>
+          <p:cNvSpPr/>
+          <p:nvPr/>
+        </p:nvSpPr>
+        <p:spPr>
+          <a:xfrm>
+            <a:off x="3390138" y="1463040"/>
+            <a:ext cx="2567178" cy="2926080"/>
+          </a:xfrm>
+          <a:prstGeom prst="roundRect">
+            <a:avLst>
+              <a:gd name="adj" fmla="val 4274"/>
+            </a:avLst>
+          </a:prstGeom>
+          <a:solidFill>
+            <a:schemeClr val="bg1"/>
+          </a:solidFill>
+          <a:ln w="9525">
+            <a:solidFill>
+              <a:srgbClr val="D2DDD5"/>
+            </a:solidFill>
+            <a:prstDash val="solid"/>
+          </a:ln>
+        </p:spPr>
+      </p:sp>
+      <p:sp>
+        <p:nvSpPr>
+          <p:cNvPr id="9" name="Next to today's PCs icon ring"/>
+          <p:cNvSpPr/>
+          <p:nvPr/>
+        </p:nvSpPr>
+        <p:spPr>
+          <a:xfrm>
+            <a:off x="3664458" y="1737360"/>
+            <a:ext cx="640080" cy="640080"/>
+          </a:xfrm>
+          <a:prstGeom prst="ellipse">
+            <a:avLst/>
+          </a:prstGeom>
+          <a:solidFill>
+            <a:schemeClr val="accent1"/>
+          </a:solidFill>
+          <a:ln/>
+        </p:spPr>
+      </p:sp>
+      <p:pic>
+        <p:nvPicPr>
+          <p:cNvPr id="10" name="Next to today's PCs icon" descr="Next to today's PCs">    </p:cNvPr>
+          <p:cNvPicPr>
+            <a:picLocks noChangeAspect="1"/>
+          </p:cNvPicPr>
+          <p:nvPr/>
+        </p:nvPicPr>
+        <p:blipFill>
+          <a:blip r:embed="rId2"/>
+          <a:stretch>
+            <a:fillRect/>
+          </a:stretch>
+        </p:blipFill>
+        <p:spPr>
+          <a:xfrm>
+            <a:off x="3801618" y="1874520"/>
+            <a:ext cx="365760" cy="365760"/>
+          </a:xfrm>
+          <a:prstGeom prst="rect">
+            <a:avLst/>
+          </a:prstGeom>
+        </p:spPr>
+      </p:pic>
+      <p:sp>
+        <p:nvSpPr>
+          <p:cNvPr id="11" name="Text 7"/>
+          <p:cNvSpPr txBox="1"/>
+          <p:nvPr/>
+        </p:nvSpPr>
+        <p:spPr>
+          <a:xfrm>
+            <a:off x="3664458" y="2514600"/>
+            <a:ext cx="2018538" cy="594360"/>
+          </a:xfrm>
+          <a:prstGeom prst="rect">
+            <a:avLst/>
+          </a:prstGeom>
+          <a:noFill/>
+          <a:ln/>
+        </p:spPr>
+        <p:txBody>
+          <a:bodyPr wrap="square" lIns="0" tIns="0" rIns="0" bIns="0" rtlCol="0" anchor="t"/>
+          <a:lstStyle/>
+          <a:p>
+            <a:pPr indent="0" marL="0">
+              <a:buNone/>
+            </a:pPr>
+            <a:r>
+              <a:rPr lang="en-US" sz="1700" b="1" dirty="0">
+                <a:solidFill>
+                  <a:schemeClr val="tx2"/>
+                </a:solidFill>
+              </a:rPr>
+              <a:t>Next to today's PCs</a:t>
+            </a:r>
+            <a:endParaRPr lang="en-US" sz="1700" dirty="0"/>
+          </a:p>
+        </p:txBody>
+      </p:sp>
+      <p:sp>
+        <p:nvSpPr>
+          <p:cNvPr id="12" name="Text 8"/>
+          <p:cNvSpPr txBox="1"/>
+          <p:nvPr/>
+        </p:nvSpPr>
+        <p:spPr>
+          <a:xfrm>
+            <a:off x="3664458" y="3154680"/>
+            <a:ext cx="2018538" cy="1097280"/>
+          </a:xfrm>
+          <a:prstGeom prst="rect">
+            <a:avLst/>
+          </a:prstGeom>
+          <a:noFill/>
+          <a:ln/>
+        </p:spPr>
+        <p:txBody>
+          <a:bodyPr wrap="square" lIns="0" tIns="0" rIns="0" bIns="0" rtlCol="0" anchor="t"/>
+          <a:lstStyle/>
+          <a:p>
+            <a:pPr indent="0" marL="0">
+              <a:buNone/>
+            </a:pPr>
+            <a:r>
+              <a:rPr lang="en-US" sz="1400" dirty="0">
+                <a:solidFill>
+                  <a:schemeClr val="tx1"/>
+                </a:solidFill>
+              </a:rPr>
+              <a:t>2–3 Medicus PCs on one unit. The old PCs stay, and the unit can stop the same day.</a:t>
+            </a:r>
+            <a:endParaRPr lang="en-US" sz="1400" dirty="0"/>
+          </a:p>
+        </p:txBody>
+      </p:sp>
+      <p:sp>
+        <p:nvSpPr>
+          <p:cNvPr id="13" name="Check at week 4 card"/>
+          <p:cNvSpPr/>
+          <p:nvPr/>
+        </p:nvSpPr>
+        <p:spPr>
+          <a:xfrm>
+            <a:off x="6231636" y="1463040"/>
+            <a:ext cx="2567178" cy="2926080"/>
+          </a:xfrm>
+          <a:prstGeom prst="roundRect">
+            <a:avLst>
+              <a:gd name="adj" fmla="val 4274"/>
+            </a:avLst>
+          </a:prstGeom>
+          <a:solidFill>
+            <a:schemeClr val="bg1"/>
+          </a:solidFill>
+          <a:ln w="9525">
+            <a:solidFill>
+              <a:srgbClr val="D2DDD5"/>
+            </a:solidFill>
+            <a:prstDash val="solid"/>
+          </a:ln>
+        </p:spPr>
+      </p:sp>
+      <p:sp>
+        <p:nvSpPr>
+          <p:cNvPr id="14" name="Check at week 4 icon ring"/>
+          <p:cNvSpPr/>
+          <p:nvPr/>
+        </p:nvSpPr>
+        <p:spPr>
+          <a:xfrm>
+            <a:off x="6505956" y="1737360"/>
+            <a:ext cx="640080" cy="640080"/>
+          </a:xfrm>
+          <a:prstGeom prst="ellipse">
+            <a:avLst/>
+          </a:prstGeom>
+          <a:solidFill>
+            <a:schemeClr val="accent1"/>
+          </a:solidFill>
+          <a:ln/>
+        </p:spPr>
+      </p:sp>
+      <p:pic>
+        <p:nvPicPr>
+          <p:cNvPr id="15" name="Check at week 4 icon" descr="Check at week 4">    </p:cNvPr>
+          <p:cNvPicPr>
+            <a:picLocks noChangeAspect="1"/>
+          </p:cNvPicPr>
+          <p:nvPr/>
+        </p:nvPicPr>
+        <p:blipFill>
+          <a:blip r:embed="rId3"/>
+          <a:stretch>
+            <a:fillRect/>
+          </a:stretch>
+        </p:blipFill>
+        <p:spPr>
+          <a:xfrm>
+            <a:off x="6643116" y="1874520"/>
+            <a:ext cx="365760" cy="365760"/>
+          </a:xfrm>
+          <a:prstGeom prst="rect">
+            <a:avLst/>
+          </a:prstGeom>
+        </p:spPr>
+      </p:pic>
+      <p:sp>
+        <p:nvSpPr>
+          <p:cNvPr id="16" name="Text 11"/>
+          <p:cNvSpPr txBox="1"/>
+          <p:nvPr/>
+        </p:nvSpPr>
+        <p:spPr>
+          <a:xfrm>
+            <a:off x="6505956" y="2514600"/>
+            <a:ext cx="2018538" cy="594360"/>
+          </a:xfrm>
+          <a:prstGeom prst="rect">
+            <a:avLst/>
+          </a:prstGeom>
+          <a:noFill/>
+          <a:ln/>
+        </p:spPr>
+        <p:txBody>
+          <a:bodyPr wrap="square" lIns="0" tIns="0" rIns="0" bIns="0" rtlCol="0" anchor="t"/>
+          <a:lstStyle/>
+          <a:p>
+            <a:pPr indent="0" marL="0">
+              <a:buNone/>
+            </a:pPr>
+            <a:r>
+              <a:rPr lang="en-US" sz="1700" b="1" dirty="0">
+                <a:solidFill>
+                  <a:schemeClr val="tx2"/>
+                </a:solidFill>
+              </a:rPr>
+              <a:t>Check at week 4</a:t>
+            </a:r>
+            <a:endParaRPr lang="en-US" sz="1700" dirty="0"/>
+          </a:p>
+        </p:txBody>
+      </p:sp>
+      <p:sp>
+        <p:nvSpPr>
+          <p:cNvPr id="17" name="Text 12"/>
+          <p:cNvSpPr txBox="1"/>
+          <p:nvPr/>
+        </p:nvSpPr>
+        <p:spPr>
+          <a:xfrm>
+            <a:off x="6505956" y="3154680"/>
+            <a:ext cx="2018538" cy="1097280"/>
+          </a:xfrm>
+          <a:prstGeom prst="rect">
+            <a:avLst/>
+          </a:prstGeom>
+          <a:noFill/>
+          <a:ln/>
+        </p:spPr>
+        <p:txBody>
+          <a:bodyPr wrap="square" lIns="0" tIns="0" rIns="0" bIns="0" rtlCol="0" anchor="t"/>
+          <a:lstStyle/>
+          <a:p>
+            <a:pPr indent="0" marL="0">
+              <a:buNone/>
+            </a:pPr>
+            <a:r>
+              <a:rPr lang="en-US" sz="1400" dirty="0">
+                <a:solidFill>
+                  <a:schemeClr val="tx1"/>
+                </a:solidFill>
+              </a:rPr>
+              <a:t>The unit, IT and employee representatives decide: go on, change or stop.</a:t>
+            </a:r>
+            <a:endParaRPr lang="en-US" sz="1400" dirty="0"/>
+          </a:p>
+        </p:txBody>
+      </p:sp>
+      <p:sp>
+        <p:nvSpPr>
+          <p:cNvPr id="18" name="Measure, then decide card"/>
+          <p:cNvSpPr/>
+          <p:nvPr/>
+        </p:nvSpPr>
+        <p:spPr>
+          <a:xfrm>
+            <a:off x="9073134" y="1463040"/>
+            <a:ext cx="2567178" cy="2926080"/>
+          </a:xfrm>
+          <a:prstGeom prst="roundRect">
+            <a:avLst>
+              <a:gd name="adj" fmla="val 4274"/>
+            </a:avLst>
+          </a:prstGeom>
+          <a:solidFill>
+            <a:schemeClr val="bg1"/>
+          </a:solidFill>
+          <a:ln w="9525">
+            <a:solidFill>
+              <a:srgbClr val="D2DDD5"/>
+            </a:solidFill>
+            <a:prstDash val="solid"/>
+          </a:ln>
+        </p:spPr>
+      </p:sp>
+      <p:sp>
+        <p:nvSpPr>
+          <p:cNvPr id="19" name="Measure, then decide icon ring"/>
+          <p:cNvSpPr/>
+          <p:nvPr/>
+        </p:nvSpPr>
+        <p:spPr>
+          <a:xfrm>
+            <a:off x="9347454" y="1737360"/>
+            <a:ext cx="640080" cy="640080"/>
+          </a:xfrm>
+          <a:prstGeom prst="ellipse">
+            <a:avLst/>
+          </a:prstGeom>
+          <a:solidFill>
+            <a:schemeClr val="accent1"/>
+          </a:solidFill>
+          <a:ln/>
+        </p:spPr>
+      </p:sp>
+      <p:pic>
+        <p:nvPicPr>
+          <p:cNvPr id="20" name="Measure, then decide icon" descr="Measure, then decide">    </p:cNvPr>
+          <p:cNvPicPr>
+            <a:picLocks noChangeAspect="1"/>
+          </p:cNvPicPr>
+          <p:nvPr/>
+        </p:nvPicPr>
+        <p:blipFill>
+          <a:blip r:embed="rId4"/>
+          <a:stretch>
+            <a:fillRect/>
+          </a:stretch>
+        </p:blipFill>
+        <p:spPr>
+          <a:xfrm>
+            <a:off x="9484614" y="1874520"/>
+            <a:ext cx="365760" cy="365760"/>
+          </a:xfrm>
+          <a:prstGeom prst="rect">
+            <a:avLst/>
+          </a:prstGeom>
+        </p:spPr>
+      </p:pic>
+      <p:sp>
+        <p:nvSpPr>
+          <p:cNvPr id="21" name="Text 15"/>
+          <p:cNvSpPr txBox="1"/>
+          <p:nvPr/>
+        </p:nvSpPr>
+        <p:spPr>
+          <a:xfrm>
+            <a:off x="9347454" y="2514600"/>
+            <a:ext cx="2018538" cy="594360"/>
+          </a:xfrm>
+          <a:prstGeom prst="rect">
+            <a:avLst/>
+          </a:prstGeom>
+          <a:noFill/>
+          <a:ln/>
+        </p:spPr>
+        <p:txBody>
+          <a:bodyPr wrap="square" lIns="0" tIns="0" rIns="0" bIns="0" rtlCol="0" anchor="t"/>
+          <a:lstStyle/>
+          <a:p>
+            <a:pPr indent="0" marL="0">
+              <a:buNone/>
+            </a:pPr>
+            <a:r>
+              <a:rPr lang="en-US" sz="1700" b="1" dirty="0">
+                <a:solidFill>
+                  <a:schemeClr val="tx2"/>
+                </a:solidFill>
+              </a:rPr>
+              <a:t>Measure, then decide</a:t>
+            </a:r>
+            <a:endParaRPr lang="en-US" sz="1700" dirty="0"/>
+          </a:p>
+        </p:txBody>
+      </p:sp>
+      <p:sp>
+        <p:nvSpPr>
+          <p:cNvPr id="22" name="Text 16"/>
+          <p:cNvSpPr txBox="1"/>
+          <p:nvPr/>
+        </p:nvSpPr>
+        <p:spPr>
+          <a:xfrm>
+            <a:off x="9347454" y="3154680"/>
+            <a:ext cx="2018538" cy="1097280"/>
+          </a:xfrm>
+          <a:prstGeom prst="rect">
+            <a:avLst/>
+          </a:prstGeom>
+          <a:noFill/>
+          <a:ln/>
+        </p:spPr>
+        <p:txBody>
+          <a:bodyPr wrap="square" lIns="0" tIns="0" rIns="0" bIns="0" rtlCol="0" anchor="t"/>
+          <a:lstStyle/>
+          <a:p>
+            <a:pPr indent="0" marL="0">
+              <a:buNone/>
+            </a:pPr>
+            <a:r>
+              <a:rPr lang="en-US" sz="1400" dirty="0">
+                <a:solidFill>
+                  <a:schemeClr val="tx1"/>
+                </a:solidFill>
+              </a:rPr>
+              <a:t>Time saved, errors, support cases and what staff say. Then wider – or stop.</a:t>
+            </a:r>
+            <a:endParaRPr lang="en-US" sz="1400" dirty="0"/>
+          </a:p>
+        </p:txBody>
+      </p:sp>
+      <p:sp>
+        <p:nvSpPr>
+          <p:cNvPr id="25" name="Slide Number Placeholder 0"/>
+          <p:cNvSpPr>
+            <a:spLocks noGrp="1"/>
+          </p:cNvSpPr>
+          <p:nvPr>
+            <p:ph type="sldNum" sz="quarter" idx="4294967295"/>
+          </p:nvPr>
+        </p:nvSpPr>
+        <p:spPr>
+          <a:xfrm>
+            <a:off x="11247120" y="6400800"/>
+            <a:ext cx="457200" cy="274320"/>
+          </a:xfrm>
+          <a:prstGeom prst="rect">
+            <a:avLst/>
+          </a:prstGeom>
+          <a:extLst>
+            <a:ext uri="{C572A759-6A51-4108-AA02-DFA0A04FC94B}">
+              <ma14:wrappingTextBoxFlag xmlns:ma14="http://schemas.microsoft.com/office/mac/drawingml/2011/main" val="0"/>
+            </a:ext>
+          </a:extLst>
+        </p:spPr>
+        <p:txBody>
+          <a:bodyPr/>
+          <a:lstStyle>
+            <a:lvl1pPr>
+              <a:defRPr sz="1000">
+                <a:solidFill>
+                  <a:schemeClr val="accent6"/>
+                </a:solidFill>
+              </a:defRPr>
+            </a:lvl1pPr>
+          </a:lstStyle>
+          <a:p>
+            <a:pPr algn="r"/>
+            <a:fld id="{F7021451-1387-4CA6-816F-3879F97B5CBC}" type="slidenum">
+              <a:rPr b="0" lang="en-US"/>
+              <a:t>33</a:t>
+            </a:fld>
+            <a:endParaRPr lang="en-US"/>
+          </a:p>
+        </p:txBody>
+      </p:sp>
+    </p:spTree>
+  </p:cSld>
+  <p:clrMapOvr>
+    <a:masterClrMapping/>
+  </p:clrMapOvr>
+</p:sld>
+</file>
+
+<file path=ppt/slides/slide34.xml><?xml version="1.0" encoding="utf-8"?>
+<p:sld xmlns:a="http://schemas.openxmlformats.org/drawingml/2006/main" xmlns:r="http://schemas.openxmlformats.org/officeDocument/2006/relationships" xmlns:p="http://schemas.openxmlformats.org/presentationml/2006/main">
+  <p:cSld name="Slide 34">
+    <p:spTree>
+      <p:nvGrpSpPr>
+        <p:cNvPr id="1" name=""/>
+        <p:cNvGrpSpPr/>
+        <p:nvPr/>
+      </p:nvGrpSpPr>
+      <p:grpSpPr>
+        <a:xfrm>
+          <a:off x="0" y="0"/>
+          <a:ext cx="0" cy="0"/>
+          <a:chOff x="0" y="0"/>
+          <a:chExt cx="0" cy="0"/>
+        </a:xfrm>
+      </p:grpSpPr>
+      <p:sp>
+        <p:nvSpPr>
+          <p:cNvPr id="2" name="Text 0"/>
+          <p:cNvSpPr/>
+          <p:nvPr>
+            <p:ph idx="100" type="title" hasCustomPrompt="1"/>
+          </p:nvPr>
+        </p:nvSpPr>
+        <p:spPr>
+          <a:xfrm>
+            <a:off x="548640" y="365760"/>
+            <a:ext cx="11064240" cy="731520"/>
+          </a:xfrm>
+          <a:prstGeom prst="rect">
+            <a:avLst/>
+          </a:prstGeom>
+          <a:noFill/>
+          <a:ln/>
+        </p:spPr>
+        <p:txBody>
+          <a:bodyPr wrap="square" rtlCol="0"/>
+          <a:lstStyle/>
+          <a:p>
+            <a:pPr algn="l" indent="0" marL="0">
+              <a:buNone/>
+            </a:pPr>
+            <a:r>
+              <a:rPr lang="en-US" sz="3200" b="1" dirty="0">
+                <a:solidFill>
+                  <a:schemeClr val="tx2"/>
+                </a:solidFill>
+              </a:rPr>
+              <a:t>The road ahead</a:t>
+            </a:r>
+            <a:endParaRPr lang="en-US" sz="3200" dirty="0"/>
+          </a:p>
+        </p:txBody>
+      </p:sp>
+      <p:sp>
+        <p:nvSpPr>
+          <p:cNvPr id="3" name="Agreement with Norsk helsenett card"/>
+          <p:cNvSpPr/>
+          <p:nvPr/>
+        </p:nvSpPr>
+        <p:spPr>
+          <a:xfrm>
+            <a:off x="548640" y="1463040"/>
+            <a:ext cx="2567178" cy="2926080"/>
+          </a:xfrm>
+          <a:prstGeom prst="roundRect">
+            <a:avLst>
+              <a:gd name="adj" fmla="val 4274"/>
+            </a:avLst>
+          </a:prstGeom>
+          <a:solidFill>
+            <a:schemeClr val="bg1"/>
+          </a:solidFill>
+          <a:ln w="9525">
+            <a:solidFill>
+              <a:srgbClr val="D2DDD5"/>
+            </a:solidFill>
+            <a:prstDash val="solid"/>
+          </a:ln>
+        </p:spPr>
+      </p:sp>
+      <p:sp>
+        <p:nvSpPr>
+          <p:cNvPr id="4" name="Agreement with Norsk helsenett icon ring"/>
+          <p:cNvSpPr/>
+          <p:nvPr/>
+        </p:nvSpPr>
+        <p:spPr>
+          <a:xfrm>
+            <a:off x="822960" y="1737360"/>
+            <a:ext cx="640080" cy="640080"/>
+          </a:xfrm>
+          <a:prstGeom prst="ellipse">
+            <a:avLst/>
+          </a:prstGeom>
+          <a:solidFill>
+            <a:schemeClr val="accent1"/>
+          </a:solidFill>
+          <a:ln/>
+        </p:spPr>
+      </p:sp>
+      <p:pic>
+        <p:nvPicPr>
+          <p:cNvPr id="5" name="Agreement with Norsk helsenett icon" descr="Agreement with Norsk helsenett">    </p:cNvPr>
+          <p:cNvPicPr>
+            <a:picLocks noChangeAspect="1"/>
+          </p:cNvPicPr>
+          <p:nvPr/>
+        </p:nvPicPr>
+        <p:blipFill>
+          <a:blip r:embed="rId1"/>
+          <a:stretch>
+            <a:fillRect/>
+          </a:stretch>
+        </p:blipFill>
+        <p:spPr>
+          <a:xfrm>
+            <a:off x="960120" y="1874520"/>
+            <a:ext cx="365760" cy="365760"/>
+          </a:xfrm>
+          <a:prstGeom prst="rect">
+            <a:avLst/>
+          </a:prstGeom>
+        </p:spPr>
+      </p:pic>
+      <p:sp>
+        <p:nvSpPr>
+          <p:cNvPr id="6" name="Text 3"/>
+          <p:cNvSpPr txBox="1"/>
+          <p:nvPr/>
+        </p:nvSpPr>
+        <p:spPr>
+          <a:xfrm>
+            <a:off x="822960" y="2514600"/>
+            <a:ext cx="2018538" cy="594360"/>
+          </a:xfrm>
+          <a:prstGeom prst="rect">
+            <a:avLst/>
+          </a:prstGeom>
+          <a:noFill/>
+          <a:ln/>
+        </p:spPr>
+        <p:txBody>
+          <a:bodyPr wrap="square" lIns="0" tIns="0" rIns="0" bIns="0" rtlCol="0" anchor="t"/>
+          <a:lstStyle/>
+          <a:p>
+            <a:pPr indent="0" marL="0">
+              <a:buNone/>
+            </a:pPr>
+            <a:r>
+              <a:rPr lang="en-US" sz="1700" b="1" dirty="0">
+                <a:solidFill>
+                  <a:schemeClr val="tx2"/>
+                </a:solidFill>
+              </a:rPr>
+              <a:t>Agreement with Norsk helsenett</a:t>
+            </a:r>
+            <a:endParaRPr lang="en-US" sz="1700" dirty="0"/>
+          </a:p>
+        </p:txBody>
+      </p:sp>
+      <p:sp>
+        <p:nvSpPr>
+          <p:cNvPr id="7" name="Text 4"/>
+          <p:cNvSpPr txBox="1"/>
+          <p:nvPr/>
+        </p:nvSpPr>
+        <p:spPr>
+          <a:xfrm>
+            <a:off x="822960" y="3154680"/>
+            <a:ext cx="2018538" cy="1097280"/>
+          </a:xfrm>
+          <a:prstGeom prst="rect">
+            <a:avLst/>
+          </a:prstGeom>
+          <a:noFill/>
+          <a:ln/>
+        </p:spPr>
+        <p:txBody>
+          <a:bodyPr wrap="square" lIns="0" tIns="0" rIns="0" bIns="0" rtlCol="0" anchor="t"/>
+          <a:lstStyle/>
+          <a:p>
+            <a:pPr indent="0" marL="0">
+              <a:buNone/>
+            </a:pPr>
+            <a:r>
+              <a:rPr lang="en-US" sz="1400" dirty="0">
+                <a:solidFill>
+                  <a:schemeClr val="tx1"/>
+                </a:solidFill>
+              </a:rPr>
+              <a:t>Membership, HelseID and approval – the interface is ready.</a:t>
+            </a:r>
+            <a:endParaRPr lang="en-US" sz="1400" dirty="0"/>
+          </a:p>
+        </p:txBody>
+      </p:sp>
+      <p:sp>
+        <p:nvSpPr>
+          <p:cNvPr id="8" name="Real health-worker ID cards card"/>
+          <p:cNvSpPr/>
+          <p:nvPr/>
+        </p:nvSpPr>
+        <p:spPr>
+          <a:xfrm>
+            <a:off x="3390138" y="1463040"/>
+            <a:ext cx="2567178" cy="2926080"/>
+          </a:xfrm>
+          <a:prstGeom prst="roundRect">
+            <a:avLst>
+              <a:gd name="adj" fmla="val 4274"/>
+            </a:avLst>
+          </a:prstGeom>
+          <a:solidFill>
+            <a:schemeClr val="bg1"/>
+          </a:solidFill>
+          <a:ln w="9525">
+            <a:solidFill>
+              <a:srgbClr val="D2DDD5"/>
+            </a:solidFill>
+            <a:prstDash val="solid"/>
+          </a:ln>
+        </p:spPr>
+      </p:sp>
+      <p:sp>
+        <p:nvSpPr>
+          <p:cNvPr id="9" name="Real health-worker ID cards icon ring"/>
+          <p:cNvSpPr/>
+          <p:nvPr/>
+        </p:nvSpPr>
+        <p:spPr>
+          <a:xfrm>
+            <a:off x="3664458" y="1737360"/>
+            <a:ext cx="640080" cy="640080"/>
+          </a:xfrm>
+          <a:prstGeom prst="ellipse">
+            <a:avLst/>
+          </a:prstGeom>
+          <a:solidFill>
+            <a:schemeClr val="accent1"/>
+          </a:solidFill>
+          <a:ln/>
+        </p:spPr>
+      </p:sp>
+      <p:pic>
+        <p:nvPicPr>
+          <p:cNvPr id="10" name="Real health-worker ID cards icon" descr="Real health-worker ID cards">    </p:cNvPr>
+          <p:cNvPicPr>
+            <a:picLocks noChangeAspect="1"/>
+          </p:cNvPicPr>
+          <p:nvPr/>
+        </p:nvPicPr>
+        <p:blipFill>
+          <a:blip r:embed="rId2"/>
+          <a:stretch>
+            <a:fillRect/>
+          </a:stretch>
+        </p:blipFill>
+        <p:spPr>
+          <a:xfrm>
+            <a:off x="3801618" y="1874520"/>
+            <a:ext cx="365760" cy="365760"/>
+          </a:xfrm>
+          <a:prstGeom prst="rect">
+            <a:avLst/>
+          </a:prstGeom>
+        </p:spPr>
+      </p:pic>
+      <p:sp>
+        <p:nvSpPr>
+          <p:cNvPr id="11" name="Text 7"/>
+          <p:cNvSpPr txBox="1"/>
+          <p:nvPr/>
+        </p:nvSpPr>
+        <p:spPr>
+          <a:xfrm>
+            <a:off x="3664458" y="2514600"/>
+            <a:ext cx="2018538" cy="594360"/>
+          </a:xfrm>
+          <a:prstGeom prst="rect">
+            <a:avLst/>
+          </a:prstGeom>
+          <a:noFill/>
+          <a:ln/>
+        </p:spPr>
+        <p:txBody>
+          <a:bodyPr wrap="square" lIns="0" tIns="0" rIns="0" bIns="0" rtlCol="0" anchor="t"/>
+          <a:lstStyle/>
+          <a:p>
+            <a:pPr indent="0" marL="0">
+              <a:buNone/>
+            </a:pPr>
+            <a:r>
+              <a:rPr lang="en-US" sz="1700" b="1" dirty="0">
+                <a:solidFill>
+                  <a:schemeClr val="tx2"/>
+                </a:solidFill>
+              </a:rPr>
+              <a:t>Real health-worker ID cards</a:t>
+            </a:r>
+            <a:endParaRPr lang="en-US" sz="1700" dirty="0"/>
+          </a:p>
+        </p:txBody>
+      </p:sp>
+      <p:sp>
+        <p:nvSpPr>
+          <p:cNvPr id="12" name="Text 8"/>
+          <p:cNvSpPr txBox="1"/>
+          <p:nvPr/>
+        </p:nvSpPr>
+        <p:spPr>
+          <a:xfrm>
+            <a:off x="3664458" y="3154680"/>
+            <a:ext cx="2018538" cy="1097280"/>
+          </a:xfrm>
+          <a:prstGeom prst="rect">
+            <a:avLst/>
+          </a:prstGeom>
+          <a:noFill/>
+          <a:ln/>
+        </p:spPr>
+        <p:txBody>
+          <a:bodyPr wrap="square" lIns="0" tIns="0" rIns="0" bIns="0" rtlCol="0" anchor="t"/>
+          <a:lstStyle/>
+          <a:p>
+            <a:pPr indent="0" marL="0">
+              <a:buNone/>
+            </a:pPr>
+            <a:r>
+              <a:rPr lang="en-US" sz="1400" dirty="0">
+                <a:solidFill>
+                  <a:schemeClr val="tx1"/>
+                </a:solidFill>
+              </a:rPr>
+              <a:t>Replace the simulated card reader with a real one (PKCS#11).</a:t>
+            </a:r>
+            <a:endParaRPr lang="en-US" sz="1400" dirty="0"/>
+          </a:p>
+        </p:txBody>
+      </p:sp>
+      <p:sp>
+        <p:nvSpPr>
+          <p:cNvPr id="13" name="Installation to disk card"/>
+          <p:cNvSpPr/>
+          <p:nvPr/>
+        </p:nvSpPr>
+        <p:spPr>
+          <a:xfrm>
+            <a:off x="6231636" y="1463040"/>
+            <a:ext cx="2567178" cy="2926080"/>
+          </a:xfrm>
+          <a:prstGeom prst="roundRect">
+            <a:avLst>
+              <a:gd name="adj" fmla="val 4274"/>
+            </a:avLst>
+          </a:prstGeom>
+          <a:solidFill>
+            <a:schemeClr val="bg1"/>
+          </a:solidFill>
+          <a:ln w="9525">
+            <a:solidFill>
+              <a:srgbClr val="D2DDD5"/>
+            </a:solidFill>
+            <a:prstDash val="solid"/>
+          </a:ln>
+        </p:spPr>
+      </p:sp>
+      <p:sp>
+        <p:nvSpPr>
+          <p:cNvPr id="14" name="Installation to disk icon ring"/>
+          <p:cNvSpPr/>
+          <p:nvPr/>
+        </p:nvSpPr>
+        <p:spPr>
+          <a:xfrm>
+            <a:off x="6505956" y="1737360"/>
+            <a:ext cx="640080" cy="640080"/>
+          </a:xfrm>
+          <a:prstGeom prst="ellipse">
+            <a:avLst/>
+          </a:prstGeom>
+          <a:solidFill>
+            <a:schemeClr val="accent1"/>
+          </a:solidFill>
+          <a:ln/>
+        </p:spPr>
+      </p:sp>
+      <p:pic>
+        <p:nvPicPr>
+          <p:cNvPr id="15" name="Installation to disk icon" descr="Installation to disk">    </p:cNvPr>
+          <p:cNvPicPr>
+            <a:picLocks noChangeAspect="1"/>
+          </p:cNvPicPr>
+          <p:nvPr/>
+        </p:nvPicPr>
+        <p:blipFill>
+          <a:blip r:embed="rId3"/>
+          <a:stretch>
+            <a:fillRect/>
+          </a:stretch>
+        </p:blipFill>
+        <p:spPr>
+          <a:xfrm>
+            <a:off x="6643116" y="1874520"/>
+            <a:ext cx="365760" cy="365760"/>
+          </a:xfrm>
+          <a:prstGeom prst="rect">
+            <a:avLst/>
+          </a:prstGeom>
+        </p:spPr>
+      </p:pic>
+      <p:sp>
+        <p:nvSpPr>
+          <p:cNvPr id="16" name="Text 11"/>
+          <p:cNvSpPr txBox="1"/>
+          <p:nvPr/>
+        </p:nvSpPr>
+        <p:spPr>
+          <a:xfrm>
+            <a:off x="6505956" y="2514600"/>
+            <a:ext cx="2018538" cy="594360"/>
+          </a:xfrm>
+          <a:prstGeom prst="rect">
+            <a:avLst/>
+          </a:prstGeom>
+          <a:noFill/>
+          <a:ln/>
+        </p:spPr>
+        <p:txBody>
+          <a:bodyPr wrap="square" lIns="0" tIns="0" rIns="0" bIns="0" rtlCol="0" anchor="t"/>
+          <a:lstStyle/>
+          <a:p>
+            <a:pPr indent="0" marL="0">
+              <a:buNone/>
+            </a:pPr>
+            <a:r>
+              <a:rPr lang="en-US" sz="1700" b="1" dirty="0">
+                <a:solidFill>
+                  <a:schemeClr val="tx2"/>
+                </a:solidFill>
+              </a:rPr>
+              <a:t>Installation to disk</a:t>
+            </a:r>
+            <a:endParaRPr lang="en-US" sz="1700" dirty="0"/>
+          </a:p>
+        </p:txBody>
+      </p:sp>
+      <p:sp>
+        <p:nvSpPr>
+          <p:cNvPr id="17" name="Text 12"/>
+          <p:cNvSpPr txBox="1"/>
+          <p:nvPr/>
+        </p:nvSpPr>
+        <p:spPr>
+          <a:xfrm>
+            <a:off x="6505956" y="3154680"/>
+            <a:ext cx="2018538" cy="1097280"/>
+          </a:xfrm>
+          <a:prstGeom prst="rect">
+            <a:avLst/>
+          </a:prstGeom>
+          <a:noFill/>
+          <a:ln/>
+        </p:spPr>
+        <p:txBody>
+          <a:bodyPr wrap="square" lIns="0" tIns="0" rIns="0" bIns="0" rtlCol="0" anchor="t"/>
+          <a:lstStyle/>
+          <a:p>
+            <a:pPr indent="0" marL="0">
+              <a:buNone/>
+            </a:pPr>
+            <a:r>
+              <a:rPr lang="en-US" sz="1400" dirty="0">
+                <a:solidFill>
+                  <a:schemeClr val="tx1"/>
+                </a:solidFill>
+              </a:rPr>
+              <a:t>An installation mode for IT, with full disk encryption.</a:t>
+            </a:r>
+            <a:endParaRPr lang="en-US" sz="1400" dirty="0"/>
+          </a:p>
+        </p:txBody>
+      </p:sp>
+      <p:sp>
+        <p:nvSpPr>
+          <p:cNvPr id="18" name="Security audit card"/>
+          <p:cNvSpPr/>
+          <p:nvPr/>
+        </p:nvSpPr>
+        <p:spPr>
+          <a:xfrm>
+            <a:off x="9073134" y="1463040"/>
+            <a:ext cx="2567178" cy="2926080"/>
+          </a:xfrm>
+          <a:prstGeom prst="roundRect">
+            <a:avLst>
+              <a:gd name="adj" fmla="val 4274"/>
+            </a:avLst>
+          </a:prstGeom>
+          <a:solidFill>
+            <a:schemeClr val="bg1"/>
+          </a:solidFill>
+          <a:ln w="9525">
+            <a:solidFill>
+              <a:srgbClr val="D2DDD5"/>
+            </a:solidFill>
+            <a:prstDash val="solid"/>
+          </a:ln>
+        </p:spPr>
+      </p:sp>
+      <p:sp>
+        <p:nvSpPr>
+          <p:cNvPr id="19" name="Security audit icon ring"/>
+          <p:cNvSpPr/>
+          <p:nvPr/>
+        </p:nvSpPr>
+        <p:spPr>
+          <a:xfrm>
+            <a:off x="9347454" y="1737360"/>
+            <a:ext cx="640080" cy="640080"/>
+          </a:xfrm>
+          <a:prstGeom prst="ellipse">
+            <a:avLst/>
+          </a:prstGeom>
+          <a:solidFill>
+            <a:schemeClr val="accent1"/>
+          </a:solidFill>
+          <a:ln/>
+        </p:spPr>
+      </p:sp>
+      <p:pic>
+        <p:nvPicPr>
+          <p:cNvPr id="20" name="Security audit icon" descr="Security audit">    </p:cNvPr>
+          <p:cNvPicPr>
+            <a:picLocks noChangeAspect="1"/>
+          </p:cNvPicPr>
+          <p:nvPr/>
+        </p:nvPicPr>
+        <p:blipFill>
+          <a:blip r:embed="rId4"/>
+          <a:stretch>
+            <a:fillRect/>
+          </a:stretch>
+        </p:blipFill>
+        <p:spPr>
+          <a:xfrm>
+            <a:off x="9484614" y="1874520"/>
+            <a:ext cx="365760" cy="365760"/>
+          </a:xfrm>
+          <a:prstGeom prst="rect">
+            <a:avLst/>
+          </a:prstGeom>
+        </p:spPr>
+      </p:pic>
+      <p:sp>
+        <p:nvSpPr>
+          <p:cNvPr id="21" name="Text 15"/>
+          <p:cNvSpPr txBox="1"/>
+          <p:nvPr/>
+        </p:nvSpPr>
+        <p:spPr>
+          <a:xfrm>
+            <a:off x="9347454" y="2514600"/>
+            <a:ext cx="2018538" cy="594360"/>
+          </a:xfrm>
+          <a:prstGeom prst="rect">
+            <a:avLst/>
+          </a:prstGeom>
+          <a:noFill/>
+          <a:ln/>
+        </p:spPr>
+        <p:txBody>
+          <a:bodyPr wrap="square" lIns="0" tIns="0" rIns="0" bIns="0" rtlCol="0" anchor="t"/>
+          <a:lstStyle/>
+          <a:p>
+            <a:pPr indent="0" marL="0">
+              <a:buNone/>
+            </a:pPr>
+            <a:r>
+              <a:rPr lang="en-US" sz="1700" b="1" dirty="0">
+                <a:solidFill>
+                  <a:schemeClr val="tx2"/>
+                </a:solidFill>
+              </a:rPr>
+              <a:t>Security audit</a:t>
+            </a:r>
+            <a:endParaRPr lang="en-US" sz="1700" dirty="0"/>
+          </a:p>
+        </p:txBody>
+      </p:sp>
+      <p:sp>
+        <p:nvSpPr>
+          <p:cNvPr id="22" name="Text 16"/>
+          <p:cNvSpPr txBox="1"/>
+          <p:nvPr/>
+        </p:nvSpPr>
+        <p:spPr>
+          <a:xfrm>
+            <a:off x="9347454" y="3154680"/>
+            <a:ext cx="2018538" cy="1097280"/>
+          </a:xfrm>
+          <a:prstGeom prst="rect">
+            <a:avLst/>
+          </a:prstGeom>
+          <a:noFill/>
+          <a:ln/>
+        </p:spPr>
+        <p:txBody>
+          <a:bodyPr wrap="square" lIns="0" tIns="0" rIns="0" bIns="0" rtlCol="0" anchor="t"/>
+          <a:lstStyle/>
+          <a:p>
+            <a:pPr indent="0" marL="0">
+              <a:buNone/>
+            </a:pPr>
+            <a:r>
+              <a:rPr lang="en-US" sz="1400" dirty="0">
+                <a:solidFill>
+                  <a:schemeClr val="tx1"/>
+                </a:solidFill>
+              </a:rPr>
+              <a:t>External penetration test, Normen, GDPR and MDR assessment.</a:t>
+            </a:r>
+            <a:endParaRPr lang="en-US" sz="1400" dirty="0"/>
+          </a:p>
+        </p:txBody>
+      </p:sp>
+      <p:sp>
+        <p:nvSpPr>
+          <p:cNvPr id="25" name="Slide Number Placeholder 0"/>
+          <p:cNvSpPr>
+            <a:spLocks noGrp="1"/>
+          </p:cNvSpPr>
+          <p:nvPr>
+            <p:ph type="sldNum" sz="quarter" idx="4294967295"/>
+          </p:nvPr>
+        </p:nvSpPr>
+        <p:spPr>
+          <a:xfrm>
+            <a:off x="11247120" y="6400800"/>
+            <a:ext cx="457200" cy="274320"/>
+          </a:xfrm>
+          <a:prstGeom prst="rect">
+            <a:avLst/>
+          </a:prstGeom>
+          <a:extLst>
+            <a:ext uri="{C572A759-6A51-4108-AA02-DFA0A04FC94B}">
+              <ma14:wrappingTextBoxFlag xmlns:ma14="http://schemas.microsoft.com/office/mac/drawingml/2011/main" val="0"/>
+            </a:ext>
+          </a:extLst>
+        </p:spPr>
+        <p:txBody>
+          <a:bodyPr/>
+          <a:lstStyle>
+            <a:lvl1pPr>
+              <a:defRPr sz="1000">
+                <a:solidFill>
+                  <a:schemeClr val="accent6"/>
+                </a:solidFill>
+              </a:defRPr>
+            </a:lvl1pPr>
+          </a:lstStyle>
+          <a:p>
+            <a:pPr algn="r"/>
+            <a:fld id="{F7021451-1387-4CA6-816F-3879F97B5CBC}" type="slidenum">
+              <a:rPr b="0" lang="en-US"/>
+              <a:t>34</a:t>
+            </a:fld>
+            <a:endParaRPr lang="en-US"/>
+          </a:p>
+        </p:txBody>
+      </p:sp>
+    </p:spTree>
+  </p:cSld>
+  <p:clrMapOvr>
+    <a:masterClrMapping/>
+  </p:clrMapOvr>
+</p:sld>
+</file>
+
 <file path=ppt/slides/slide4.xml><?xml version="1.0" encoding="utf-8"?>
 <p:sld xmlns:a="http://schemas.openxmlformats.org/drawingml/2006/main" xmlns:r="http://schemas.openxmlformats.org/officeDocument/2006/relationships" xmlns:p="http://schemas.openxmlformats.org/presentationml/2006/main">
   <p:cSld name="Slide 4">
@@ -12431,7 +15470,39 @@
                   <a:schemeClr val="tx1"/>
                 </a:solidFill>
               </a:rPr>
-              <a:t> you are logged out at once.</a:t>
+              <a:t> the screen locks at once. Back within 15 minutes with the same card and PIN, and nothing is lost.</a:t>
+            </a:r>
+            <a:endParaRPr lang="en-US" sz="1500" dirty="0"/>
+          </a:p>
+          <a:p>
+            <a:pPr marL="342900" indent="-342900">
+              <a:spcAft>
+                <a:spcPts val="800"/>
+              </a:spcAft>
+              <a:buSzPct val="100000"/>
+              <a:buChar char="•"/>
+            </a:pPr>
+            <a:r>
+              <a:rPr lang="en-US" sz="1500" b="1" dirty="0">
+                <a:solidFill>
+                  <a:schemeClr val="tx1"/>
+                </a:solidFill>
+              </a:rPr>
+              <a:t>Someone else logs in,</a:t>
+            </a:r>
+            <a:pPr indent="0" marL="0">
+              <a:spcAft>
+                <a:spcPts val="800"/>
+              </a:spcAft>
+              <a:buNone/>
+            </a:pPr>
+            <a:r>
+              <a:rPr lang="en-US" sz="1500" dirty="0">
+                <a:solidFill>
+                  <a:schemeClr val="tx1"/>
+                </a:solidFill>
+              </a:rPr>
+              <a:t> or 15 minutes pass: the session ends and the home folder is wiped.</a:t>
             </a:r>
             <a:endParaRPr lang="en-US" sz="1500" dirty="0"/>
           </a:p>
@@ -12595,7 +15666,7 @@
                   <a:schemeClr val="tx2"/>
                 </a:solidFill>
               </a:rPr>
-              <a:t>The workplace follows the PC</a:t>
+              <a:t>Norwegian or English</a:t>
             </a:r>
             <a:endParaRPr lang="en-US" sz="3200" dirty="0"/>
           </a:p>
@@ -12603,14 +15674,134 @@
       </p:sp>
       <p:sp>
         <p:nvSpPr>
-          <p:cNvPr id="3" name="The same doctor at Ullevål frame"/>
+          <p:cNvPr id="3" name="Text 0"/>
           <p:cNvSpPr/>
-          <p:nvPr/>
+          <p:nvPr>
+            <p:ph idx="101" type="body" hasCustomPrompt="1"/>
+          </p:nvPr>
         </p:nvSpPr>
         <p:spPr>
           <a:xfrm>
             <a:off x="548640" y="1371600"/>
-            <a:ext cx="5394960" cy="3203258"/>
+            <a:ext cx="3657600" cy="4754880"/>
+          </a:xfrm>
+          <a:prstGeom prst="rect">
+            <a:avLst/>
+          </a:prstGeom>
+          <a:noFill/>
+          <a:ln/>
+        </p:spPr>
+        <p:txBody>
+          <a:bodyPr wrap="square" rtlCol="0" anchor="t"/>
+          <a:lstStyle/>
+          <a:p>
+            <a:pPr marL="342900" indent="-342900">
+              <a:spcAft>
+                <a:spcPts val="800"/>
+              </a:spcAft>
+              <a:buSzPct val="100000"/>
+              <a:buChar char="•"/>
+            </a:pPr>
+            <a:r>
+              <a:rPr lang="en-US" sz="1500" b="1" dirty="0">
+                <a:solidFill>
+                  <a:schemeClr val="tx1"/>
+                </a:solidFill>
+              </a:rPr>
+              <a:t>One button</a:t>
+            </a:r>
+            <a:pPr indent="0" marL="0">
+              <a:spcAft>
+                <a:spcPts val="800"/>
+              </a:spcAft>
+              <a:buNone/>
+            </a:pPr>
+            <a:r>
+              <a:rPr lang="en-US" sz="1500" dirty="0">
+                <a:solidFill>
+                  <a:schemeClr val="tx1"/>
+                </a:solidFill>
+              </a:rPr>
+              <a:t> on the login screen: Norsk or English.</a:t>
+            </a:r>
+            <a:endParaRPr lang="en-US" sz="1500" dirty="0"/>
+          </a:p>
+          <a:p>
+            <a:pPr marL="342900" indent="-342900">
+              <a:spcAft>
+                <a:spcPts val="800"/>
+              </a:spcAft>
+              <a:buSzPct val="100000"/>
+              <a:buChar char="•"/>
+            </a:pPr>
+            <a:r>
+              <a:rPr lang="en-US" sz="1500" b="1" dirty="0">
+                <a:solidFill>
+                  <a:schemeClr val="tx1"/>
+                </a:solidFill>
+              </a:rPr>
+              <a:t>The whole session follows:</a:t>
+            </a:r>
+            <a:pPr indent="0" marL="0">
+              <a:spcAft>
+                <a:spcPts val="800"/>
+              </a:spcAft>
+              <a:buNone/>
+            </a:pPr>
+            <a:r>
+              <a:rPr lang="en-US" sz="1500" dirty="0">
+                <a:solidFill>
+                  <a:schemeClr val="tx1"/>
+                </a:solidFill>
+              </a:rPr>
+              <a:t> menus, the Start menu, the browser and the Medicus apps.</a:t>
+            </a:r>
+            <a:endParaRPr lang="en-US" sz="1500" dirty="0"/>
+          </a:p>
+          <a:p>
+            <a:pPr marL="342900" indent="-342900">
+              <a:spcAft>
+                <a:spcPts val="800"/>
+              </a:spcAft>
+              <a:buSzPct val="100000"/>
+              <a:buChar char="•"/>
+            </a:pPr>
+            <a:r>
+              <a:rPr lang="en-US" sz="1500" b="1" dirty="0">
+                <a:solidFill>
+                  <a:schemeClr val="tx1"/>
+                </a:solidFill>
+              </a:rPr>
+              <a:t>Northern Sámi keyboard:</a:t>
+            </a:r>
+            <a:pPr indent="0" marL="0">
+              <a:spcAft>
+                <a:spcPts val="800"/>
+              </a:spcAft>
+              <a:buNone/>
+            </a:pPr>
+            <a:r>
+              <a:rPr lang="en-US" sz="1500" dirty="0">
+                <a:solidFill>
+                  <a:schemeClr val="tx1"/>
+                </a:solidFill>
+              </a:rPr>
+              <a:t> Alt+Shift switches between the Norwegian and the Sámi layout.</a:t>
+            </a:r>
+            <a:endParaRPr lang="en-US" sz="1500" dirty="0"/>
+          </a:p>
+        </p:txBody>
+      </p:sp>
+      <p:sp>
+        <p:nvSpPr>
+          <p:cNvPr id="4" name="Norwegian or English frame"/>
+          <p:cNvSpPr/>
+          <p:nvPr/>
+        </p:nvSpPr>
+        <p:spPr>
+          <a:xfrm>
+            <a:off x="4526280" y="1371600"/>
+            <a:ext cx="7132320" cy="4457700"/>
           </a:xfrm>
           <a:prstGeom prst="rect">
             <a:avLst/>
@@ -12635,7 +15826,7 @@
       </p:sp>
       <p:pic>
         <p:nvPicPr>
-          <p:cNvPr id="4" name="The same doctor at Ullevål" descr="The same doctor at Ullevål">    </p:cNvPr>
+          <p:cNvPr id="5" name="Norwegian or English" descr="Norwegian or English">    </p:cNvPr>
           <p:cNvPicPr>
             <a:picLocks noChangeAspect="1"/>
           </p:cNvPicPr>
@@ -12649,178 +15840,14 @@
         </p:blipFill>
         <p:spPr>
           <a:xfrm>
-            <a:off x="548640" y="1371600"/>
-            <a:ext cx="5394960" cy="3203258"/>
+            <a:off x="4526280" y="1371600"/>
+            <a:ext cx="7132320" cy="4457700"/>
           </a:xfrm>
           <a:prstGeom prst="rect">
             <a:avLst/>
           </a:prstGeom>
         </p:spPr>
       </p:pic>
-      <p:sp>
-        <p:nvSpPr>
-          <p:cNvPr id="5" name="The same doctor at St. Olavs frame"/>
-          <p:cNvSpPr/>
-          <p:nvPr/>
-        </p:nvSpPr>
-        <p:spPr>
-          <a:xfrm>
-            <a:off x="6245352" y="1371600"/>
-            <a:ext cx="5394960" cy="3203258"/>
-          </a:xfrm>
-          <a:prstGeom prst="rect">
-            <a:avLst/>
-          </a:prstGeom>
-          <a:solidFill>
-            <a:schemeClr val="bg1"/>
-          </a:solidFill>
-          <a:ln w="9525">
-            <a:solidFill>
-              <a:srgbClr val="D2DDD5"/>
-            </a:solidFill>
-            <a:prstDash val="solid"/>
-          </a:ln>
-          <a:effectLst>
-            <a:outerShdw sx="100000" sy="100000" kx="0" ky="0" algn="bl" rotWithShape="0" blurRad="101600" dist="38100" dir="5400000">
-              <a:srgbClr val="000000">
-                <a:alpha val="25000"/>
-              </a:srgbClr>
-            </a:outerShdw>
-          </a:effectLst>
-        </p:spPr>
-      </p:sp>
-      <p:pic>
-        <p:nvPicPr>
-          <p:cNvPr id="6" name="The same doctor at St. Olavs" descr="The same doctor at St. Olavs">    </p:cNvPr>
-          <p:cNvPicPr>
-            <a:picLocks noChangeAspect="1"/>
-          </p:cNvPicPr>
-          <p:nvPr/>
-        </p:nvPicPr>
-        <p:blipFill>
-          <a:blip r:embed="rId2"/>
-          <a:stretch>
-            <a:fillRect/>
-          </a:stretch>
-        </p:blipFill>
-        <p:spPr>
-          <a:xfrm>
-            <a:off x="6245352" y="1371600"/>
-            <a:ext cx="5394960" cy="3203258"/>
-          </a:xfrm>
-          <a:prstGeom prst="rect">
-            <a:avLst/>
-          </a:prstGeom>
-        </p:spPr>
-      </p:pic>
-      <p:sp>
-        <p:nvSpPr>
-          <p:cNvPr id="7" name="Text 3"/>
-          <p:cNvSpPr txBox="1"/>
-          <p:nvPr/>
-        </p:nvSpPr>
-        <p:spPr>
-          <a:xfrm>
-            <a:off x="548640" y="4892040"/>
-            <a:ext cx="5394960" cy="365760"/>
-          </a:xfrm>
-          <a:prstGeom prst="rect">
-            <a:avLst/>
-          </a:prstGeom>
-          <a:noFill/>
-          <a:ln/>
-        </p:spPr>
-        <p:txBody>
-          <a:bodyPr wrap="square" rtlCol="0" anchor="ctr"/>
-          <a:lstStyle/>
-          <a:p>
-            <a:pPr indent="0" marL="0">
-              <a:buNone/>
-            </a:pPr>
-            <a:r>
-              <a:rPr lang="en-US" sz="1500" b="1" dirty="0">
-                <a:solidFill>
-                  <a:schemeClr val="tx2"/>
-                </a:solidFill>
-              </a:rPr>
-              <a:t>Ullevål: Senior consultant, cardiology</a:t>
-            </a:r>
-            <a:endParaRPr lang="en-US" sz="1500" dirty="0"/>
-          </a:p>
-        </p:txBody>
-      </p:sp>
-      <p:sp>
-        <p:nvSpPr>
-          <p:cNvPr id="8" name="Text 4"/>
-          <p:cNvSpPr txBox="1"/>
-          <p:nvPr/>
-        </p:nvSpPr>
-        <p:spPr>
-          <a:xfrm>
-            <a:off x="6245352" y="4892040"/>
-            <a:ext cx="5394960" cy="365760"/>
-          </a:xfrm>
-          <a:prstGeom prst="rect">
-            <a:avLst/>
-          </a:prstGeom>
-          <a:noFill/>
-          <a:ln/>
-        </p:spPr>
-        <p:txBody>
-          <a:bodyPr wrap="square" rtlCol="0" anchor="ctr"/>
-          <a:lstStyle/>
-          <a:p>
-            <a:pPr indent="0" marL="0">
-              <a:buNone/>
-            </a:pPr>
-            <a:r>
-              <a:rPr lang="en-US" sz="1500" b="1" dirty="0">
-                <a:solidFill>
-                  <a:schemeClr val="tx2"/>
-                </a:solidFill>
-              </a:rPr>
-              <a:t>St. Olavs: Visiting consultant, cardiology</a:t>
-            </a:r>
-            <a:endParaRPr lang="en-US" sz="1500" dirty="0"/>
-          </a:p>
-        </p:txBody>
-      </p:sp>
-      <p:sp>
-        <p:nvSpPr>
-          <p:cNvPr id="9" name="Text 5"/>
-          <p:cNvSpPr txBox="1"/>
-          <p:nvPr/>
-        </p:nvSpPr>
-        <p:spPr>
-          <a:xfrm>
-            <a:off x="548640" y="5440680"/>
-            <a:ext cx="11064240" cy="457200"/>
-          </a:xfrm>
-          <a:prstGeom prst="rect">
-            <a:avLst/>
-          </a:prstGeom>
-          <a:noFill/>
-          <a:ln/>
-        </p:spPr>
-        <p:txBody>
-          <a:bodyPr wrap="square" rtlCol="0" anchor="ctr"/>
-          <a:lstStyle/>
-          <a:p>
-            <a:pPr indent="0" marL="0">
-              <a:buNone/>
-            </a:pPr>
-            <a:r>
-              <a:rPr lang="en-US" sz="1500" dirty="0">
-                <a:solidFill>
-                  <a:schemeClr val="tx1"/>
-                </a:solidFill>
-              </a:rPr>
-              <a:t>The card says who you are. The PC says where you are. Your position is taken from that workplace.</a:t>
-            </a:r>
-            <a:endParaRPr lang="en-US" sz="1500" dirty="0"/>
-          </a:p>
-        </p:txBody>
-      </p:sp>
       <p:sp>
         <p:nvSpPr>
           <p:cNvPr id="25" name="Slide Number Placeholder 0"/>
